--- a/reports/apresentacao_executiva.pptx
+++ b/reports/apresentacao_executiva.pptx
@@ -13,9 +13,11 @@
     <p:sldId id="261" r:id="rId7"/>
     <p:sldId id="262" r:id="rId8"/>
     <p:sldId id="263" r:id="rId9"/>
+    <p:sldId id="264" r:id="rId10"/>
+    <p:sldId id="265" r:id="rId11"/>
   </p:sldIdLst>
   <p:notesMasterIdLst>
-    <p:notesMasterId r:id="rId10"/>
+    <p:notesMasterId r:id="rId12"/>
   </p:notesMasterIdLst>
   <p:sldSz cx="12192000" cy="6858000"/>
   <p:notesSz cx="6858000" cy="12192000"/>
@@ -354,6 +356,376 @@
     <c:plotArea>
       <c:layout/>
       <c:barChart>
+        <c:barDir val="col"/>
+        <c:grouping val="clustered"/>
+        <c:varyColors val="0"/>
+        <c:ser>
+          <c:idx val="0"/>
+          <c:order val="0"/>
+          <c:tx>
+            <c:strRef>
+              <c:f>Sheet1!$B$1</c:f>
+              <c:strCache>
+                <c:ptCount val="1"/>
+                <c:pt idx="0">
+                  <c:v>Treino</c:v>
+                </c:pt>
+              </c:strCache>
+            </c:strRef>
+          </c:tx>
+          <c:spPr>
+            <a:solidFill>
+              <a:srgbClr val="C3CEC9"/>
+            </a:solidFill>
+            <a:effectLst/>
+          </c:spPr>
+          <c:invertIfNegative val="0"/>
+          <c:dLbls>
+            <c:numFmt formatCode="0.00" sourceLinked="0"/>
+            <c:txPr>
+              <a:bodyPr/>
+              <a:lstStyle/>
+              <a:p>
+                <a:pPr>
+                  <a:defRPr b="0" i="0" strike="noStrike" sz="1000" u="none">
+                    <a:solidFill>
+                      <a:srgbClr val="1E2B27"/>
+                    </a:solidFill>
+                    <a:latin typeface="Arial"/>
+                  </a:defRPr>
+                </a:pPr>
+              </a:p>
+            </c:txPr>
+            <c:showLegendKey val="0"/>
+            <c:showVal val="1"/>
+            <c:showCatName val="0"/>
+            <c:showSerName val="0"/>
+            <c:showPercent val="0"/>
+            <c:showBubbleSize val="0"/>
+            <c:showLeaderLines val="0"/>
+          </c:dLbls>
+          <c:cat>
+            <c:multiLvlStrRef>
+              <c:f>Sheet1!$A$2:$A$6</c:f>
+              <c:multiLvlStrCache>
+                <c:ptCount val="5"/>
+                <c:lvl>
+                  <c:pt idx="0">
+                    <c:v>Random Forest</c:v>
+                  </c:pt>
+                  <c:pt idx="1">
+                    <c:v>Extra Trees</c:v>
+                  </c:pt>
+                  <c:pt idx="2">
+                    <c:v>Gradient Boosting</c:v>
+                  </c:pt>
+                  <c:pt idx="3">
+                    <c:v>Reg. Logística</c:v>
+                  </c:pt>
+                  <c:pt idx="4">
+                    <c:v>Árvore de Decisão</c:v>
+                  </c:pt>
+                </c:lvl>
+              </c:multiLvlStrCache>
+            </c:multiLvlStrRef>
+          </c:cat>
+          <c:val>
+            <c:numRef>
+              <c:f>Sheet1!$B$2:$B$6</c:f>
+              <c:numCache>
+                <c:formatCode>General</c:formatCode>
+                <c:ptCount val="5"/>
+                <c:pt idx="0">
+                  <c:v>0.976</c:v>
+                </c:pt>
+                <c:pt idx="1">
+                  <c:v>0.95</c:v>
+                </c:pt>
+                <c:pt idx="2">
+                  <c:v>0.968</c:v>
+                </c:pt>
+                <c:pt idx="3">
+                  <c:v>0.907</c:v>
+                </c:pt>
+                <c:pt idx="4">
+                  <c:v>0.908</c:v>
+                </c:pt>
+              </c:numCache>
+            </c:numRef>
+          </c:val>
+        </c:ser>
+        <c:ser>
+          <c:idx val="1"/>
+          <c:order val="1"/>
+          <c:tx>
+            <c:strRef>
+              <c:f>Sheet1!$C$1</c:f>
+              <c:strCache>
+                <c:ptCount val="1"/>
+                <c:pt idx="0">
+                  <c:v>Validação</c:v>
+                </c:pt>
+              </c:strCache>
+            </c:strRef>
+          </c:tx>
+          <c:spPr>
+            <a:solidFill>
+              <a:srgbClr val="3E7A62"/>
+            </a:solidFill>
+            <a:effectLst/>
+          </c:spPr>
+          <c:invertIfNegative val="0"/>
+          <c:dLbls>
+            <c:numFmt formatCode="0.00" sourceLinked="0"/>
+            <c:txPr>
+              <a:bodyPr/>
+              <a:lstStyle/>
+              <a:p>
+                <a:pPr>
+                  <a:defRPr b="0" i="0" strike="noStrike" sz="1000" u="none">
+                    <a:solidFill>
+                      <a:srgbClr val="1E2B27"/>
+                    </a:solidFill>
+                    <a:latin typeface="Arial"/>
+                  </a:defRPr>
+                </a:pPr>
+              </a:p>
+            </c:txPr>
+            <c:showLegendKey val="0"/>
+            <c:showVal val="1"/>
+            <c:showCatName val="0"/>
+            <c:showSerName val="0"/>
+            <c:showPercent val="0"/>
+            <c:showBubbleSize val="0"/>
+            <c:showLeaderLines val="0"/>
+          </c:dLbls>
+          <c:cat>
+            <c:multiLvlStrRef>
+              <c:f>Sheet1!$A$2:$A$6</c:f>
+              <c:multiLvlStrCache>
+                <c:ptCount val="5"/>
+                <c:lvl>
+                  <c:pt idx="0">
+                    <c:v>Random Forest</c:v>
+                  </c:pt>
+                  <c:pt idx="1">
+                    <c:v>Extra Trees</c:v>
+                  </c:pt>
+                  <c:pt idx="2">
+                    <c:v>Gradient Boosting</c:v>
+                  </c:pt>
+                  <c:pt idx="3">
+                    <c:v>Reg. Logística</c:v>
+                  </c:pt>
+                  <c:pt idx="4">
+                    <c:v>Árvore de Decisão</c:v>
+                  </c:pt>
+                </c:lvl>
+              </c:multiLvlStrCache>
+            </c:multiLvlStrRef>
+          </c:cat>
+          <c:val>
+            <c:numRef>
+              <c:f>Sheet1!$C$2:$C$6</c:f>
+              <c:numCache>
+                <c:formatCode>General</c:formatCode>
+                <c:ptCount val="5"/>
+                <c:pt idx="0">
+                  <c:v>0.903</c:v>
+                </c:pt>
+                <c:pt idx="1">
+                  <c:v>0.903</c:v>
+                </c:pt>
+                <c:pt idx="2">
+                  <c:v>0.901</c:v>
+                </c:pt>
+                <c:pt idx="3">
+                  <c:v>0.901</c:v>
+                </c:pt>
+                <c:pt idx="4">
+                  <c:v>0.88</c:v>
+                </c:pt>
+              </c:numCache>
+            </c:numRef>
+          </c:val>
+        </c:ser>
+        <c:dLbls>
+          <c:numFmt formatCode="0.00" sourceLinked="0"/>
+          <c:txPr>
+            <a:bodyPr/>
+            <a:lstStyle/>
+            <a:p>
+              <a:pPr>
+                <a:defRPr b="0" i="0" strike="noStrike" sz="1000" u="none">
+                  <a:solidFill>
+                    <a:srgbClr val="1E2B27"/>
+                  </a:solidFill>
+                  <a:latin typeface="Arial"/>
+                </a:defRPr>
+              </a:pPr>
+            </a:p>
+          </c:txPr>
+          <c:showLegendKey val="0"/>
+          <c:showVal val="1"/>
+          <c:showCatName val="0"/>
+          <c:showSerName val="0"/>
+          <c:showPercent val="0"/>
+          <c:showBubbleSize val="0"/>
+          <c:showLeaderLines val="0"/>
+        </c:dLbls>
+        <c:gapWidth val="55"/>
+        <c:overlap val="0"/>
+        <c:axId val="2094734554"/>
+        <c:axId val="2094734552"/>
+        <c:axId val="2094734556"/>
+      </c:barChart>
+      <c:catAx>
+        <c:axId val="2094734554"/>
+        <c:scaling>
+          <c:orientation val="minMax"/>
+        </c:scaling>
+        <c:delete val="0"/>
+        <c:axPos val="b"/>
+        <c:numFmt formatCode="General" sourceLinked="1"/>
+        <c:majorTickMark val="out"/>
+        <c:minorTickMark val="none"/>
+        <c:tickLblPos val="low"/>
+        <c:spPr>
+          <a:ln w="12700" cap="flat">
+            <a:solidFill>
+              <a:srgbClr val="888888"/>
+            </a:solidFill>
+            <a:prstDash val="solid"/>
+            <a:round/>
+          </a:ln>
+        </c:spPr>
+        <c:txPr>
+          <a:bodyPr/>
+          <a:lstStyle/>
+          <a:p>
+            <a:pPr>
+              <a:defRPr sz="1200" b="0" i="0" u="none" strike="noStrike">
+                <a:solidFill>
+                  <a:srgbClr val="1E2B27"/>
+                </a:solidFill>
+                <a:latin typeface="Calibri"/>
+              </a:defRPr>
+            </a:pPr>
+            <a:endParaRPr lang="en-US"/>
+          </a:p>
+        </c:txPr>
+        <c:crossAx val="2094734552"/>
+        <c:crosses val="autoZero"/>
+        <c:auto val="1"/>
+        <c:lblAlgn val="ctr"/>
+        <c:noMultiLvlLbl val="1"/>
+      </c:catAx>
+      <c:valAx>
+        <c:axId val="2094734552"/>
+        <c:scaling>
+          <c:orientation val="minMax"/>
+          <c:max val="1"/>
+          <c:min val="0.8"/>
+        </c:scaling>
+        <c:delete val="0"/>
+        <c:axPos val="l"/>
+        <c:majorGridlines>
+          <c:spPr>
+            <a:ln w="9525" cap="flat">
+              <a:solidFill>
+                <a:srgbClr val="E3E8E6"/>
+              </a:solidFill>
+              <a:prstDash val="solid"/>
+              <a:round/>
+            </a:ln>
+          </c:spPr>
+        </c:majorGridlines>
+        <c:numFmt formatCode="0.00" sourceLinked="0"/>
+        <c:majorTickMark val="out"/>
+        <c:minorTickMark val="none"/>
+        <c:tickLblPos val="nextTo"/>
+        <c:spPr>
+          <a:ln w="12700" cap="flat">
+            <a:solidFill>
+              <a:srgbClr val="888888"/>
+            </a:solidFill>
+            <a:prstDash val="solid"/>
+            <a:round/>
+          </a:ln>
+        </c:spPr>
+        <c:txPr>
+          <a:bodyPr/>
+          <a:lstStyle/>
+          <a:p>
+            <a:pPr>
+              <a:defRPr sz="1100" b="0" i="0" u="none" strike="noStrike">
+                <a:solidFill>
+                  <a:srgbClr val="5F6B66"/>
+                </a:solidFill>
+                <a:latin typeface="Arial"/>
+              </a:defRPr>
+            </a:pPr>
+            <a:endParaRPr lang="en-US"/>
+          </a:p>
+        </c:txPr>
+        <c:crossAx val="2094734554"/>
+        <c:crosses val="autoZero"/>
+        <c:crossBetween val="between"/>
+        <c:majorUnit val="0.05"/>
+      </c:valAx>
+      <c:spPr>
+        <a:noFill/>
+        <a:ln>
+          <a:noFill/>
+        </a:ln>
+        <a:effectLst/>
+      </c:spPr>
+    </c:plotArea>
+    <c:legend>
+      <c:legendPos val="b"/>
+      <c:overlay val="0"/>
+      <c:txPr>
+        <a:bodyPr/>
+        <a:lstStyle/>
+        <a:p>
+          <a:pPr>
+            <a:defRPr sz="1200">
+              <a:solidFill>
+                <a:srgbClr val="1E2B27"/>
+              </a:solidFill>
+              <a:latin typeface="Calibri"/>
+              <a:cs typeface="Calibri"/>
+            </a:defRPr>
+          </a:pPr>
+          <a:endParaRPr lang="en-US"/>
+        </a:p>
+      </c:txPr>
+    </c:legend>
+    <c:plotVisOnly val="1"/>
+    <c:dispBlanksAs val="span"/>
+  </c:chart>
+  <c:spPr>
+    <a:noFill/>
+    <a:ln>
+      <a:noFill/>
+    </a:ln>
+    <a:effectLst/>
+  </c:spPr>
+  <c:externalData r:id="rId1">
+    <c:autoUpdate val="0"/>
+  </c:externalData>
+</c:chartSpace>
+</file>
+
+<file path=ppt/charts/chart3.xml><?xml version="1.0" encoding="utf-8"?>
+<c:chartSpace xmlns:c="http://schemas.openxmlformats.org/drawingml/2006/chart" xmlns:a="http://schemas.openxmlformats.org/drawingml/2006/main" xmlns:r="http://schemas.openxmlformats.org/officeDocument/2006/relationships">
+  <c:date1904 val="0"/>
+  <c:roundedCorners val="1"/>
+  <c:chart>
+    <c:autoTitleDeleted val="1"/>
+    <c:plotArea>
+      <c:layout/>
+      <c:barChart>
         <c:barDir val="bar"/>
         <c:grouping val="clustered"/>
         <c:varyColors val="0"/>
@@ -588,7 +960,7 @@
 </c:chartSpace>
 </file>
 
-<file path=ppt/charts/chart3.xml><?xml version="1.0" encoding="utf-8"?>
+<file path=ppt/charts/chart4.xml><?xml version="1.0" encoding="utf-8"?>
 <c:chartSpace xmlns:c="http://schemas.openxmlformats.org/drawingml/2006/chart" xmlns:a="http://schemas.openxmlformats.org/drawingml/2006/main" xmlns:r="http://schemas.openxmlformats.org/officeDocument/2006/relationships">
   <c:date1904 val="0"/>
   <c:roundedCorners val="1"/>
@@ -825,7 +1197,7 @@
 </c:chartSpace>
 </file>
 
-<file path=ppt/charts/chart4.xml><?xml version="1.0" encoding="utf-8"?>
+<file path=ppt/charts/chart5.xml><?xml version="1.0" encoding="utf-8"?>
 <c:chartSpace xmlns:c="http://schemas.openxmlformats.org/drawingml/2006/chart" xmlns:a="http://schemas.openxmlformats.org/drawingml/2006/main" xmlns:r="http://schemas.openxmlformats.org/officeDocument/2006/relationships">
   <c:date1904 val="0"/>
   <c:roundedCorners val="1"/>
@@ -1660,8 +2032,8 @@
           <a:p>
             <a:r>
               <a:rPr lang="en-US" dirty="0"/>
-              <a:t>TEMPO: 0:00 a 0:25 (25 segundos)
-Bom dia. Sou o Lucas Oliveira. Quero responder a pergunta de qualquer gestor de educação: quais municípios vão ficar para trás na alfabetização das crianças — e o que fazer antes que isso aconteça. Para isso, analisamos 5.396 municípios com dados públicos.</a:t>
+              <a:t>TEMPO: 0:00 a 0:15 (15 segundos)
+Bom dia. Sou o Lucas Oliveira. Vou mostrar como prever quais municípios vão ficar para trás na alfabetização das crianças — e o que fazer antes que isso aconteça.</a:t>
             </a:r>
             <a:endParaRPr lang="en-US" dirty="0"/>
           </a:p>
@@ -1685,6 +2057,95 @@
             <a:fld id="{F7021451-1387-4CA6-816F-3879F97B5CBC}" type="slidenum">
               <a:rPr lang="en-US"/>
               <a:t>1</a:t>
+            </a:fld>
+            <a:endParaRPr lang="en-US"/>
+          </a:p>
+        </p:txBody>
+      </p:sp>
+    </p:spTree>
+    <p:extLst>
+      <p:ext uri="{BB962C8B-B14F-4D97-AF65-F5344CB8AC3E}">
+        <p14:creationId xmlns:p14="http://schemas.microsoft.com/office/powerpoint/2010/main" val="1024086991"/>
+      </p:ext>
+    </p:extLst>
+  </p:cSld>
+  <p:clrMapOvr>
+    <a:masterClrMapping/>
+  </p:clrMapOvr>
+</p:notes>
+</file>
+
+<file path=ppt/notesSlides/notesSlide10.xml><?xml version="1.0" encoding="utf-8"?>
+<p:notes xmlns:a="http://schemas.openxmlformats.org/drawingml/2006/main" xmlns:r="http://schemas.openxmlformats.org/officeDocument/2006/relationships" xmlns:p="http://schemas.openxmlformats.org/presentationml/2006/main">
+  <p:cSld>
+    <p:spTree>
+      <p:nvGrpSpPr>
+        <p:cNvPr id="1" name=""/>
+        <p:cNvGrpSpPr/>
+        <p:nvPr/>
+      </p:nvGrpSpPr>
+      <p:grpSpPr>
+        <a:xfrm>
+          <a:off x="0" y="0"/>
+          <a:ext cx="0" cy="0"/>
+          <a:chOff x="0" y="0"/>
+          <a:chExt cx="0" cy="0"/>
+        </a:xfrm>
+      </p:grpSpPr>
+      <p:sp>
+        <p:nvSpPr>
+          <p:cNvPr id="2" name="Slide Image Placeholder 1"/>
+          <p:cNvSpPr>
+            <a:spLocks noGrp="1" noRot="1" noChangeAspect="1"/>
+          </p:cNvSpPr>
+          <p:nvPr>
+            <p:ph type="sldImg"/>
+          </p:nvPr>
+        </p:nvSpPr>
+        <p:spPr/>
+      </p:sp>
+      <p:sp>
+        <p:nvSpPr>
+          <p:cNvPr id="3" name="Notes Placeholder 2"/>
+          <p:cNvSpPr>
+            <a:spLocks noGrp="1"/>
+          </p:cNvSpPr>
+          <p:nvPr>
+            <p:ph type="body" idx="1"/>
+          </p:nvPr>
+        </p:nvSpPr>
+        <p:spPr/>
+        <p:txBody>
+          <a:bodyPr/>
+          <a:lstStyle/>
+          <a:p>
+            <a:r>
+              <a:rPr lang="en-US" dirty="0"/>
+              <a:t>TEMPO: 4:35 a 5:00 (25 segundos)
+Duas ressalvas: o modelo prioriza, não prediz destino, e mostra associação, não causa. Mas a informação para agir com um ano de antecedência já existe. A pergunta é o que fazemos com ela. Obrigado.</a:t>
+            </a:r>
+            <a:endParaRPr lang="en-US" dirty="0"/>
+          </a:p>
+        </p:txBody>
+      </p:sp>
+      <p:sp>
+        <p:nvSpPr>
+          <p:cNvPr id="4" name="Slide Number Placeholder 3"/>
+          <p:cNvSpPr>
+            <a:spLocks noGrp="1"/>
+          </p:cNvSpPr>
+          <p:nvPr>
+            <p:ph type="sldNum" sz="quarter" idx="10"/>
+          </p:nvPr>
+        </p:nvSpPr>
+        <p:spPr/>
+        <p:txBody>
+          <a:bodyPr/>
+          <a:lstStyle/>
+          <a:p>
+            <a:fld id="{F7021451-1387-4CA6-816F-3879F97B5CBC}" type="slidenum">
+              <a:rPr lang="en-US"/>
+              <a:t>10</a:t>
             </a:fld>
             <a:endParaRPr lang="en-US"/>
           </a:p>
@@ -1749,10 +2210,8 @@
           <a:p>
             <a:r>
               <a:rPr lang="en-US" dirty="0"/>
-              <a:t>TEMPO: 0:25 a 1:05 (40 segundos)
-Começo pela boa notícia. O Brasil saiu de 55,9% das crianças alfabetizadas em 2023 para 66% em 2025 — acima da trajetória pactuada no Compromisso Nacional.
-Só que essa média esconde um problema. Entre 2023 e 2024, 41,7% dos municípios pioraram. São 2.250 cidades andando para trás enquanto o número do país melhora.
-Isso tem uma consequência direta para esta mesa: uma política desenhada olhando a média nacional não alcança justamente quem mais precisa.</a:t>
+              <a:t>TEMPO: 0:15 a 0:45 (30 segundos)
+Primeiro, o contexto. O Brasil saiu de 55,9% das crianças alfabetizadas em 2023 para 66% em 2025. Mas a média esconde o problema: entre 2023 e 2024, 41,7% dos municípios pioraram. Uma política desenhada sobre a média nacional não alcança quem mais precisa.</a:t>
             </a:r>
             <a:endParaRPr lang="en-US" dirty="0"/>
           </a:p>
@@ -1840,10 +2299,8 @@
           <a:p>
             <a:r>
               <a:rPr lang="en-US" dirty="0"/>
-              <a:t>TEMPO: 1:05 a 1:40 (35 segundos)
-Para enfrentar isso, construímos quatro instrumentos, todos a partir de dado público.
-Primeiro, um modelo que prevê quais municípios vão ficar abaixo do patamar nacional — usando só informação do ano anterior. Segundo, uma classificação dos municípios em quatro perfis. Terceiro, uma projeção até 2030. E quarto, um sistema que aprende onde cada real de orçamento rende mais.
-O ponto prático: assim que o INEP divulga um resultado, a lista do ano seguinte sai em minutos.</a:t>
+              <a:t>TEMPO: 0:45 a 1:25 (40 segundos)
+De onde vêm os dados. A base é a camada Gold que construímos na Fase 2, com o Indicador Criança Alfabetizada do INEP: resultados e metas por município, estado e Brasil. Enriquecemos com o IBGE — população, renda e alfabetização dos adultos, do Censo 2022. O resultado é uma base com 5.396 municípios e 20 variáveis. O alvo é saber se o município alfabetiza pelo menos 60% das crianças em 2024, usando só informação de 2023 — assim o modelo nunca vê a resposta.</a:t>
             </a:r>
             <a:endParaRPr lang="en-US" dirty="0"/>
           </a:p>
@@ -1931,10 +2388,8 @@
           <a:p>
             <a:r>
               <a:rPr lang="en-US" dirty="0"/>
-              <a:t>TEMPO: 1:40 a 2:25 (45 segundos)
-O modelo acerta bem: tem 90% de capacidade de separar os municípios que alfabetizam dos que não alfabetizam, medido em municípios que ele nunca viu no treino.
-Testamos cinco algoritmos. Os mais sofisticados empataram com o mais simples, então ficamos com o simples — porque quando um prefeito perguntar por que a cidade dele está na lista, a resposta precisa ser explicável.
-E o fator mais influente, de longe, é o estado. Pesa três vezes mais que o segundo colocado. A mesma criança tem chances muito diferentes dependendo de onde nasce.</a:t>
+              <a:t>TEMPO: 1:25 a 2:05 (40 segundos)
+Com essa base, aplicamos quatro técnicas, cada uma respondendo uma pergunta. O modelo supervisionado prevê quem fica abaixo do patamar, com 90% de capacidade de separação. A clusterização encontrou quatro perfis de município. A projeção de séries temporais mostra que só 45% chegam à meta de 2030. E o aprendizado por reforço acertou a melhor intervenção em 96,8% das decisões.</a:t>
             </a:r>
             <a:endParaRPr lang="en-US" dirty="0"/>
           </a:p>
@@ -2022,11 +2477,8 @@
           <a:p>
             <a:r>
               <a:rPr lang="en-US" dirty="0"/>
-              <a:t>TEMPO: 2:25 a 3:10 (45 segundos)
-A segunda descoberta derruba uma crença comum: dinheiro não explica alfabetização.
-O grupo de melhor desempenho do país — 79% das crianças alfabetizadas — é formado por municípios pequenos do interior, a maioria no Nordeste, com PIB per capita de 20 mil reais.
-E aqui estão 121 centros urbanos: renda quase o dobro, 96% dos adultos alfabetizados — e só 53% das crianças alfabetizadas, abaixo da média nacional.
-Nessas cidades o problema não é o contexto social. É a rede de ensino.</a:t>
+              <a:t>TEMPO: 2:05 a 2:45 (40 segundos)
+No modelo supervisionado, comparamos cinco algoritmos. Repare que os mais complexos, como o Random Forest, vão muito bem no treino mas caem na validação: decoraram os dados. A Regressão Logística teve praticamente a mesma nota na validação, com doze vezes menos overfitting. No teste, com municípios que o modelo nunca viu, ela chegou a 0,90 de AUC, 84% de F1 e probabilidades calibradas.</a:t>
             </a:r>
             <a:endParaRPr lang="en-US" dirty="0"/>
           </a:p>
@@ -2114,10 +2566,8 @@
           <a:p>
             <a:r>
               <a:rPr lang="en-US" dirty="0"/>
-              <a:t>TEMPO: 3:10 a 3:50 (40 segundos)
-Olhando para frente: projetamos o indicador até 2030, já considerando que os primeiros pontos percentuais são os mais fáceis e que o crescimento desacelera.
-O Brasil chega a 81,9% em 2030 — acima da meta de 80%, mas por uma margem de menos de dois pontos. A meta é alcançável, só não está garantida.
-E, município a município, só 45% chegam à meta no ritmo atual.</a:t>
+              <a:t>TEMPO: 2:45 a 3:10 (25 segundos)
+E o que o modelo aprendeu? O fator mais influente, de longe, é o estado: pesa três vezes mais que o segundo, a proficiência em Português do ano anterior. A mesma criança tem chances muito diferentes dependendo de onde nasce.</a:t>
             </a:r>
             <a:endParaRPr lang="en-US" dirty="0"/>
           </a:p>
@@ -2205,11 +2655,8 @@
           <a:p>
             <a:r>
               <a:rPr lang="en-US" dirty="0"/>
-              <a:t>TEMPO: 3:50 a 4:30 (40 segundos)
-Como isso vira decisão? De três formas.
-Priorizar: são 3.121 municípios abaixo do patamar, 1.411 em risco crítico, e cada um vem com a explicação individual do porquê.
-Ajustar o programa: cada um dos quatro perfis responde melhor a um tipo de intervenção. Mandar o mesmo programa para todo mundo desperdiça dinheiro.
-E alocar o orçamento: na simulação, o recurso se concentra sozinho nos municípios com taxa média de 42%, contra 63% no país. A priorização vira redistributiva sem ninguém precisar impor isso por regra.</a:t>
+              <a:t>TEMPO: 3:10 a 3:40 (30 segundos)
+A clusterização trouxe a descoberta mais surpreendente: dinheiro não explica alfabetização. O melhor grupo, com 79% de crianças alfabetizadas, é de municípios pequenos e de baixa renda, a maioria no Nordeste. Já 121 centros urbanos, ricos e com adultos escolarizados, alfabetizam só 53%. Ali o gargalo é a rede de ensino.</a:t>
             </a:r>
             <a:endParaRPr lang="en-US" dirty="0"/>
           </a:p>
@@ -2297,9 +2744,8 @@
           <a:p>
             <a:r>
               <a:rPr lang="en-US" dirty="0"/>
-              <a:t>TEMPO: 4:30 a 5:00 (30 segundos)
-Antes de fechar, duas honestidades. O modelo prioriza, não prediz destino: ele mostra onde o risco está concentrado hoje. E ele mostra associação, não causa.
-Dito isso: com dado que já existe, público e gratuito, dá para saber com um ano de antecedência quais municípios vão ficar para trás. A pergunta que fica não é se a informação existe. É o que fazemos com ela. Obrigado.</a:t>
+              <a:t>TEMPO: 3:40 a 4:05 (25 segundos)
+Olhando para 2030: o Brasil deve chegar a 81,9%, menos de dois pontos acima da meta de 80%. A meta é alcançável, mas não está garantida — e só 45% dos municípios chegam lá no ritmo atual.</a:t>
             </a:r>
             <a:endParaRPr lang="en-US" dirty="0"/>
           </a:p>
@@ -2323,6 +2769,95 @@
             <a:fld id="{F7021451-1387-4CA6-816F-3879F97B5CBC}" type="slidenum">
               <a:rPr lang="en-US"/>
               <a:t>8</a:t>
+            </a:fld>
+            <a:endParaRPr lang="en-US"/>
+          </a:p>
+        </p:txBody>
+      </p:sp>
+    </p:spTree>
+    <p:extLst>
+      <p:ext uri="{BB962C8B-B14F-4D97-AF65-F5344CB8AC3E}">
+        <p14:creationId xmlns:p14="http://schemas.microsoft.com/office/powerpoint/2010/main" val="1024086991"/>
+      </p:ext>
+    </p:extLst>
+  </p:cSld>
+  <p:clrMapOvr>
+    <a:masterClrMapping/>
+  </p:clrMapOvr>
+</p:notes>
+</file>
+
+<file path=ppt/notesSlides/notesSlide9.xml><?xml version="1.0" encoding="utf-8"?>
+<p:notes xmlns:a="http://schemas.openxmlformats.org/drawingml/2006/main" xmlns:r="http://schemas.openxmlformats.org/officeDocument/2006/relationships" xmlns:p="http://schemas.openxmlformats.org/presentationml/2006/main">
+  <p:cSld>
+    <p:spTree>
+      <p:nvGrpSpPr>
+        <p:cNvPr id="1" name=""/>
+        <p:cNvGrpSpPr/>
+        <p:nvPr/>
+      </p:nvGrpSpPr>
+      <p:grpSpPr>
+        <a:xfrm>
+          <a:off x="0" y="0"/>
+          <a:ext cx="0" cy="0"/>
+          <a:chOff x="0" y="0"/>
+          <a:chExt cx="0" cy="0"/>
+        </a:xfrm>
+      </p:grpSpPr>
+      <p:sp>
+        <p:nvSpPr>
+          <p:cNvPr id="2" name="Slide Image Placeholder 1"/>
+          <p:cNvSpPr>
+            <a:spLocks noGrp="1" noRot="1" noChangeAspect="1"/>
+          </p:cNvSpPr>
+          <p:nvPr>
+            <p:ph type="sldImg"/>
+          </p:nvPr>
+        </p:nvSpPr>
+        <p:spPr/>
+      </p:sp>
+      <p:sp>
+        <p:nvSpPr>
+          <p:cNvPr id="3" name="Notes Placeholder 2"/>
+          <p:cNvSpPr>
+            <a:spLocks noGrp="1"/>
+          </p:cNvSpPr>
+          <p:nvPr>
+            <p:ph type="body" idx="1"/>
+          </p:nvPr>
+        </p:nvSpPr>
+        <p:spPr/>
+        <p:txBody>
+          <a:bodyPr/>
+          <a:lstStyle/>
+          <a:p>
+            <a:r>
+              <a:rPr lang="en-US" dirty="0"/>
+              <a:t>TEMPO: 4:05 a 4:35 (30 segundos)
+Isso vira decisão de três formas. Priorizar os 3.121 municípios abaixo do patamar, cada um com a explicação do porquê. Personalizar o programa conforme o perfil. E alocar a verba: na simulação, o recurso vai para municípios com taxa média de 42%, contra 63% no país.</a:t>
+            </a:r>
+            <a:endParaRPr lang="en-US" dirty="0"/>
+          </a:p>
+        </p:txBody>
+      </p:sp>
+      <p:sp>
+        <p:nvSpPr>
+          <p:cNvPr id="4" name="Slide Number Placeholder 3"/>
+          <p:cNvSpPr>
+            <a:spLocks noGrp="1"/>
+          </p:cNvSpPr>
+          <p:nvPr>
+            <p:ph type="sldNum" sz="quarter" idx="10"/>
+          </p:nvPr>
+        </p:nvSpPr>
+        <p:spPr/>
+        <p:txBody>
+          <a:bodyPr/>
+          <a:lstStyle/>
+          <a:p>
+            <a:fld id="{F7021451-1387-4CA6-816F-3879F97B5CBC}" type="slidenum">
+              <a:rPr lang="en-US"/>
+              <a:t>9</a:t>
             </a:fld>
             <a:endParaRPr lang="en-US"/>
           </a:p>
@@ -2990,6 +3525,421 @@
 </p:sld>
 </file>
 
+<file path=ppt/slides/slide10.xml><?xml version="1.0" encoding="utf-8"?>
+<p:sld xmlns:a="http://schemas.openxmlformats.org/drawingml/2006/main" xmlns:r="http://schemas.openxmlformats.org/officeDocument/2006/relationships" xmlns:p="http://schemas.openxmlformats.org/presentationml/2006/main">
+  <p:cSld name="Slide 10">
+    <p:bg>
+      <p:bgPr>
+        <a:solidFill>
+          <a:srgbClr val="1F3A32"/>
+        </a:solidFill>
+      </p:bgPr>
+    </p:bg>
+    <p:spTree>
+      <p:nvGrpSpPr>
+        <p:cNvPr id="1" name=""/>
+        <p:cNvGrpSpPr/>
+        <p:nvPr/>
+      </p:nvGrpSpPr>
+      <p:grpSpPr>
+        <a:xfrm>
+          <a:off x="0" y="0"/>
+          <a:ext cx="0" cy="0"/>
+          <a:chOff x="0" y="0"/>
+          <a:chExt cx="0" cy="0"/>
+        </a:xfrm>
+      </p:grpSpPr>
+      <p:sp>
+        <p:nvSpPr>
+          <p:cNvPr id="2" name="Text 0"/>
+          <p:cNvSpPr txBox="1"/>
+          <p:nvPr/>
+        </p:nvSpPr>
+        <p:spPr>
+          <a:xfrm>
+            <a:off x="548640" y="868680"/>
+            <a:ext cx="10515600" cy="914400"/>
+          </a:xfrm>
+          <a:prstGeom prst="rect">
+            <a:avLst/>
+          </a:prstGeom>
+          <a:noFill/>
+          <a:ln/>
+        </p:spPr>
+        <p:txBody>
+          <a:bodyPr wrap="square" lIns="0" tIns="0" rIns="0" bIns="0" rtlCol="0" anchor="ctr"/>
+          <a:lstStyle/>
+          <a:p>
+            <a:pPr indent="0" marL="0">
+              <a:buNone/>
+            </a:pPr>
+            <a:r>
+              <a:rPr lang="en-US" sz="3000" b="1" dirty="0">
+                <a:solidFill>
+                  <a:srgbClr val="F7F7F2"/>
+                </a:solidFill>
+                <a:latin typeface="Cambria" pitchFamily="34" charset="0"/>
+                <a:ea typeface="Cambria" pitchFamily="34" charset="-122"/>
+                <a:cs typeface="Cambria" pitchFamily="34" charset="-120"/>
+              </a:rPr>
+              <a:t>A informação para agir antes já existe.</a:t>
+            </a:r>
+            <a:endParaRPr lang="en-US" sz="3000" dirty="0"/>
+          </a:p>
+        </p:txBody>
+      </p:sp>
+      <p:sp>
+        <p:nvSpPr>
+          <p:cNvPr id="3" name="Text 1"/>
+          <p:cNvSpPr txBox="1"/>
+          <p:nvPr/>
+        </p:nvSpPr>
+        <p:spPr>
+          <a:xfrm>
+            <a:off x="548640" y="1783080"/>
+            <a:ext cx="10515600" cy="914400"/>
+          </a:xfrm>
+          <a:prstGeom prst="rect">
+            <a:avLst/>
+          </a:prstGeom>
+          <a:noFill/>
+          <a:ln/>
+        </p:spPr>
+        <p:txBody>
+          <a:bodyPr wrap="square" lIns="0" tIns="0" rIns="0" bIns="0" rtlCol="0" anchor="ctr"/>
+          <a:lstStyle/>
+          <a:p>
+            <a:pPr indent="0" marL="0">
+              <a:buNone/>
+            </a:pPr>
+            <a:r>
+              <a:rPr lang="en-US" sz="4000" b="1" dirty="0">
+                <a:solidFill>
+                  <a:srgbClr val="F2B705"/>
+                </a:solidFill>
+                <a:latin typeface="Cambria" pitchFamily="34" charset="0"/>
+                <a:ea typeface="Cambria" pitchFamily="34" charset="-122"/>
+                <a:cs typeface="Cambria" pitchFamily="34" charset="-120"/>
+              </a:rPr>
+              <a:t>A pergunta é o que fazemos com ela.</a:t>
+            </a:r>
+            <a:endParaRPr lang="en-US" sz="4000" dirty="0"/>
+          </a:p>
+        </p:txBody>
+      </p:sp>
+      <p:sp>
+        <p:nvSpPr>
+          <p:cNvPr id="4" name="Shape 2"/>
+          <p:cNvSpPr/>
+          <p:nvPr/>
+        </p:nvSpPr>
+        <p:spPr>
+          <a:xfrm>
+            <a:off x="548640" y="3246120"/>
+            <a:ext cx="5349240" cy="1691640"/>
+          </a:xfrm>
+          <a:prstGeom prst="roundRect">
+            <a:avLst>
+              <a:gd name="adj" fmla="val 5405"/>
+            </a:avLst>
+          </a:prstGeom>
+          <a:solidFill>
+            <a:srgbClr val="2E5446"/>
+          </a:solidFill>
+          <a:ln w="12700">
+            <a:solidFill>
+              <a:srgbClr val="2E5446"/>
+            </a:solidFill>
+            <a:prstDash val="solid"/>
+          </a:ln>
+        </p:spPr>
+      </p:sp>
+      <p:sp>
+        <p:nvSpPr>
+          <p:cNvPr id="5" name="Text 3"/>
+          <p:cNvSpPr txBox="1"/>
+          <p:nvPr/>
+        </p:nvSpPr>
+        <p:spPr>
+          <a:xfrm>
+            <a:off x="868680" y="3474720"/>
+            <a:ext cx="4709160" cy="411480"/>
+          </a:xfrm>
+          <a:prstGeom prst="rect">
+            <a:avLst/>
+          </a:prstGeom>
+          <a:noFill/>
+          <a:ln/>
+        </p:spPr>
+        <p:txBody>
+          <a:bodyPr wrap="square" lIns="0" tIns="0" rIns="0" bIns="0" rtlCol="0" anchor="ctr"/>
+          <a:lstStyle/>
+          <a:p>
+            <a:pPr indent="0" marL="0">
+              <a:buNone/>
+            </a:pPr>
+            <a:r>
+              <a:rPr lang="en-US" sz="1800" b="1" dirty="0">
+                <a:solidFill>
+                  <a:srgbClr val="F7F7F2"/>
+                </a:solidFill>
+                <a:latin typeface="Calibri" pitchFamily="34" charset="0"/>
+                <a:ea typeface="Calibri" pitchFamily="34" charset="-122"/>
+                <a:cs typeface="Calibri" pitchFamily="34" charset="-120"/>
+              </a:rPr>
+              <a:t>Prioriza, não prediz destino</a:t>
+            </a:r>
+            <a:endParaRPr lang="en-US" sz="1800" dirty="0"/>
+          </a:p>
+        </p:txBody>
+      </p:sp>
+      <p:sp>
+        <p:nvSpPr>
+          <p:cNvPr id="6" name="Text 4"/>
+          <p:cNvSpPr txBox="1"/>
+          <p:nvPr/>
+        </p:nvSpPr>
+        <p:spPr>
+          <a:xfrm>
+            <a:off x="868680" y="3931920"/>
+            <a:ext cx="4709160" cy="868680"/>
+          </a:xfrm>
+          <a:prstGeom prst="rect">
+            <a:avLst/>
+          </a:prstGeom>
+          <a:noFill/>
+          <a:ln/>
+        </p:spPr>
+        <p:txBody>
+          <a:bodyPr wrap="square" lIns="0" tIns="0" rIns="0" bIns="0" rtlCol="0" anchor="t"/>
+          <a:lstStyle/>
+          <a:p>
+            <a:pPr indent="0" marL="0">
+              <a:buNone/>
+            </a:pPr>
+            <a:r>
+              <a:rPr lang="en-US" sz="1500" dirty="0">
+                <a:solidFill>
+                  <a:srgbClr val="C9D6D0"/>
+                </a:solidFill>
+                <a:latin typeface="Calibri" pitchFamily="34" charset="0"/>
+                <a:ea typeface="Calibri" pitchFamily="34" charset="-122"/>
+                <a:cs typeface="Calibri" pitchFamily="34" charset="-120"/>
+              </a:rPr>
+              <a:t>Aponta onde o risco está concentrado no Brasil de hoje. Não extrapola para realidades que não viu.</a:t>
+            </a:r>
+            <a:endParaRPr lang="en-US" sz="1500" dirty="0"/>
+          </a:p>
+        </p:txBody>
+      </p:sp>
+      <p:sp>
+        <p:nvSpPr>
+          <p:cNvPr id="7" name="Shape 5"/>
+          <p:cNvSpPr/>
+          <p:nvPr/>
+        </p:nvSpPr>
+        <p:spPr>
+          <a:xfrm>
+            <a:off x="6217920" y="3246120"/>
+            <a:ext cx="5349240" cy="1691640"/>
+          </a:xfrm>
+          <a:prstGeom prst="roundRect">
+            <a:avLst>
+              <a:gd name="adj" fmla="val 5405"/>
+            </a:avLst>
+          </a:prstGeom>
+          <a:solidFill>
+            <a:srgbClr val="2E5446"/>
+          </a:solidFill>
+          <a:ln w="12700">
+            <a:solidFill>
+              <a:srgbClr val="2E5446"/>
+            </a:solidFill>
+            <a:prstDash val="solid"/>
+          </a:ln>
+        </p:spPr>
+      </p:sp>
+      <p:sp>
+        <p:nvSpPr>
+          <p:cNvPr id="8" name="Text 6"/>
+          <p:cNvSpPr txBox="1"/>
+          <p:nvPr/>
+        </p:nvSpPr>
+        <p:spPr>
+          <a:xfrm>
+            <a:off x="6537960" y="3474720"/>
+            <a:ext cx="4709160" cy="411480"/>
+          </a:xfrm>
+          <a:prstGeom prst="rect">
+            <a:avLst/>
+          </a:prstGeom>
+          <a:noFill/>
+          <a:ln/>
+        </p:spPr>
+        <p:txBody>
+          <a:bodyPr wrap="square" lIns="0" tIns="0" rIns="0" bIns="0" rtlCol="0" anchor="ctr"/>
+          <a:lstStyle/>
+          <a:p>
+            <a:pPr indent="0" marL="0">
+              <a:buNone/>
+            </a:pPr>
+            <a:r>
+              <a:rPr lang="en-US" sz="1800" b="1" dirty="0">
+                <a:solidFill>
+                  <a:srgbClr val="F7F7F2"/>
+                </a:solidFill>
+                <a:latin typeface="Calibri" pitchFamily="34" charset="0"/>
+                <a:ea typeface="Calibri" pitchFamily="34" charset="-122"/>
+                <a:cs typeface="Calibri" pitchFamily="34" charset="-120"/>
+              </a:rPr>
+              <a:t>Mostra associação, não causa</a:t>
+            </a:r>
+            <a:endParaRPr lang="en-US" sz="1800" dirty="0"/>
+          </a:p>
+        </p:txBody>
+      </p:sp>
+      <p:sp>
+        <p:nvSpPr>
+          <p:cNvPr id="9" name="Text 7"/>
+          <p:cNvSpPr txBox="1"/>
+          <p:nvPr/>
+        </p:nvSpPr>
+        <p:spPr>
+          <a:xfrm>
+            <a:off x="6537960" y="3931920"/>
+            <a:ext cx="4709160" cy="868680"/>
+          </a:xfrm>
+          <a:prstGeom prst="rect">
+            <a:avLst/>
+          </a:prstGeom>
+          <a:noFill/>
+          <a:ln/>
+        </p:spPr>
+        <p:txBody>
+          <a:bodyPr wrap="square" lIns="0" tIns="0" rIns="0" bIns="0" rtlCol="0" anchor="t"/>
+          <a:lstStyle/>
+          <a:p>
+            <a:pPr indent="0" marL="0">
+              <a:buNone/>
+            </a:pPr>
+            <a:r>
+              <a:rPr lang="en-US" sz="1500" dirty="0">
+                <a:solidFill>
+                  <a:srgbClr val="C9D6D0"/>
+                </a:solidFill>
+                <a:latin typeface="Calibri" pitchFamily="34" charset="0"/>
+                <a:ea typeface="Calibri" pitchFamily="34" charset="-122"/>
+                <a:cs typeface="Calibri" pitchFamily="34" charset="-120"/>
+              </a:rPr>
+              <a:t>Os padrões são reais nos dados; provar causa exige outro desenho de pesquisa.</a:t>
+            </a:r>
+            <a:endParaRPr lang="en-US" sz="1500" dirty="0"/>
+          </a:p>
+        </p:txBody>
+      </p:sp>
+      <p:sp>
+        <p:nvSpPr>
+          <p:cNvPr id="10" name="Text 8"/>
+          <p:cNvSpPr txBox="1"/>
+          <p:nvPr/>
+        </p:nvSpPr>
+        <p:spPr>
+          <a:xfrm>
+            <a:off x="548640" y="5440680"/>
+            <a:ext cx="7315200" cy="731520"/>
+          </a:xfrm>
+          <a:prstGeom prst="rect">
+            <a:avLst/>
+          </a:prstGeom>
+          <a:noFill/>
+          <a:ln/>
+        </p:spPr>
+        <p:txBody>
+          <a:bodyPr wrap="square" lIns="0" tIns="0" rIns="0" bIns="0" rtlCol="0" anchor="ctr"/>
+          <a:lstStyle/>
+          <a:p>
+            <a:pPr indent="0" marL="0">
+              <a:buNone/>
+            </a:pPr>
+            <a:r>
+              <a:rPr lang="en-US" sz="1500" b="1" dirty="0">
+                <a:solidFill>
+                  <a:srgbClr val="F7F7F2"/>
+                </a:solidFill>
+                <a:latin typeface="Calibri" pitchFamily="34" charset="0"/>
+                <a:ea typeface="Calibri" pitchFamily="34" charset="-122"/>
+                <a:cs typeface="Calibri" pitchFamily="34" charset="-120"/>
+              </a:rPr>
+              <a:t>Lucas Oliveira da Silva  ·  RM371958</a:t>
+            </a:r>
+            <a:endParaRPr lang="en-US" sz="1500" dirty="0"/>
+          </a:p>
+          <a:p>
+            <a:pPr indent="0" marL="0">
+              <a:buNone/>
+            </a:pPr>
+            <a:r>
+              <a:rPr lang="en-US" sz="1500" dirty="0">
+                <a:solidFill>
+                  <a:srgbClr val="9FB5AC"/>
+                </a:solidFill>
+                <a:latin typeface="Calibri" pitchFamily="34" charset="0"/>
+                <a:ea typeface="Calibri" pitchFamily="34" charset="-122"/>
+                <a:cs typeface="Calibri" pitchFamily="34" charset="-120"/>
+              </a:rPr>
+              <a:t>github.com/Luodev/1IAST-Fase3</a:t>
+            </a:r>
+            <a:endParaRPr lang="en-US" sz="1500" dirty="0"/>
+          </a:p>
+        </p:txBody>
+      </p:sp>
+      <p:sp>
+        <p:nvSpPr>
+          <p:cNvPr id="11" name="Text 9"/>
+          <p:cNvSpPr txBox="1"/>
+          <p:nvPr/>
+        </p:nvSpPr>
+        <p:spPr>
+          <a:xfrm>
+            <a:off x="10545775" y="6400800"/>
+            <a:ext cx="1097280" cy="274320"/>
+          </a:xfrm>
+          <a:prstGeom prst="rect">
+            <a:avLst/>
+          </a:prstGeom>
+          <a:noFill/>
+          <a:ln/>
+        </p:spPr>
+        <p:txBody>
+          <a:bodyPr wrap="square" lIns="0" tIns="0" rIns="0" bIns="0" rtlCol="0" anchor="ctr"/>
+          <a:lstStyle/>
+          <a:p>
+            <a:pPr algn="r" indent="0" marL="0">
+              <a:buNone/>
+            </a:pPr>
+            <a:r>
+              <a:rPr lang="en-US" sz="1000" dirty="0">
+                <a:solidFill>
+                  <a:srgbClr val="9FB5AC"/>
+                </a:solidFill>
+                <a:latin typeface="Calibri" pitchFamily="34" charset="0"/>
+                <a:ea typeface="Calibri" pitchFamily="34" charset="-122"/>
+                <a:cs typeface="Calibri" pitchFamily="34" charset="-120"/>
+              </a:rPr>
+              <a:t>10 / 10</a:t>
+            </a:r>
+            <a:endParaRPr lang="en-US" sz="1000" dirty="0"/>
+          </a:p>
+        </p:txBody>
+      </p:sp>
+    </p:spTree>
+  </p:cSld>
+  <p:clrMapOvr>
+    <a:masterClrMapping/>
+  </p:clrMapOvr>
+</p:sld>
+</file>
+
 <file path=ppt/slides/slide2.xml><?xml version="1.0" encoding="utf-8"?>
 <p:sld xmlns:a="http://schemas.openxmlformats.org/drawingml/2006/main" xmlns:r="http://schemas.openxmlformats.org/officeDocument/2006/relationships" xmlns:p="http://schemas.openxmlformats.org/presentationml/2006/main">
   <p:cSld name="Slide 2">
@@ -3331,7 +4281,7 @@
                 <a:ea typeface="Calibri" pitchFamily="34" charset="-122"/>
                 <a:cs typeface="Calibri" pitchFamily="34" charset="-120"/>
               </a:rPr>
-              <a:t>2 / 8</a:t>
+              <a:t>2 / 10</a:t>
             </a:r>
             <a:endParaRPr lang="en-US" sz="1000" dirty="0"/>
           </a:p>
@@ -3402,7 +4352,7 @@
                 <a:ea typeface="Cambria" pitchFamily="34" charset="-122"/>
                 <a:cs typeface="Cambria" pitchFamily="34" charset="-120"/>
               </a:rPr>
-              <a:t>Quatro instrumentos a partir de dado público</a:t>
+              <a:t>A base: dados públicos do INEP e do IBGE</a:t>
             </a:r>
             <a:endParaRPr lang="en-US" sz="3200" dirty="0"/>
           </a:p>
@@ -3416,12 +4366,12 @@
         </p:nvSpPr>
         <p:spPr>
           <a:xfrm>
-            <a:off x="548640" y="1691640"/>
-            <a:ext cx="2587752" cy="3154680"/>
+            <a:off x="548640" y="1600200"/>
+            <a:ext cx="3271418" cy="2788920"/>
           </a:xfrm>
           <a:prstGeom prst="roundRect">
             <a:avLst>
-              <a:gd name="adj" fmla="val 3534"/>
+              <a:gd name="adj" fmla="val 3279"/>
             </a:avLst>
           </a:prstGeom>
           <a:solidFill>
@@ -3437,16 +4387,211 @@
       </p:sp>
       <p:sp>
         <p:nvSpPr>
-          <p:cNvPr id="4" name="Shape 2"/>
+          <p:cNvPr id="4" name="Text 2"/>
+          <p:cNvSpPr txBox="1"/>
+          <p:nvPr/>
+        </p:nvSpPr>
+        <p:spPr>
+          <a:xfrm>
+            <a:off x="822960" y="1801368"/>
+            <a:ext cx="2722778" cy="274320"/>
+          </a:xfrm>
+          <a:prstGeom prst="rect">
+            <a:avLst/>
+          </a:prstGeom>
+          <a:noFill/>
+          <a:ln/>
+        </p:spPr>
+        <p:txBody>
+          <a:bodyPr wrap="square" lIns="0" tIns="0" rIns="0" bIns="0" rtlCol="0" anchor="ctr"/>
+          <a:lstStyle/>
+          <a:p>
+            <a:pPr indent="0" marL="0">
+              <a:buNone/>
+            </a:pPr>
+            <a:r>
+              <a:rPr lang="en-US" sz="1200" b="1" spc="200" kern="0" dirty="0">
+                <a:solidFill>
+                  <a:srgbClr val="3E7A62"/>
+                </a:solidFill>
+                <a:latin typeface="Calibri" pitchFamily="34" charset="0"/>
+                <a:ea typeface="Calibri" pitchFamily="34" charset="-122"/>
+                <a:cs typeface="Calibri" pitchFamily="34" charset="-120"/>
+              </a:rPr>
+              <a:t>FONTE 1</a:t>
+            </a:r>
+            <a:endParaRPr lang="en-US" sz="1200" dirty="0"/>
+          </a:p>
+        </p:txBody>
+      </p:sp>
+      <p:sp>
+        <p:nvSpPr>
+          <p:cNvPr id="5" name="Text 3"/>
+          <p:cNvSpPr txBox="1"/>
+          <p:nvPr/>
+        </p:nvSpPr>
+        <p:spPr>
+          <a:xfrm>
+            <a:off x="822960" y="2075688"/>
+            <a:ext cx="2722778" cy="457200"/>
+          </a:xfrm>
+          <a:prstGeom prst="rect">
+            <a:avLst/>
+          </a:prstGeom>
+          <a:noFill/>
+          <a:ln/>
+        </p:spPr>
+        <p:txBody>
+          <a:bodyPr wrap="square" lIns="0" tIns="0" rIns="0" bIns="0" rtlCol="0" anchor="ctr"/>
+          <a:lstStyle/>
+          <a:p>
+            <a:pPr indent="0" marL="0">
+              <a:buNone/>
+            </a:pPr>
+            <a:r>
+              <a:rPr lang="en-US" sz="2000" b="1" dirty="0">
+                <a:solidFill>
+                  <a:srgbClr val="1F3A32"/>
+                </a:solidFill>
+                <a:latin typeface="Cambria" pitchFamily="34" charset="0"/>
+                <a:ea typeface="Cambria" pitchFamily="34" charset="-122"/>
+                <a:cs typeface="Cambria" pitchFamily="34" charset="-120"/>
+              </a:rPr>
+              <a:t>Camada Gold — Fase 2</a:t>
+            </a:r>
+            <a:endParaRPr lang="en-US" sz="2000" dirty="0"/>
+          </a:p>
+        </p:txBody>
+      </p:sp>
+      <p:sp>
+        <p:nvSpPr>
+          <p:cNvPr id="6" name="Text 4"/>
+          <p:cNvSpPr txBox="1"/>
+          <p:nvPr/>
+        </p:nvSpPr>
+        <p:spPr>
+          <a:xfrm>
+            <a:off x="822960" y="2587752"/>
+            <a:ext cx="2722778" cy="914400"/>
+          </a:xfrm>
+          <a:prstGeom prst="rect">
+            <a:avLst/>
+          </a:prstGeom>
+          <a:noFill/>
+          <a:ln/>
+        </p:spPr>
+        <p:txBody>
+          <a:bodyPr wrap="square" lIns="0" tIns="0" rIns="0" bIns="0" rtlCol="0" anchor="t"/>
+          <a:lstStyle/>
+          <a:p>
+            <a:pPr indent="0" marL="0">
+              <a:buNone/>
+            </a:pPr>
+            <a:r>
+              <a:rPr lang="en-US" sz="1400" dirty="0">
+                <a:solidFill>
+                  <a:srgbClr val="1E2B27"/>
+                </a:solidFill>
+                <a:latin typeface="Calibri" pitchFamily="34" charset="0"/>
+                <a:ea typeface="Calibri" pitchFamily="34" charset="-122"/>
+                <a:cs typeface="Calibri" pitchFamily="34" charset="-120"/>
+              </a:rPr>
+              <a:t>Indicador Criança Alfabetizada (INEP): taxas e metas até 2030, por município, UF e Brasil</a:t>
+            </a:r>
+            <a:endParaRPr lang="en-US" sz="1400" dirty="0"/>
+          </a:p>
+        </p:txBody>
+      </p:sp>
+      <p:sp>
+        <p:nvSpPr>
+          <p:cNvPr id="7" name="Text 5"/>
+          <p:cNvSpPr txBox="1"/>
+          <p:nvPr/>
+        </p:nvSpPr>
+        <p:spPr>
+          <a:xfrm>
+            <a:off x="822960" y="3474720"/>
+            <a:ext cx="2722778" cy="548640"/>
+          </a:xfrm>
+          <a:prstGeom prst="rect">
+            <a:avLst/>
+          </a:prstGeom>
+          <a:noFill/>
+          <a:ln/>
+        </p:spPr>
+        <p:txBody>
+          <a:bodyPr wrap="square" lIns="0" tIns="0" rIns="0" bIns="0" rtlCol="0" anchor="ctr"/>
+          <a:lstStyle/>
+          <a:p>
+            <a:pPr indent="0" marL="0">
+              <a:buNone/>
+            </a:pPr>
+            <a:r>
+              <a:rPr lang="en-US" sz="3000" b="1" dirty="0">
+                <a:solidFill>
+                  <a:srgbClr val="3E7A62"/>
+                </a:solidFill>
+                <a:latin typeface="Cambria" pitchFamily="34" charset="0"/>
+                <a:ea typeface="Cambria" pitchFamily="34" charset="-122"/>
+                <a:cs typeface="Cambria" pitchFamily="34" charset="-120"/>
+              </a:rPr>
+              <a:t>5 tabelas</a:t>
+            </a:r>
+            <a:endParaRPr lang="en-US" sz="3000" dirty="0"/>
+          </a:p>
+        </p:txBody>
+      </p:sp>
+      <p:sp>
+        <p:nvSpPr>
+          <p:cNvPr id="8" name="Text 6"/>
+          <p:cNvSpPr txBox="1"/>
+          <p:nvPr/>
+        </p:nvSpPr>
+        <p:spPr>
+          <a:xfrm>
+            <a:off x="822960" y="3995928"/>
+            <a:ext cx="2722778" cy="274320"/>
+          </a:xfrm>
+          <a:prstGeom prst="rect">
+            <a:avLst/>
+          </a:prstGeom>
+          <a:noFill/>
+          <a:ln/>
+        </p:spPr>
+        <p:txBody>
+          <a:bodyPr wrap="square" lIns="0" tIns="0" rIns="0" bIns="0" rtlCol="0" anchor="ctr"/>
+          <a:lstStyle/>
+          <a:p>
+            <a:pPr indent="0" marL="0">
+              <a:buNone/>
+            </a:pPr>
+            <a:r>
+              <a:rPr lang="en-US" sz="1200" dirty="0">
+                <a:solidFill>
+                  <a:srgbClr val="5F6B66"/>
+                </a:solidFill>
+                <a:latin typeface="Calibri" pitchFamily="34" charset="0"/>
+                <a:ea typeface="Calibri" pitchFamily="34" charset="-122"/>
+                <a:cs typeface="Calibri" pitchFamily="34" charset="-120"/>
+              </a:rPr>
+              <a:t>23.995 registros municipais</a:t>
+            </a:r>
+            <a:endParaRPr lang="en-US" sz="1200" dirty="0"/>
+          </a:p>
+        </p:txBody>
+      </p:sp>
+      <p:sp>
+        <p:nvSpPr>
+          <p:cNvPr id="9" name="Shape 7"/>
           <p:cNvSpPr/>
           <p:nvPr/>
         </p:nvSpPr>
         <p:spPr>
           <a:xfrm>
-            <a:off x="822960" y="2011680"/>
-            <a:ext cx="566928" cy="566928"/>
-          </a:xfrm>
-          <a:prstGeom prst="ellipse">
+            <a:off x="3948074" y="2811780"/>
+            <a:ext cx="384048" cy="365760"/>
+          </a:xfrm>
+          <a:prstGeom prst="rightArrow">
             <a:avLst/>
           </a:prstGeom>
           <a:solidFill>
@@ -3462,135 +4607,18 @@
       </p:sp>
       <p:sp>
         <p:nvSpPr>
-          <p:cNvPr id="5" name="Text 3"/>
-          <p:cNvSpPr txBox="1"/>
-          <p:nvPr/>
-        </p:nvSpPr>
-        <p:spPr>
-          <a:xfrm>
-            <a:off x="822960" y="2011680"/>
-            <a:ext cx="566928" cy="566928"/>
-          </a:xfrm>
-          <a:prstGeom prst="rect">
-            <a:avLst/>
-          </a:prstGeom>
-          <a:noFill/>
-          <a:ln/>
-        </p:spPr>
-        <p:txBody>
-          <a:bodyPr wrap="square" lIns="0" tIns="0" rIns="0" bIns="0" rtlCol="0" anchor="ctr"/>
-          <a:lstStyle/>
-          <a:p>
-            <a:pPr algn="ctr" indent="0" marL="0">
-              <a:buNone/>
-            </a:pPr>
-            <a:r>
-              <a:rPr lang="en-US" sz="1700" b="1" dirty="0">
-                <a:solidFill>
-                  <a:srgbClr val="1F3A32"/>
-                </a:solidFill>
-                <a:latin typeface="Calibri" pitchFamily="34" charset="0"/>
-                <a:ea typeface="Calibri" pitchFamily="34" charset="-122"/>
-                <a:cs typeface="Calibri" pitchFamily="34" charset="-120"/>
-              </a:rPr>
-              <a:t>01</a:t>
-            </a:r>
-            <a:endParaRPr lang="en-US" sz="1700" dirty="0"/>
-          </a:p>
-        </p:txBody>
-      </p:sp>
-      <p:sp>
-        <p:nvSpPr>
-          <p:cNvPr id="6" name="Text 4"/>
-          <p:cNvSpPr txBox="1"/>
-          <p:nvPr/>
-        </p:nvSpPr>
-        <p:spPr>
-          <a:xfrm>
-            <a:off x="822960" y="2788920"/>
-            <a:ext cx="2039112" cy="502920"/>
-          </a:xfrm>
-          <a:prstGeom prst="rect">
-            <a:avLst/>
-          </a:prstGeom>
-          <a:noFill/>
-          <a:ln/>
-        </p:spPr>
-        <p:txBody>
-          <a:bodyPr wrap="square" lIns="0" tIns="0" rIns="0" bIns="0" rtlCol="0" anchor="ctr"/>
-          <a:lstStyle/>
-          <a:p>
-            <a:pPr indent="0" marL="0">
-              <a:buNone/>
-            </a:pPr>
-            <a:r>
-              <a:rPr lang="en-US" sz="2100" b="1" dirty="0">
-                <a:solidFill>
-                  <a:srgbClr val="1F3A32"/>
-                </a:solidFill>
-                <a:latin typeface="Cambria" pitchFamily="34" charset="0"/>
-                <a:ea typeface="Cambria" pitchFamily="34" charset="-122"/>
-                <a:cs typeface="Cambria" pitchFamily="34" charset="-120"/>
-              </a:rPr>
-              <a:t>Prever o risco</a:t>
-            </a:r>
-            <a:endParaRPr lang="en-US" sz="2100" dirty="0"/>
-          </a:p>
-        </p:txBody>
-      </p:sp>
-      <p:sp>
-        <p:nvSpPr>
-          <p:cNvPr id="7" name="Text 5"/>
-          <p:cNvSpPr txBox="1"/>
-          <p:nvPr/>
-        </p:nvSpPr>
-        <p:spPr>
-          <a:xfrm>
-            <a:off x="822960" y="3383280"/>
-            <a:ext cx="2039112" cy="1691640"/>
-          </a:xfrm>
-          <a:prstGeom prst="rect">
-            <a:avLst/>
-          </a:prstGeom>
-          <a:noFill/>
-          <a:ln/>
-        </p:spPr>
-        <p:txBody>
-          <a:bodyPr wrap="square" lIns="0" tIns="0" rIns="0" bIns="0" rtlCol="0" anchor="t"/>
-          <a:lstStyle/>
-          <a:p>
-            <a:pPr indent="0" marL="0">
-              <a:buNone/>
-            </a:pPr>
-            <a:r>
-              <a:rPr lang="en-US" sz="1500" dirty="0">
-                <a:solidFill>
-                  <a:srgbClr val="1E2B27"/>
-                </a:solidFill>
-                <a:latin typeface="Calibri" pitchFamily="34" charset="0"/>
-                <a:ea typeface="Calibri" pitchFamily="34" charset="-122"/>
-                <a:cs typeface="Calibri" pitchFamily="34" charset="-120"/>
-              </a:rPr>
-              <a:t>Um modelo aponta quais municípios ficarão abaixo do patamar nacional, com um ano de antecedência.</a:t>
-            </a:r>
-            <a:endParaRPr lang="en-US" sz="1500" dirty="0"/>
-          </a:p>
-        </p:txBody>
-      </p:sp>
-      <p:sp>
-        <p:nvSpPr>
-          <p:cNvPr id="8" name="Shape 6"/>
+          <p:cNvPr id="10" name="Shape 8"/>
           <p:cNvSpPr/>
           <p:nvPr/>
         </p:nvSpPr>
         <p:spPr>
           <a:xfrm>
-            <a:off x="3410712" y="1691640"/>
-            <a:ext cx="2587752" cy="3154680"/>
+            <a:off x="4460138" y="1600200"/>
+            <a:ext cx="3271418" cy="2788920"/>
           </a:xfrm>
           <a:prstGeom prst="roundRect">
             <a:avLst>
-              <a:gd name="adj" fmla="val 3534"/>
+              <a:gd name="adj" fmla="val 3279"/>
             </a:avLst>
           </a:prstGeom>
           <a:solidFill>
@@ -3606,16 +4634,211 @@
       </p:sp>
       <p:sp>
         <p:nvSpPr>
-          <p:cNvPr id="9" name="Shape 7"/>
+          <p:cNvPr id="11" name="Text 9"/>
+          <p:cNvSpPr txBox="1"/>
+          <p:nvPr/>
+        </p:nvSpPr>
+        <p:spPr>
+          <a:xfrm>
+            <a:off x="4734458" y="1801368"/>
+            <a:ext cx="2722778" cy="274320"/>
+          </a:xfrm>
+          <a:prstGeom prst="rect">
+            <a:avLst/>
+          </a:prstGeom>
+          <a:noFill/>
+          <a:ln/>
+        </p:spPr>
+        <p:txBody>
+          <a:bodyPr wrap="square" lIns="0" tIns="0" rIns="0" bIns="0" rtlCol="0" anchor="ctr"/>
+          <a:lstStyle/>
+          <a:p>
+            <a:pPr indent="0" marL="0">
+              <a:buNone/>
+            </a:pPr>
+            <a:r>
+              <a:rPr lang="en-US" sz="1200" b="1" spc="200" kern="0" dirty="0">
+                <a:solidFill>
+                  <a:srgbClr val="3E7A62"/>
+                </a:solidFill>
+                <a:latin typeface="Calibri" pitchFamily="34" charset="0"/>
+                <a:ea typeface="Calibri" pitchFamily="34" charset="-122"/>
+                <a:cs typeface="Calibri" pitchFamily="34" charset="-120"/>
+              </a:rPr>
+              <a:t>FONTE 2</a:t>
+            </a:r>
+            <a:endParaRPr lang="en-US" sz="1200" dirty="0"/>
+          </a:p>
+        </p:txBody>
+      </p:sp>
+      <p:sp>
+        <p:nvSpPr>
+          <p:cNvPr id="12" name="Text 10"/>
+          <p:cNvSpPr txBox="1"/>
+          <p:nvPr/>
+        </p:nvSpPr>
+        <p:spPr>
+          <a:xfrm>
+            <a:off x="4734458" y="2075688"/>
+            <a:ext cx="2722778" cy="457200"/>
+          </a:xfrm>
+          <a:prstGeom prst="rect">
+            <a:avLst/>
+          </a:prstGeom>
+          <a:noFill/>
+          <a:ln/>
+        </p:spPr>
+        <p:txBody>
+          <a:bodyPr wrap="square" lIns="0" tIns="0" rIns="0" bIns="0" rtlCol="0" anchor="ctr"/>
+          <a:lstStyle/>
+          <a:p>
+            <a:pPr indent="0" marL="0">
+              <a:buNone/>
+            </a:pPr>
+            <a:r>
+              <a:rPr lang="en-US" sz="2000" b="1" dirty="0">
+                <a:solidFill>
+                  <a:srgbClr val="1F3A32"/>
+                </a:solidFill>
+                <a:latin typeface="Cambria" pitchFamily="34" charset="0"/>
+                <a:ea typeface="Cambria" pitchFamily="34" charset="-122"/>
+                <a:cs typeface="Cambria" pitchFamily="34" charset="-120"/>
+              </a:rPr>
+              <a:t>Enriquecimento IBGE</a:t>
+            </a:r>
+            <a:endParaRPr lang="en-US" sz="2000" dirty="0"/>
+          </a:p>
+        </p:txBody>
+      </p:sp>
+      <p:sp>
+        <p:nvSpPr>
+          <p:cNvPr id="13" name="Text 11"/>
+          <p:cNvSpPr txBox="1"/>
+          <p:nvPr/>
+        </p:nvSpPr>
+        <p:spPr>
+          <a:xfrm>
+            <a:off x="4734458" y="2587752"/>
+            <a:ext cx="2722778" cy="914400"/>
+          </a:xfrm>
+          <a:prstGeom prst="rect">
+            <a:avLst/>
+          </a:prstGeom>
+          <a:noFill/>
+          <a:ln/>
+        </p:spPr>
+        <p:txBody>
+          <a:bodyPr wrap="square" lIns="0" tIns="0" rIns="0" bIns="0" rtlCol="0" anchor="t"/>
+          <a:lstStyle/>
+          <a:p>
+            <a:pPr indent="0" marL="0">
+              <a:buNone/>
+            </a:pPr>
+            <a:r>
+              <a:rPr lang="en-US" sz="1400" dirty="0">
+                <a:solidFill>
+                  <a:srgbClr val="1E2B27"/>
+                </a:solidFill>
+                <a:latin typeface="Calibri" pitchFamily="34" charset="0"/>
+                <a:ea typeface="Calibri" pitchFamily="34" charset="-122"/>
+                <a:cs typeface="Calibri" pitchFamily="34" charset="-120"/>
+              </a:rPr>
+              <a:t>População, densidade, PIB per capita e alfabetização dos adultos (Censo 2022)</a:t>
+            </a:r>
+            <a:endParaRPr lang="en-US" sz="1400" dirty="0"/>
+          </a:p>
+        </p:txBody>
+      </p:sp>
+      <p:sp>
+        <p:nvSpPr>
+          <p:cNvPr id="14" name="Text 12"/>
+          <p:cNvSpPr txBox="1"/>
+          <p:nvPr/>
+        </p:nvSpPr>
+        <p:spPr>
+          <a:xfrm>
+            <a:off x="4734458" y="3474720"/>
+            <a:ext cx="2722778" cy="548640"/>
+          </a:xfrm>
+          <a:prstGeom prst="rect">
+            <a:avLst/>
+          </a:prstGeom>
+          <a:noFill/>
+          <a:ln/>
+        </p:spPr>
+        <p:txBody>
+          <a:bodyPr wrap="square" lIns="0" tIns="0" rIns="0" bIns="0" rtlCol="0" anchor="ctr"/>
+          <a:lstStyle/>
+          <a:p>
+            <a:pPr indent="0" marL="0">
+              <a:buNone/>
+            </a:pPr>
+            <a:r>
+              <a:rPr lang="en-US" sz="3000" b="1" dirty="0">
+                <a:solidFill>
+                  <a:srgbClr val="3E7A62"/>
+                </a:solidFill>
+                <a:latin typeface="Cambria" pitchFamily="34" charset="0"/>
+                <a:ea typeface="Cambria" pitchFamily="34" charset="-122"/>
+                <a:cs typeface="Cambria" pitchFamily="34" charset="-120"/>
+              </a:rPr>
+              <a:t>4 fontes</a:t>
+            </a:r>
+            <a:endParaRPr lang="en-US" sz="3000" dirty="0"/>
+          </a:p>
+        </p:txBody>
+      </p:sp>
+      <p:sp>
+        <p:nvSpPr>
+          <p:cNvPr id="15" name="Text 13"/>
+          <p:cNvSpPr txBox="1"/>
+          <p:nvPr/>
+        </p:nvSpPr>
+        <p:spPr>
+          <a:xfrm>
+            <a:off x="4734458" y="3995928"/>
+            <a:ext cx="2722778" cy="274320"/>
+          </a:xfrm>
+          <a:prstGeom prst="rect">
+            <a:avLst/>
+          </a:prstGeom>
+          <a:noFill/>
+          <a:ln/>
+        </p:spPr>
+        <p:txBody>
+          <a:bodyPr wrap="square" lIns="0" tIns="0" rIns="0" bIns="0" rtlCol="0" anchor="ctr"/>
+          <a:lstStyle/>
+          <a:p>
+            <a:pPr indent="0" marL="0">
+              <a:buNone/>
+            </a:pPr>
+            <a:r>
+              <a:rPr lang="en-US" sz="1200" dirty="0">
+                <a:solidFill>
+                  <a:srgbClr val="5F6B66"/>
+                </a:solidFill>
+                <a:latin typeface="Calibri" pitchFamily="34" charset="0"/>
+                <a:ea typeface="Calibri" pitchFamily="34" charset="-122"/>
+                <a:cs typeface="Calibri" pitchFamily="34" charset="-120"/>
+              </a:rPr>
+              <a:t>5.571 municípios cobertos</a:t>
+            </a:r>
+            <a:endParaRPr lang="en-US" sz="1200" dirty="0"/>
+          </a:p>
+        </p:txBody>
+      </p:sp>
+      <p:sp>
+        <p:nvSpPr>
+          <p:cNvPr id="16" name="Shape 14"/>
           <p:cNvSpPr/>
           <p:nvPr/>
         </p:nvSpPr>
         <p:spPr>
           <a:xfrm>
-            <a:off x="3685032" y="2011680"/>
-            <a:ext cx="566928" cy="566928"/>
-          </a:xfrm>
-          <a:prstGeom prst="ellipse">
+            <a:off x="7859573" y="2811780"/>
+            <a:ext cx="384048" cy="365760"/>
+          </a:xfrm>
+          <a:prstGeom prst="rightArrow">
             <a:avLst/>
           </a:prstGeom>
           <a:solidFill>
@@ -3631,14 +4854,41 @@
       </p:sp>
       <p:sp>
         <p:nvSpPr>
-          <p:cNvPr id="10" name="Text 8"/>
-          <p:cNvSpPr txBox="1"/>
-          <p:nvPr/>
-        </p:nvSpPr>
-        <p:spPr>
-          <a:xfrm>
-            <a:off x="3685032" y="2011680"/>
-            <a:ext cx="566928" cy="566928"/>
+          <p:cNvPr id="17" name="Shape 15"/>
+          <p:cNvSpPr/>
+          <p:nvPr/>
+        </p:nvSpPr>
+        <p:spPr>
+          <a:xfrm>
+            <a:off x="8371637" y="1600200"/>
+            <a:ext cx="3271418" cy="2788920"/>
+          </a:xfrm>
+          <a:prstGeom prst="roundRect">
+            <a:avLst>
+              <a:gd name="adj" fmla="val 3279"/>
+            </a:avLst>
+          </a:prstGeom>
+          <a:solidFill>
+            <a:srgbClr val="1F3A32"/>
+          </a:solidFill>
+          <a:ln w="12700">
+            <a:solidFill>
+              <a:srgbClr val="1F3A32"/>
+            </a:solidFill>
+            <a:prstDash val="solid"/>
+          </a:ln>
+        </p:spPr>
+      </p:sp>
+      <p:sp>
+        <p:nvSpPr>
+          <p:cNvPr id="18" name="Text 16"/>
+          <p:cNvSpPr txBox="1"/>
+          <p:nvPr/>
+        </p:nvSpPr>
+        <p:spPr>
+          <a:xfrm>
+            <a:off x="8645957" y="1801368"/>
+            <a:ext cx="2722778" cy="274320"/>
           </a:xfrm>
           <a:prstGeom prst="rect">
             <a:avLst/>
@@ -3650,34 +4900,34 @@
           <a:bodyPr wrap="square" lIns="0" tIns="0" rIns="0" bIns="0" rtlCol="0" anchor="ctr"/>
           <a:lstStyle/>
           <a:p>
-            <a:pPr algn="ctr" indent="0" marL="0">
-              <a:buNone/>
-            </a:pPr>
-            <a:r>
-              <a:rPr lang="en-US" sz="1700" b="1" dirty="0">
-                <a:solidFill>
-                  <a:srgbClr val="1F3A32"/>
+            <a:pPr indent="0" marL="0">
+              <a:buNone/>
+            </a:pPr>
+            <a:r>
+              <a:rPr lang="en-US" sz="1200" b="1" spc="200" kern="0" dirty="0">
+                <a:solidFill>
+                  <a:srgbClr val="F2B705"/>
                 </a:solidFill>
                 <a:latin typeface="Calibri" pitchFamily="34" charset="0"/>
                 <a:ea typeface="Calibri" pitchFamily="34" charset="-122"/>
                 <a:cs typeface="Calibri" pitchFamily="34" charset="-120"/>
               </a:rPr>
-              <a:t>02</a:t>
-            </a:r>
-            <a:endParaRPr lang="en-US" sz="1700" dirty="0"/>
-          </a:p>
-        </p:txBody>
-      </p:sp>
-      <p:sp>
-        <p:nvSpPr>
-          <p:cNvPr id="11" name="Text 9"/>
-          <p:cNvSpPr txBox="1"/>
-          <p:nvPr/>
-        </p:nvSpPr>
-        <p:spPr>
-          <a:xfrm>
-            <a:off x="3685032" y="2788920"/>
-            <a:ext cx="2039112" cy="502920"/>
+              <a:t>RESULTADO</a:t>
+            </a:r>
+            <a:endParaRPr lang="en-US" sz="1200" dirty="0"/>
+          </a:p>
+        </p:txBody>
+      </p:sp>
+      <p:sp>
+        <p:nvSpPr>
+          <p:cNvPr id="19" name="Text 17"/>
+          <p:cNvSpPr txBox="1"/>
+          <p:nvPr/>
+        </p:nvSpPr>
+        <p:spPr>
+          <a:xfrm>
+            <a:off x="8645957" y="2075688"/>
+            <a:ext cx="2722778" cy="457200"/>
           </a:xfrm>
           <a:prstGeom prst="rect">
             <a:avLst/>
@@ -3693,30 +4943,30 @@
               <a:buNone/>
             </a:pPr>
             <a:r>
-              <a:rPr lang="en-US" sz="2100" b="1" dirty="0">
-                <a:solidFill>
-                  <a:srgbClr val="1F3A32"/>
+              <a:rPr lang="en-US" sz="2000" b="1" dirty="0">
+                <a:solidFill>
+                  <a:srgbClr val="F7F7F2"/>
                 </a:solidFill>
                 <a:latin typeface="Cambria" pitchFamily="34" charset="0"/>
                 <a:ea typeface="Cambria" pitchFamily="34" charset="-122"/>
                 <a:cs typeface="Cambria" pitchFamily="34" charset="-120"/>
               </a:rPr>
-              <a:t>Entender perfis</a:t>
-            </a:r>
-            <a:endParaRPr lang="en-US" sz="2100" dirty="0"/>
-          </a:p>
-        </p:txBody>
-      </p:sp>
-      <p:sp>
-        <p:nvSpPr>
-          <p:cNvPr id="12" name="Text 10"/>
-          <p:cNvSpPr txBox="1"/>
-          <p:nvPr/>
-        </p:nvSpPr>
-        <p:spPr>
-          <a:xfrm>
-            <a:off x="3685032" y="3383280"/>
-            <a:ext cx="2039112" cy="1691640"/>
+              <a:t>Base analítica</a:t>
+            </a:r>
+            <a:endParaRPr lang="en-US" sz="2000" dirty="0"/>
+          </a:p>
+        </p:txBody>
+      </p:sp>
+      <p:sp>
+        <p:nvSpPr>
+          <p:cNvPr id="20" name="Text 18"/>
+          <p:cNvSpPr txBox="1"/>
+          <p:nvPr/>
+        </p:nvSpPr>
+        <p:spPr>
+          <a:xfrm>
+            <a:off x="8645957" y="2587752"/>
+            <a:ext cx="2722778" cy="914400"/>
           </a:xfrm>
           <a:prstGeom prst="rect">
             <a:avLst/>
@@ -3732,34 +4982,112 @@
               <a:buNone/>
             </a:pPr>
             <a:r>
-              <a:rPr lang="en-US" sz="1500" dirty="0">
-                <a:solidFill>
-                  <a:srgbClr val="1E2B27"/>
+              <a:rPr lang="en-US" sz="1400" dirty="0">
+                <a:solidFill>
+                  <a:srgbClr val="F7F7F2"/>
                 </a:solidFill>
                 <a:latin typeface="Calibri" pitchFamily="34" charset="0"/>
                 <a:ea typeface="Calibri" pitchFamily="34" charset="-122"/>
                 <a:cs typeface="Calibri" pitchFamily="34" charset="-120"/>
               </a:rPr>
-              <a:t>Os municípios são agrupados em quatro perfis, porque risco não é tudo igual.</a:t>
-            </a:r>
-            <a:endParaRPr lang="en-US" sz="1500" dirty="0"/>
-          </a:p>
-        </p:txBody>
-      </p:sp>
-      <p:sp>
-        <p:nvSpPr>
-          <p:cNvPr id="13" name="Shape 11"/>
+              <a:t>Uma linha por município: o histórico de 2023 prevê o resultado de 2024</a:t>
+            </a:r>
+            <a:endParaRPr lang="en-US" sz="1400" dirty="0"/>
+          </a:p>
+        </p:txBody>
+      </p:sp>
+      <p:sp>
+        <p:nvSpPr>
+          <p:cNvPr id="21" name="Text 19"/>
+          <p:cNvSpPr txBox="1"/>
+          <p:nvPr/>
+        </p:nvSpPr>
+        <p:spPr>
+          <a:xfrm>
+            <a:off x="8645957" y="3474720"/>
+            <a:ext cx="2722778" cy="548640"/>
+          </a:xfrm>
+          <a:prstGeom prst="rect">
+            <a:avLst/>
+          </a:prstGeom>
+          <a:noFill/>
+          <a:ln/>
+        </p:spPr>
+        <p:txBody>
+          <a:bodyPr wrap="square" lIns="0" tIns="0" rIns="0" bIns="0" rtlCol="0" anchor="ctr"/>
+          <a:lstStyle/>
+          <a:p>
+            <a:pPr indent="0" marL="0">
+              <a:buNone/>
+            </a:pPr>
+            <a:r>
+              <a:rPr lang="en-US" sz="3000" b="1" dirty="0">
+                <a:solidFill>
+                  <a:srgbClr val="F2B705"/>
+                </a:solidFill>
+                <a:latin typeface="Cambria" pitchFamily="34" charset="0"/>
+                <a:ea typeface="Cambria" pitchFamily="34" charset="-122"/>
+                <a:cs typeface="Cambria" pitchFamily="34" charset="-120"/>
+              </a:rPr>
+              <a:t>5.396</a:t>
+            </a:r>
+            <a:endParaRPr lang="en-US" sz="3000" dirty="0"/>
+          </a:p>
+        </p:txBody>
+      </p:sp>
+      <p:sp>
+        <p:nvSpPr>
+          <p:cNvPr id="22" name="Text 20"/>
+          <p:cNvSpPr txBox="1"/>
+          <p:nvPr/>
+        </p:nvSpPr>
+        <p:spPr>
+          <a:xfrm>
+            <a:off x="8645957" y="3995928"/>
+            <a:ext cx="2722778" cy="274320"/>
+          </a:xfrm>
+          <a:prstGeom prst="rect">
+            <a:avLst/>
+          </a:prstGeom>
+          <a:noFill/>
+          <a:ln/>
+        </p:spPr>
+        <p:txBody>
+          <a:bodyPr wrap="square" lIns="0" tIns="0" rIns="0" bIns="0" rtlCol="0" anchor="ctr"/>
+          <a:lstStyle/>
+          <a:p>
+            <a:pPr indent="0" marL="0">
+              <a:buNone/>
+            </a:pPr>
+            <a:r>
+              <a:rPr lang="en-US" sz="1200" dirty="0">
+                <a:solidFill>
+                  <a:srgbClr val="C9D6D0"/>
+                </a:solidFill>
+                <a:latin typeface="Calibri" pitchFamily="34" charset="0"/>
+                <a:ea typeface="Calibri" pitchFamily="34" charset="-122"/>
+                <a:cs typeface="Calibri" pitchFamily="34" charset="-120"/>
+              </a:rPr>
+              <a:t>municípios × 20 variáveis</a:t>
+            </a:r>
+            <a:endParaRPr lang="en-US" sz="1200" dirty="0"/>
+          </a:p>
+        </p:txBody>
+      </p:sp>
+      <p:sp>
+        <p:nvSpPr>
+          <p:cNvPr id="23" name="Shape 21"/>
           <p:cNvSpPr/>
           <p:nvPr/>
         </p:nvSpPr>
         <p:spPr>
           <a:xfrm>
-            <a:off x="6272784" y="1691640"/>
-            <a:ext cx="2587752" cy="3154680"/>
+            <a:off x="548640" y="4663440"/>
+            <a:ext cx="5410048" cy="1280160"/>
           </a:xfrm>
           <a:prstGeom prst="roundRect">
             <a:avLst>
-              <a:gd name="adj" fmla="val 3534"/>
+              <a:gd name="adj" fmla="val 7143"/>
             </a:avLst>
           </a:prstGeom>
           <a:solidFill>
@@ -3775,39 +5103,14 @@
       </p:sp>
       <p:sp>
         <p:nvSpPr>
-          <p:cNvPr id="14" name="Shape 12"/>
-          <p:cNvSpPr/>
-          <p:nvPr/>
-        </p:nvSpPr>
-        <p:spPr>
-          <a:xfrm>
-            <a:off x="6547104" y="2011680"/>
-            <a:ext cx="566928" cy="566928"/>
-          </a:xfrm>
-          <a:prstGeom prst="ellipse">
-            <a:avLst/>
-          </a:prstGeom>
-          <a:solidFill>
-            <a:srgbClr val="F2B705"/>
-          </a:solidFill>
-          <a:ln w="12700">
-            <a:solidFill>
-              <a:srgbClr val="F2B705"/>
-            </a:solidFill>
-            <a:prstDash val="solid"/>
-          </a:ln>
-        </p:spPr>
-      </p:sp>
-      <p:sp>
-        <p:nvSpPr>
-          <p:cNvPr id="15" name="Text 13"/>
-          <p:cNvSpPr txBox="1"/>
-          <p:nvPr/>
-        </p:nvSpPr>
-        <p:spPr>
-          <a:xfrm>
-            <a:off x="6547104" y="2011680"/>
-            <a:ext cx="566928" cy="566928"/>
+          <p:cNvPr id="24" name="Text 22"/>
+          <p:cNvSpPr txBox="1"/>
+          <p:nvPr/>
+        </p:nvSpPr>
+        <p:spPr>
+          <a:xfrm>
+            <a:off x="822960" y="4864608"/>
+            <a:ext cx="4861408" cy="365760"/>
           </a:xfrm>
           <a:prstGeom prst="rect">
             <a:avLst/>
@@ -3819,116 +5122,77 @@
           <a:bodyPr wrap="square" lIns="0" tIns="0" rIns="0" bIns="0" rtlCol="0" anchor="ctr"/>
           <a:lstStyle/>
           <a:p>
-            <a:pPr algn="ctr" indent="0" marL="0">
-              <a:buNone/>
-            </a:pPr>
-            <a:r>
-              <a:rPr lang="en-US" sz="1700" b="1" dirty="0">
+            <a:pPr indent="0" marL="0">
+              <a:buNone/>
+            </a:pPr>
+            <a:r>
+              <a:rPr lang="en-US" sz="1800" b="1" dirty="0">
                 <a:solidFill>
                   <a:srgbClr val="1F3A32"/>
+                </a:solidFill>
+                <a:latin typeface="Cambria" pitchFamily="34" charset="0"/>
+                <a:ea typeface="Cambria" pitchFamily="34" charset="-122"/>
+                <a:cs typeface="Cambria" pitchFamily="34" charset="-120"/>
+              </a:rPr>
+              <a:t>O que o modelo prevê</a:t>
+            </a:r>
+            <a:endParaRPr lang="en-US" sz="1800" dirty="0"/>
+          </a:p>
+        </p:txBody>
+      </p:sp>
+      <p:sp>
+        <p:nvSpPr>
+          <p:cNvPr id="25" name="Text 23"/>
+          <p:cNvSpPr txBox="1"/>
+          <p:nvPr/>
+        </p:nvSpPr>
+        <p:spPr>
+          <a:xfrm>
+            <a:off x="822960" y="5266944"/>
+            <a:ext cx="4861408" cy="731520"/>
+          </a:xfrm>
+          <a:prstGeom prst="rect">
+            <a:avLst/>
+          </a:prstGeom>
+          <a:noFill/>
+          <a:ln/>
+        </p:spPr>
+        <p:txBody>
+          <a:bodyPr wrap="square" lIns="0" tIns="0" rIns="0" bIns="0" rtlCol="0" anchor="t"/>
+          <a:lstStyle/>
+          <a:p>
+            <a:pPr indent="0" marL="0">
+              <a:buNone/>
+            </a:pPr>
+            <a:r>
+              <a:rPr lang="en-US" sz="1400" dirty="0">
+                <a:solidFill>
+                  <a:srgbClr val="1E2B27"/>
                 </a:solidFill>
                 <a:latin typeface="Calibri" pitchFamily="34" charset="0"/>
                 <a:ea typeface="Calibri" pitchFamily="34" charset="-122"/>
                 <a:cs typeface="Calibri" pitchFamily="34" charset="-120"/>
               </a:rPr>
-              <a:t>03</a:t>
-            </a:r>
-            <a:endParaRPr lang="en-US" sz="1700" dirty="0"/>
-          </a:p>
-        </p:txBody>
-      </p:sp>
-      <p:sp>
-        <p:nvSpPr>
-          <p:cNvPr id="16" name="Text 14"/>
-          <p:cNvSpPr txBox="1"/>
-          <p:nvPr/>
-        </p:nvSpPr>
-        <p:spPr>
-          <a:xfrm>
-            <a:off x="6547104" y="2788920"/>
-            <a:ext cx="2039112" cy="502920"/>
-          </a:xfrm>
-          <a:prstGeom prst="rect">
-            <a:avLst/>
-          </a:prstGeom>
-          <a:noFill/>
-          <a:ln/>
-        </p:spPr>
-        <p:txBody>
-          <a:bodyPr wrap="square" lIns="0" tIns="0" rIns="0" bIns="0" rtlCol="0" anchor="ctr"/>
-          <a:lstStyle/>
-          <a:p>
-            <a:pPr indent="0" marL="0">
-              <a:buNone/>
-            </a:pPr>
-            <a:r>
-              <a:rPr lang="en-US" sz="2100" b="1" dirty="0">
-                <a:solidFill>
-                  <a:srgbClr val="1F3A32"/>
-                </a:solidFill>
-                <a:latin typeface="Cambria" pitchFamily="34" charset="0"/>
-                <a:ea typeface="Cambria" pitchFamily="34" charset="-122"/>
-                <a:cs typeface="Cambria" pitchFamily="34" charset="-120"/>
-              </a:rPr>
-              <a:t>Projetar 2030</a:t>
-            </a:r>
-            <a:endParaRPr lang="en-US" sz="2100" dirty="0"/>
-          </a:p>
-        </p:txBody>
-      </p:sp>
-      <p:sp>
-        <p:nvSpPr>
-          <p:cNvPr id="17" name="Text 15"/>
-          <p:cNvSpPr txBox="1"/>
-          <p:nvPr/>
-        </p:nvSpPr>
-        <p:spPr>
-          <a:xfrm>
-            <a:off x="6547104" y="3383280"/>
-            <a:ext cx="2039112" cy="1691640"/>
-          </a:xfrm>
-          <a:prstGeom prst="rect">
-            <a:avLst/>
-          </a:prstGeom>
-          <a:noFill/>
-          <a:ln/>
-        </p:spPr>
-        <p:txBody>
-          <a:bodyPr wrap="square" lIns="0" tIns="0" rIns="0" bIns="0" rtlCol="0" anchor="t"/>
-          <a:lstStyle/>
-          <a:p>
-            <a:pPr indent="0" marL="0">
-              <a:buNone/>
-            </a:pPr>
-            <a:r>
-              <a:rPr lang="en-US" sz="1500" dirty="0">
-                <a:solidFill>
-                  <a:srgbClr val="1E2B27"/>
-                </a:solidFill>
-                <a:latin typeface="Calibri" pitchFamily="34" charset="0"/>
-                <a:ea typeface="Calibri" pitchFamily="34" charset="-122"/>
-                <a:cs typeface="Calibri" pitchFamily="34" charset="-120"/>
-              </a:rPr>
-              <a:t>Uma projeção mostra quem chega à meta de 80% no ritmo atual e quem não chega.</a:t>
-            </a:r>
-            <a:endParaRPr lang="en-US" sz="1500" dirty="0"/>
-          </a:p>
-        </p:txBody>
-      </p:sp>
-      <p:sp>
-        <p:nvSpPr>
-          <p:cNvPr id="18" name="Shape 16"/>
+              <a:t>Se o município alfabetiza pelo menos 60% das crianças em 2024 — o patamar nacional. Classes equilibradas: 57% sim, 43% não.</a:t>
+            </a:r>
+            <a:endParaRPr lang="en-US" sz="1400" dirty="0"/>
+          </a:p>
+        </p:txBody>
+      </p:sp>
+      <p:sp>
+        <p:nvSpPr>
+          <p:cNvPr id="26" name="Shape 24"/>
           <p:cNvSpPr/>
           <p:nvPr/>
         </p:nvSpPr>
         <p:spPr>
           <a:xfrm>
-            <a:off x="9134856" y="1691640"/>
-            <a:ext cx="2587752" cy="3154680"/>
+            <a:off x="6233008" y="4663440"/>
+            <a:ext cx="5410048" cy="1280160"/>
           </a:xfrm>
           <a:prstGeom prst="roundRect">
             <a:avLst>
-              <a:gd name="adj" fmla="val 3534"/>
+              <a:gd name="adj" fmla="val 7143"/>
             </a:avLst>
           </a:prstGeom>
           <a:solidFill>
@@ -3944,39 +5208,14 @@
       </p:sp>
       <p:sp>
         <p:nvSpPr>
-          <p:cNvPr id="19" name="Shape 17"/>
-          <p:cNvSpPr/>
-          <p:nvPr/>
-        </p:nvSpPr>
-        <p:spPr>
-          <a:xfrm>
-            <a:off x="9409176" y="2011680"/>
-            <a:ext cx="566928" cy="566928"/>
-          </a:xfrm>
-          <a:prstGeom prst="ellipse">
-            <a:avLst/>
-          </a:prstGeom>
-          <a:solidFill>
-            <a:srgbClr val="F2B705"/>
-          </a:solidFill>
-          <a:ln w="12700">
-            <a:solidFill>
-              <a:srgbClr val="F2B705"/>
-            </a:solidFill>
-            <a:prstDash val="solid"/>
-          </a:ln>
-        </p:spPr>
-      </p:sp>
-      <p:sp>
-        <p:nvSpPr>
-          <p:cNvPr id="20" name="Text 18"/>
-          <p:cNvSpPr txBox="1"/>
-          <p:nvPr/>
-        </p:nvSpPr>
-        <p:spPr>
-          <a:xfrm>
-            <a:off x="9409176" y="2011680"/>
-            <a:ext cx="566928" cy="566928"/>
+          <p:cNvPr id="27" name="Text 25"/>
+          <p:cNvSpPr txBox="1"/>
+          <p:nvPr/>
+        </p:nvSpPr>
+        <p:spPr>
+          <a:xfrm>
+            <a:off x="6507328" y="4864608"/>
+            <a:ext cx="4861408" cy="365760"/>
           </a:xfrm>
           <a:prstGeom prst="rect">
             <a:avLst/>
@@ -3988,34 +5227,73 @@
           <a:bodyPr wrap="square" lIns="0" tIns="0" rIns="0" bIns="0" rtlCol="0" anchor="ctr"/>
           <a:lstStyle/>
           <a:p>
-            <a:pPr algn="ctr" indent="0" marL="0">
-              <a:buNone/>
-            </a:pPr>
-            <a:r>
-              <a:rPr lang="en-US" sz="1700" b="1" dirty="0">
+            <a:pPr indent="0" marL="0">
+              <a:buNone/>
+            </a:pPr>
+            <a:r>
+              <a:rPr lang="en-US" sz="1800" b="1" dirty="0">
                 <a:solidFill>
                   <a:srgbClr val="1F3A32"/>
+                </a:solidFill>
+                <a:latin typeface="Cambria" pitchFamily="34" charset="0"/>
+                <a:ea typeface="Cambria" pitchFamily="34" charset="-122"/>
+                <a:cs typeface="Cambria" pitchFamily="34" charset="-120"/>
+              </a:rPr>
+              <a:t>Sem vazamento de dados</a:t>
+            </a:r>
+            <a:endParaRPr lang="en-US" sz="1800" dirty="0"/>
+          </a:p>
+        </p:txBody>
+      </p:sp>
+      <p:sp>
+        <p:nvSpPr>
+          <p:cNvPr id="28" name="Text 26"/>
+          <p:cNvSpPr txBox="1"/>
+          <p:nvPr/>
+        </p:nvSpPr>
+        <p:spPr>
+          <a:xfrm>
+            <a:off x="6507328" y="5266944"/>
+            <a:ext cx="4861408" cy="731520"/>
+          </a:xfrm>
+          <a:prstGeom prst="rect">
+            <a:avLst/>
+          </a:prstGeom>
+          <a:noFill/>
+          <a:ln/>
+        </p:spPr>
+        <p:txBody>
+          <a:bodyPr wrap="square" lIns="0" tIns="0" rIns="0" bIns="0" rtlCol="0" anchor="t"/>
+          <a:lstStyle/>
+          <a:p>
+            <a:pPr indent="0" marL="0">
+              <a:buNone/>
+            </a:pPr>
+            <a:r>
+              <a:rPr lang="en-US" sz="1400" dirty="0">
+                <a:solidFill>
+                  <a:srgbClr val="1E2B27"/>
                 </a:solidFill>
                 <a:latin typeface="Calibri" pitchFamily="34" charset="0"/>
                 <a:ea typeface="Calibri" pitchFamily="34" charset="-122"/>
                 <a:cs typeface="Calibri" pitchFamily="34" charset="-120"/>
               </a:rPr>
-              <a:t>04</a:t>
-            </a:r>
-            <a:endParaRPr lang="en-US" sz="1700" dirty="0"/>
-          </a:p>
-        </p:txBody>
-      </p:sp>
-      <p:sp>
-        <p:nvSpPr>
-          <p:cNvPr id="21" name="Text 19"/>
-          <p:cNvSpPr txBox="1"/>
-          <p:nvPr/>
-        </p:nvSpPr>
-        <p:spPr>
-          <a:xfrm>
-            <a:off x="9409176" y="2788920"/>
-            <a:ext cx="2039112" cy="502920"/>
+              <a:t>Nenhuma medida da prova de 2024 entra como variável. Treino com 4.316 municípios e teste com 1.080 nunca vistos.</a:t>
+            </a:r>
+            <a:endParaRPr lang="en-US" sz="1400" dirty="0"/>
+          </a:p>
+        </p:txBody>
+      </p:sp>
+      <p:sp>
+        <p:nvSpPr>
+          <p:cNvPr id="29" name="Text 27"/>
+          <p:cNvSpPr txBox="1"/>
+          <p:nvPr/>
+        </p:nvSpPr>
+        <p:spPr>
+          <a:xfrm>
+            <a:off x="10545775" y="6400800"/>
+            <a:ext cx="1097280" cy="274320"/>
           </a:xfrm>
           <a:prstGeom prst="rect">
             <a:avLst/>
@@ -4027,150 +5305,19 @@
           <a:bodyPr wrap="square" lIns="0" tIns="0" rIns="0" bIns="0" rtlCol="0" anchor="ctr"/>
           <a:lstStyle/>
           <a:p>
-            <a:pPr indent="0" marL="0">
-              <a:buNone/>
-            </a:pPr>
-            <a:r>
-              <a:rPr lang="en-US" sz="2100" b="1" dirty="0">
-                <a:solidFill>
-                  <a:srgbClr val="1F3A32"/>
-                </a:solidFill>
-                <a:latin typeface="Cambria" pitchFamily="34" charset="0"/>
-                <a:ea typeface="Cambria" pitchFamily="34" charset="-122"/>
-                <a:cs typeface="Cambria" pitchFamily="34" charset="-120"/>
-              </a:rPr>
-              <a:t>Alocar recursos</a:t>
-            </a:r>
-            <a:endParaRPr lang="en-US" sz="2100" dirty="0"/>
-          </a:p>
-        </p:txBody>
-      </p:sp>
-      <p:sp>
-        <p:nvSpPr>
-          <p:cNvPr id="22" name="Text 20"/>
-          <p:cNvSpPr txBox="1"/>
-          <p:nvPr/>
-        </p:nvSpPr>
-        <p:spPr>
-          <a:xfrm>
-            <a:off x="9409176" y="3383280"/>
-            <a:ext cx="2039112" cy="1691640"/>
-          </a:xfrm>
-          <a:prstGeom prst="rect">
-            <a:avLst/>
-          </a:prstGeom>
-          <a:noFill/>
-          <a:ln/>
-        </p:spPr>
-        <p:txBody>
-          <a:bodyPr wrap="square" lIns="0" tIns="0" rIns="0" bIns="0" rtlCol="0" anchor="t"/>
-          <a:lstStyle/>
-          <a:p>
-            <a:pPr indent="0" marL="0">
-              <a:buNone/>
-            </a:pPr>
-            <a:r>
-              <a:rPr lang="en-US" sz="1500" dirty="0">
-                <a:solidFill>
-                  <a:srgbClr val="1E2B27"/>
+            <a:pPr algn="r" indent="0" marL="0">
+              <a:buNone/>
+            </a:pPr>
+            <a:r>
+              <a:rPr lang="en-US" sz="1000" dirty="0">
+                <a:solidFill>
+                  <a:srgbClr val="5F6B66"/>
                 </a:solidFill>
                 <a:latin typeface="Calibri" pitchFamily="34" charset="0"/>
                 <a:ea typeface="Calibri" pitchFamily="34" charset="-122"/>
                 <a:cs typeface="Calibri" pitchFamily="34" charset="-120"/>
               </a:rPr>
-              <a:t>Um sistema aprende qual intervenção rende mais em cada perfil de município.</a:t>
-            </a:r>
-            <a:endParaRPr lang="en-US" sz="1500" dirty="0"/>
-          </a:p>
-        </p:txBody>
-      </p:sp>
-      <p:sp>
-        <p:nvSpPr>
-          <p:cNvPr id="23" name="Text 21"/>
-          <p:cNvSpPr txBox="1"/>
-          <p:nvPr/>
-        </p:nvSpPr>
-        <p:spPr>
-          <a:xfrm>
-            <a:off x="548640" y="5257800"/>
-            <a:ext cx="11094415" cy="457200"/>
-          </a:xfrm>
-          <a:prstGeom prst="rect">
-            <a:avLst/>
-          </a:prstGeom>
-          <a:noFill/>
-          <a:ln/>
-        </p:spPr>
-        <p:txBody>
-          <a:bodyPr wrap="square" lIns="0" tIns="0" rIns="0" bIns="0" rtlCol="0" anchor="ctr"/>
-          <a:lstStyle/>
-          <a:p>
-            <a:pPr indent="0" marL="0">
-              <a:buNone/>
-            </a:pPr>
-            <a:r>
-              <a:rPr lang="en-US" sz="1400" b="1" dirty="0">
-                <a:solidFill>
-                  <a:srgbClr val="1F3A32"/>
-                </a:solidFill>
-                <a:latin typeface="Calibri" pitchFamily="34" charset="0"/>
-                <a:ea typeface="Calibri" pitchFamily="34" charset="-122"/>
-                <a:cs typeface="Calibri" pitchFamily="34" charset="-120"/>
-              </a:rPr>
-              <a:t>Base: </a:t>
-            </a:r>
-            <a:pPr indent="0" marL="0">
-              <a:buNone/>
-            </a:pPr>
-            <a:r>
-              <a:rPr lang="en-US" sz="1400" dirty="0">
-                <a:solidFill>
-                  <a:srgbClr val="5F6B66"/>
-                </a:solidFill>
-                <a:latin typeface="Calibri" pitchFamily="34" charset="0"/>
-                <a:ea typeface="Calibri" pitchFamily="34" charset="-122"/>
-                <a:cs typeface="Calibri" pitchFamily="34" charset="-120"/>
-              </a:rPr>
-              <a:t>Indicador Criança Alfabetizada (INEP) + Censo 2022 e PIB municipal (IBGE). Pipeline reproduzível, sem nenhum dado pago.</a:t>
-            </a:r>
-            <a:endParaRPr lang="en-US" sz="1400" dirty="0"/>
-          </a:p>
-        </p:txBody>
-      </p:sp>
-      <p:sp>
-        <p:nvSpPr>
-          <p:cNvPr id="24" name="Text 22"/>
-          <p:cNvSpPr txBox="1"/>
-          <p:nvPr/>
-        </p:nvSpPr>
-        <p:spPr>
-          <a:xfrm>
-            <a:off x="10545775" y="6400800"/>
-            <a:ext cx="1097280" cy="274320"/>
-          </a:xfrm>
-          <a:prstGeom prst="rect">
-            <a:avLst/>
-          </a:prstGeom>
-          <a:noFill/>
-          <a:ln/>
-        </p:spPr>
-        <p:txBody>
-          <a:bodyPr wrap="square" lIns="0" tIns="0" rIns="0" bIns="0" rtlCol="0" anchor="ctr"/>
-          <a:lstStyle/>
-          <a:p>
-            <a:pPr algn="r" indent="0" marL="0">
-              <a:buNone/>
-            </a:pPr>
-            <a:r>
-              <a:rPr lang="en-US" sz="1000" dirty="0">
-                <a:solidFill>
-                  <a:srgbClr val="5F6B66"/>
-                </a:solidFill>
-                <a:latin typeface="Calibri" pitchFamily="34" charset="0"/>
-                <a:ea typeface="Calibri" pitchFamily="34" charset="-122"/>
-                <a:cs typeface="Calibri" pitchFamily="34" charset="-120"/>
-              </a:rPr>
-              <a:t>3 / 8</a:t>
+              <a:t>3 / 10</a:t>
             </a:r>
             <a:endParaRPr lang="en-US" sz="1000" dirty="0"/>
           </a:p>
@@ -4241,7 +5388,7 @@
                 <a:ea typeface="Cambria" pitchFamily="34" charset="-122"/>
                 <a:cs typeface="Cambria" pitchFamily="34" charset="-120"/>
               </a:rPr>
-              <a:t>O estado onde a criança nasce pesa mais que tudo</a:t>
+              <a:t>Quatro técnicas, quatro respostas</a:t>
             </a:r>
             <a:endParaRPr lang="en-US" sz="3200" dirty="0"/>
           </a:p>
@@ -4249,14 +5396,66 @@
       </p:sp>
       <p:sp>
         <p:nvSpPr>
-          <p:cNvPr id="3" name="Text 1"/>
-          <p:cNvSpPr txBox="1"/>
+          <p:cNvPr id="3" name="Shape 1"/>
+          <p:cNvSpPr/>
           <p:nvPr/>
         </p:nvSpPr>
         <p:spPr>
           <a:xfrm>
             <a:off x="548640" y="1600200"/>
-            <a:ext cx="3840480" cy="1097280"/>
+            <a:ext cx="5410048" cy="2148840"/>
+          </a:xfrm>
+          <a:prstGeom prst="roundRect">
+            <a:avLst>
+              <a:gd name="adj" fmla="val 4255"/>
+            </a:avLst>
+          </a:prstGeom>
+          <a:solidFill>
+            <a:srgbClr val="E9F0ED"/>
+          </a:solidFill>
+          <a:ln w="12700">
+            <a:solidFill>
+              <a:srgbClr val="E9F0ED"/>
+            </a:solidFill>
+            <a:prstDash val="solid"/>
+          </a:ln>
+        </p:spPr>
+      </p:sp>
+      <p:sp>
+        <p:nvSpPr>
+          <p:cNvPr id="4" name="Shape 2"/>
+          <p:cNvSpPr/>
+          <p:nvPr/>
+        </p:nvSpPr>
+        <p:spPr>
+          <a:xfrm>
+            <a:off x="822960" y="1874520"/>
+            <a:ext cx="566928" cy="566928"/>
+          </a:xfrm>
+          <a:prstGeom prst="ellipse">
+            <a:avLst/>
+          </a:prstGeom>
+          <a:solidFill>
+            <a:srgbClr val="F2B705"/>
+          </a:solidFill>
+          <a:ln w="12700">
+            <a:solidFill>
+              <a:srgbClr val="F2B705"/>
+            </a:solidFill>
+            <a:prstDash val="solid"/>
+          </a:ln>
+        </p:spPr>
+      </p:sp>
+      <p:sp>
+        <p:nvSpPr>
+          <p:cNvPr id="5" name="Text 3"/>
+          <p:cNvSpPr txBox="1"/>
+          <p:nvPr/>
+        </p:nvSpPr>
+        <p:spPr>
+          <a:xfrm>
+            <a:off x="822960" y="1874520"/>
+            <a:ext cx="566928" cy="566928"/>
           </a:xfrm>
           <a:prstGeom prst="rect">
             <a:avLst/>
@@ -4268,11 +5467,50 @@
           <a:bodyPr wrap="square" lIns="0" tIns="0" rIns="0" bIns="0" rtlCol="0" anchor="ctr"/>
           <a:lstStyle/>
           <a:p>
+            <a:pPr algn="ctr" indent="0" marL="0">
+              <a:buNone/>
+            </a:pPr>
+            <a:r>
+              <a:rPr lang="en-US" sz="1700" b="1" dirty="0">
+                <a:solidFill>
+                  <a:srgbClr val="1F3A32"/>
+                </a:solidFill>
+                <a:latin typeface="Calibri" pitchFamily="34" charset="0"/>
+                <a:ea typeface="Calibri" pitchFamily="34" charset="-122"/>
+                <a:cs typeface="Calibri" pitchFamily="34" charset="-120"/>
+              </a:rPr>
+              <a:t>01</a:t>
+            </a:r>
+            <a:endParaRPr lang="en-US" sz="1700" dirty="0"/>
+          </a:p>
+        </p:txBody>
+      </p:sp>
+      <p:sp>
+        <p:nvSpPr>
+          <p:cNvPr id="6" name="Text 4"/>
+          <p:cNvSpPr txBox="1"/>
+          <p:nvPr/>
+        </p:nvSpPr>
+        <p:spPr>
+          <a:xfrm>
+            <a:off x="1554480" y="1874520"/>
+            <a:ext cx="4129888" cy="566928"/>
+          </a:xfrm>
+          <a:prstGeom prst="rect">
+            <a:avLst/>
+          </a:prstGeom>
+          <a:noFill/>
+          <a:ln/>
+        </p:spPr>
+        <p:txBody>
+          <a:bodyPr wrap="square" lIns="0" tIns="0" rIns="0" bIns="0" rtlCol="0" anchor="ctr"/>
+          <a:lstStyle/>
+          <a:p>
             <a:pPr indent="0" marL="0">
               <a:buNone/>
             </a:pPr>
             <a:r>
-              <a:rPr lang="en-US" sz="6600" b="1" dirty="0">
+              <a:rPr lang="en-US" sz="2000" b="1" dirty="0">
                 <a:solidFill>
                   <a:srgbClr val="1F3A32"/>
                 </a:solidFill>
@@ -4280,22 +5518,22 @@
                 <a:ea typeface="Cambria" pitchFamily="34" charset="-122"/>
                 <a:cs typeface="Cambria" pitchFamily="34" charset="-120"/>
               </a:rPr>
-              <a:t>0,90</a:t>
-            </a:r>
-            <a:endParaRPr lang="en-US" sz="6600" dirty="0"/>
-          </a:p>
-        </p:txBody>
-      </p:sp>
-      <p:sp>
-        <p:nvSpPr>
-          <p:cNvPr id="4" name="Text 2"/>
-          <p:cNvSpPr txBox="1"/>
-          <p:nvPr/>
-        </p:nvSpPr>
-        <p:spPr>
-          <a:xfrm>
-            <a:off x="548640" y="2697480"/>
-            <a:ext cx="3840480" cy="1005840"/>
+              <a:t>Supervisionado</a:t>
+            </a:r>
+            <a:endParaRPr lang="en-US" sz="2000" dirty="0"/>
+          </a:p>
+        </p:txBody>
+      </p:sp>
+      <p:sp>
+        <p:nvSpPr>
+          <p:cNvPr id="7" name="Text 5"/>
+          <p:cNvSpPr txBox="1"/>
+          <p:nvPr/>
+        </p:nvSpPr>
+        <p:spPr>
+          <a:xfrm>
+            <a:off x="822960" y="2624328"/>
+            <a:ext cx="3017520" cy="457200"/>
           </a:xfrm>
           <a:prstGeom prst="rect">
             <a:avLst/>
@@ -4311,7 +5549,7 @@
               <a:buNone/>
             </a:pPr>
             <a:r>
-              <a:rPr lang="en-US" sz="1500" dirty="0">
+              <a:rPr lang="en-US" sz="1500" i="1" dirty="0">
                 <a:solidFill>
                   <a:srgbClr val="1E2B27"/>
                 </a:solidFill>
@@ -4319,7 +5557,7 @@
                 <a:ea typeface="Calibri" pitchFamily="34" charset="-122"/>
                 <a:cs typeface="Calibri" pitchFamily="34" charset="-120"/>
               </a:rPr>
-              <a:t>de capacidade de separar municípios que alfabetizam dos que não alfabetizam (ROC AUC, em dados nunca vistos)</a:t>
+              <a:t>Quem vai ficar abaixo do patamar?</a:t>
             </a:r>
             <a:endParaRPr lang="en-US" sz="1500" dirty="0"/>
           </a:p>
@@ -4327,14 +5565,53 @@
       </p:sp>
       <p:sp>
         <p:nvSpPr>
-          <p:cNvPr id="5" name="Text 3"/>
-          <p:cNvSpPr txBox="1"/>
-          <p:nvPr/>
-        </p:nvSpPr>
-        <p:spPr>
-          <a:xfrm>
-            <a:off x="548640" y="3886200"/>
-            <a:ext cx="3840480" cy="914400"/>
+          <p:cNvPr id="8" name="Text 6"/>
+          <p:cNvSpPr txBox="1"/>
+          <p:nvPr/>
+        </p:nvSpPr>
+        <p:spPr>
+          <a:xfrm>
+            <a:off x="822960" y="3108960"/>
+            <a:ext cx="3017520" cy="411480"/>
+          </a:xfrm>
+          <a:prstGeom prst="rect">
+            <a:avLst/>
+          </a:prstGeom>
+          <a:noFill/>
+          <a:ln/>
+        </p:spPr>
+        <p:txBody>
+          <a:bodyPr wrap="square" lIns="0" tIns="0" rIns="0" bIns="0" rtlCol="0" anchor="t"/>
+          <a:lstStyle/>
+          <a:p>
+            <a:pPr indent="0" marL="0">
+              <a:buNone/>
+            </a:pPr>
+            <a:r>
+              <a:rPr lang="en-US" sz="1300" dirty="0">
+                <a:solidFill>
+                  <a:srgbClr val="5F6B66"/>
+                </a:solidFill>
+                <a:latin typeface="Calibri" pitchFamily="34" charset="0"/>
+                <a:ea typeface="Calibri" pitchFamily="34" charset="-122"/>
+                <a:cs typeface="Calibri" pitchFamily="34" charset="-120"/>
+              </a:rPr>
+              <a:t>Regressão Logística calibrada</a:t>
+            </a:r>
+            <a:endParaRPr lang="en-US" sz="1300" dirty="0"/>
+          </a:p>
+        </p:txBody>
+      </p:sp>
+      <p:sp>
+        <p:nvSpPr>
+          <p:cNvPr id="9" name="Text 7"/>
+          <p:cNvSpPr txBox="1"/>
+          <p:nvPr/>
+        </p:nvSpPr>
+        <p:spPr>
+          <a:xfrm>
+            <a:off x="3672688" y="2514600"/>
+            <a:ext cx="2011680" cy="777240"/>
           </a:xfrm>
           <a:prstGeom prst="rect">
             <a:avLst/>
@@ -4346,73 +5623,125 @@
           <a:bodyPr wrap="square" lIns="0" tIns="0" rIns="0" bIns="0" rtlCol="0" anchor="ctr"/>
           <a:lstStyle/>
           <a:p>
-            <a:pPr indent="0" marL="0">
-              <a:buNone/>
-            </a:pPr>
-            <a:r>
-              <a:rPr lang="en-US" sz="5400" b="1" dirty="0">
-                <a:solidFill>
-                  <a:srgbClr val="1F3A32"/>
+            <a:pPr algn="r" indent="0" marL="0">
+              <a:buNone/>
+            </a:pPr>
+            <a:r>
+              <a:rPr lang="en-US" sz="4000" b="1" dirty="0">
+                <a:solidFill>
+                  <a:srgbClr val="3E7A62"/>
                 </a:solidFill>
                 <a:latin typeface="Cambria" pitchFamily="34" charset="0"/>
                 <a:ea typeface="Cambria" pitchFamily="34" charset="-122"/>
                 <a:cs typeface="Cambria" pitchFamily="34" charset="-120"/>
               </a:rPr>
-              <a:t>5</a:t>
-            </a:r>
-            <a:endParaRPr lang="en-US" sz="5400" dirty="0"/>
-          </a:p>
-        </p:txBody>
-      </p:sp>
-      <p:sp>
-        <p:nvSpPr>
-          <p:cNvPr id="6" name="Text 4"/>
-          <p:cNvSpPr txBox="1"/>
-          <p:nvPr/>
-        </p:nvSpPr>
-        <p:spPr>
-          <a:xfrm>
-            <a:off x="548640" y="4800600"/>
-            <a:ext cx="3840480" cy="1005840"/>
-          </a:xfrm>
-          <a:prstGeom prst="rect">
-            <a:avLst/>
-          </a:prstGeom>
-          <a:noFill/>
-          <a:ln/>
-        </p:spPr>
-        <p:txBody>
-          <a:bodyPr wrap="square" lIns="0" tIns="0" rIns="0" bIns="0" rtlCol="0" anchor="t"/>
-          <a:lstStyle/>
-          <a:p>
-            <a:pPr indent="0" marL="0">
-              <a:buNone/>
-            </a:pPr>
-            <a:r>
-              <a:rPr lang="en-US" sz="1500" dirty="0">
-                <a:solidFill>
-                  <a:srgbClr val="1E2B27"/>
+              <a:t>0,90</a:t>
+            </a:r>
+            <a:endParaRPr lang="en-US" sz="4000" dirty="0"/>
+          </a:p>
+        </p:txBody>
+      </p:sp>
+      <p:sp>
+        <p:nvSpPr>
+          <p:cNvPr id="10" name="Text 8"/>
+          <p:cNvSpPr txBox="1"/>
+          <p:nvPr/>
+        </p:nvSpPr>
+        <p:spPr>
+          <a:xfrm>
+            <a:off x="3489808" y="3264408"/>
+            <a:ext cx="2194560" cy="320040"/>
+          </a:xfrm>
+          <a:prstGeom prst="rect">
+            <a:avLst/>
+          </a:prstGeom>
+          <a:noFill/>
+          <a:ln/>
+        </p:spPr>
+        <p:txBody>
+          <a:bodyPr wrap="square" lIns="0" tIns="0" rIns="0" bIns="0" rtlCol="0" anchor="ctr"/>
+          <a:lstStyle/>
+          <a:p>
+            <a:pPr algn="r" indent="0" marL="0">
+              <a:buNone/>
+            </a:pPr>
+            <a:r>
+              <a:rPr lang="en-US" sz="1200" dirty="0">
+                <a:solidFill>
+                  <a:srgbClr val="5F6B66"/>
                 </a:solidFill>
                 <a:latin typeface="Calibri" pitchFamily="34" charset="0"/>
                 <a:ea typeface="Calibri" pitchFamily="34" charset="-122"/>
                 <a:cs typeface="Calibri" pitchFamily="34" charset="-120"/>
               </a:rPr>
-              <a:t>algoritmos testados. Escolhemos o mais simples: mesma precisão e explicável para o gestor.</a:t>
-            </a:r>
-            <a:endParaRPr lang="en-US" sz="1500" dirty="0"/>
-          </a:p>
-        </p:txBody>
-      </p:sp>
-      <p:sp>
-        <p:nvSpPr>
-          <p:cNvPr id="7" name="Text 5"/>
-          <p:cNvSpPr txBox="1"/>
-          <p:nvPr/>
-        </p:nvSpPr>
-        <p:spPr>
-          <a:xfrm>
-            <a:off x="4937760" y="1600200"/>
-            <a:ext cx="6675120" cy="365760"/>
+              <a:t>ROC AUC em dados novos</a:t>
+            </a:r>
+            <a:endParaRPr lang="en-US" sz="1200" dirty="0"/>
+          </a:p>
+        </p:txBody>
+      </p:sp>
+      <p:sp>
+        <p:nvSpPr>
+          <p:cNvPr id="11" name="Shape 9"/>
+          <p:cNvSpPr/>
+          <p:nvPr/>
+        </p:nvSpPr>
+        <p:spPr>
+          <a:xfrm>
+            <a:off x="6233008" y="1600200"/>
+            <a:ext cx="5410048" cy="2148840"/>
+          </a:xfrm>
+          <a:prstGeom prst="roundRect">
+            <a:avLst>
+              <a:gd name="adj" fmla="val 4255"/>
+            </a:avLst>
+          </a:prstGeom>
+          <a:solidFill>
+            <a:srgbClr val="E9F0ED"/>
+          </a:solidFill>
+          <a:ln w="12700">
+            <a:solidFill>
+              <a:srgbClr val="E9F0ED"/>
+            </a:solidFill>
+            <a:prstDash val="solid"/>
+          </a:ln>
+        </p:spPr>
+      </p:sp>
+      <p:sp>
+        <p:nvSpPr>
+          <p:cNvPr id="12" name="Shape 10"/>
+          <p:cNvSpPr/>
+          <p:nvPr/>
+        </p:nvSpPr>
+        <p:spPr>
+          <a:xfrm>
+            <a:off x="6507328" y="1874520"/>
+            <a:ext cx="566928" cy="566928"/>
+          </a:xfrm>
+          <a:prstGeom prst="ellipse">
+            <a:avLst/>
+          </a:prstGeom>
+          <a:solidFill>
+            <a:srgbClr val="F2B705"/>
+          </a:solidFill>
+          <a:ln w="12700">
+            <a:solidFill>
+              <a:srgbClr val="F2B705"/>
+            </a:solidFill>
+            <a:prstDash val="solid"/>
+          </a:ln>
+        </p:spPr>
+      </p:sp>
+      <p:sp>
+        <p:nvSpPr>
+          <p:cNvPr id="13" name="Text 11"/>
+          <p:cNvSpPr txBox="1"/>
+          <p:nvPr/>
+        </p:nvSpPr>
+        <p:spPr>
+          <a:xfrm>
+            <a:off x="6507328" y="1874520"/>
+            <a:ext cx="566928" cy="566928"/>
           </a:xfrm>
           <a:prstGeom prst="rect">
             <a:avLst/>
@@ -4424,50 +5753,34 @@
           <a:bodyPr wrap="square" lIns="0" tIns="0" rIns="0" bIns="0" rtlCol="0" anchor="ctr"/>
           <a:lstStyle/>
           <a:p>
-            <a:pPr indent="0" marL="0">
-              <a:buNone/>
-            </a:pPr>
-            <a:r>
-              <a:rPr lang="en-US" sz="1400" b="1" dirty="0">
-                <a:solidFill>
-                  <a:srgbClr val="5F6B66"/>
+            <a:pPr algn="ctr" indent="0" marL="0">
+              <a:buNone/>
+            </a:pPr>
+            <a:r>
+              <a:rPr lang="en-US" sz="1700" b="1" dirty="0">
+                <a:solidFill>
+                  <a:srgbClr val="1F3A32"/>
                 </a:solidFill>
                 <a:latin typeface="Calibri" pitchFamily="34" charset="0"/>
                 <a:ea typeface="Calibri" pitchFamily="34" charset="-122"/>
                 <a:cs typeface="Calibri" pitchFamily="34" charset="-120"/>
               </a:rPr>
-              <a:t>Influência de cada fator na previsão (estado = 100)</a:t>
-            </a:r>
-            <a:endParaRPr lang="en-US" sz="1400" dirty="0"/>
-          </a:p>
-        </p:txBody>
-      </p:sp>
-      <p:graphicFrame>
-        <p:nvGraphicFramePr>
-          <p:cNvPr id="8" name="Chart 0" descr=""/>
-          <p:cNvGraphicFramePr/>
-          <p:nvPr/>
-        </p:nvGraphicFramePr>
-        <p:xfrm>
-          <a:off x="4937760" y="1965960"/>
-          <a:ext cx="6675120" cy="4023360"/>
-        </p:xfrm>
-        <a:graphic xmlns:a="http://schemas.openxmlformats.org/drawingml/2006/main">
-          <a:graphicData uri="http://schemas.openxmlformats.org/drawingml/2006/chart">
-            <c:chart xmlns:c="http://schemas.openxmlformats.org/drawingml/2006/chart" r:id="rId1"/>
-          </a:graphicData>
-        </a:graphic>
-      </p:graphicFrame>
-      <p:sp>
-        <p:nvSpPr>
-          <p:cNvPr id="9" name="Text 6"/>
-          <p:cNvSpPr txBox="1"/>
-          <p:nvPr/>
-        </p:nvSpPr>
-        <p:spPr>
-          <a:xfrm>
-            <a:off x="10545775" y="6400800"/>
-            <a:ext cx="1097280" cy="274320"/>
+              <a:t>02</a:t>
+            </a:r>
+            <a:endParaRPr lang="en-US" sz="1700" dirty="0"/>
+          </a:p>
+        </p:txBody>
+      </p:sp>
+      <p:sp>
+        <p:nvSpPr>
+          <p:cNvPr id="14" name="Text 12"/>
+          <p:cNvSpPr txBox="1"/>
+          <p:nvPr/>
+        </p:nvSpPr>
+        <p:spPr>
+          <a:xfrm>
+            <a:off x="7238848" y="1874520"/>
+            <a:ext cx="4129888" cy="566928"/>
           </a:xfrm>
           <a:prstGeom prst="rect">
             <a:avLst/>
@@ -4479,19 +5792,786 @@
           <a:bodyPr wrap="square" lIns="0" tIns="0" rIns="0" bIns="0" rtlCol="0" anchor="ctr"/>
           <a:lstStyle/>
           <a:p>
-            <a:pPr algn="r" indent="0" marL="0">
-              <a:buNone/>
-            </a:pPr>
-            <a:r>
-              <a:rPr lang="en-US" sz="1000" dirty="0">
-                <a:solidFill>
-                  <a:srgbClr val="5F6B66"/>
+            <a:pPr indent="0" marL="0">
+              <a:buNone/>
+            </a:pPr>
+            <a:r>
+              <a:rPr lang="en-US" sz="2000" b="1" dirty="0">
+                <a:solidFill>
+                  <a:srgbClr val="1F3A32"/>
+                </a:solidFill>
+                <a:latin typeface="Cambria" pitchFamily="34" charset="0"/>
+                <a:ea typeface="Cambria" pitchFamily="34" charset="-122"/>
+                <a:cs typeface="Cambria" pitchFamily="34" charset="-120"/>
+              </a:rPr>
+              <a:t>Não supervisionado</a:t>
+            </a:r>
+            <a:endParaRPr lang="en-US" sz="2000" dirty="0"/>
+          </a:p>
+        </p:txBody>
+      </p:sp>
+      <p:sp>
+        <p:nvSpPr>
+          <p:cNvPr id="15" name="Text 13"/>
+          <p:cNvSpPr txBox="1"/>
+          <p:nvPr/>
+        </p:nvSpPr>
+        <p:spPr>
+          <a:xfrm>
+            <a:off x="6507328" y="2624328"/>
+            <a:ext cx="3017520" cy="457200"/>
+          </a:xfrm>
+          <a:prstGeom prst="rect">
+            <a:avLst/>
+          </a:prstGeom>
+          <a:noFill/>
+          <a:ln/>
+        </p:spPr>
+        <p:txBody>
+          <a:bodyPr wrap="square" lIns="0" tIns="0" rIns="0" bIns="0" rtlCol="0" anchor="t"/>
+          <a:lstStyle/>
+          <a:p>
+            <a:pPr indent="0" marL="0">
+              <a:buNone/>
+            </a:pPr>
+            <a:r>
+              <a:rPr lang="en-US" sz="1500" i="1" dirty="0">
+                <a:solidFill>
+                  <a:srgbClr val="1E2B27"/>
                 </a:solidFill>
                 <a:latin typeface="Calibri" pitchFamily="34" charset="0"/>
                 <a:ea typeface="Calibri" pitchFamily="34" charset="-122"/>
                 <a:cs typeface="Calibri" pitchFamily="34" charset="-120"/>
               </a:rPr>
-              <a:t>4 / 8</a:t>
+              <a:t>Quais municípios são parecidos?</a:t>
+            </a:r>
+            <a:endParaRPr lang="en-US" sz="1500" dirty="0"/>
+          </a:p>
+        </p:txBody>
+      </p:sp>
+      <p:sp>
+        <p:nvSpPr>
+          <p:cNvPr id="16" name="Text 14"/>
+          <p:cNvSpPr txBox="1"/>
+          <p:nvPr/>
+        </p:nvSpPr>
+        <p:spPr>
+          <a:xfrm>
+            <a:off x="6507328" y="3108960"/>
+            <a:ext cx="3017520" cy="411480"/>
+          </a:xfrm>
+          <a:prstGeom prst="rect">
+            <a:avLst/>
+          </a:prstGeom>
+          <a:noFill/>
+          <a:ln/>
+        </p:spPr>
+        <p:txBody>
+          <a:bodyPr wrap="square" lIns="0" tIns="0" rIns="0" bIns="0" rtlCol="0" anchor="t"/>
+          <a:lstStyle/>
+          <a:p>
+            <a:pPr indent="0" marL="0">
+              <a:buNone/>
+            </a:pPr>
+            <a:r>
+              <a:rPr lang="en-US" sz="1300" dirty="0">
+                <a:solidFill>
+                  <a:srgbClr val="5F6B66"/>
+                </a:solidFill>
+                <a:latin typeface="Calibri" pitchFamily="34" charset="0"/>
+                <a:ea typeface="Calibri" pitchFamily="34" charset="-122"/>
+                <a:cs typeface="Calibri" pitchFamily="34" charset="-120"/>
+              </a:rPr>
+              <a:t>KMeans com PCA</a:t>
+            </a:r>
+            <a:endParaRPr lang="en-US" sz="1300" dirty="0"/>
+          </a:p>
+        </p:txBody>
+      </p:sp>
+      <p:sp>
+        <p:nvSpPr>
+          <p:cNvPr id="17" name="Text 15"/>
+          <p:cNvSpPr txBox="1"/>
+          <p:nvPr/>
+        </p:nvSpPr>
+        <p:spPr>
+          <a:xfrm>
+            <a:off x="9357055" y="2514600"/>
+            <a:ext cx="2011680" cy="777240"/>
+          </a:xfrm>
+          <a:prstGeom prst="rect">
+            <a:avLst/>
+          </a:prstGeom>
+          <a:noFill/>
+          <a:ln/>
+        </p:spPr>
+        <p:txBody>
+          <a:bodyPr wrap="square" lIns="0" tIns="0" rIns="0" bIns="0" rtlCol="0" anchor="ctr"/>
+          <a:lstStyle/>
+          <a:p>
+            <a:pPr algn="r" indent="0" marL="0">
+              <a:buNone/>
+            </a:pPr>
+            <a:r>
+              <a:rPr lang="en-US" sz="4000" b="1" dirty="0">
+                <a:solidFill>
+                  <a:srgbClr val="3E7A62"/>
+                </a:solidFill>
+                <a:latin typeface="Cambria" pitchFamily="34" charset="0"/>
+                <a:ea typeface="Cambria" pitchFamily="34" charset="-122"/>
+                <a:cs typeface="Cambria" pitchFamily="34" charset="-120"/>
+              </a:rPr>
+              <a:t>4</a:t>
+            </a:r>
+            <a:endParaRPr lang="en-US" sz="4000" dirty="0"/>
+          </a:p>
+        </p:txBody>
+      </p:sp>
+      <p:sp>
+        <p:nvSpPr>
+          <p:cNvPr id="18" name="Text 16"/>
+          <p:cNvSpPr txBox="1"/>
+          <p:nvPr/>
+        </p:nvSpPr>
+        <p:spPr>
+          <a:xfrm>
+            <a:off x="9174175" y="3264408"/>
+            <a:ext cx="2194560" cy="320040"/>
+          </a:xfrm>
+          <a:prstGeom prst="rect">
+            <a:avLst/>
+          </a:prstGeom>
+          <a:noFill/>
+          <a:ln/>
+        </p:spPr>
+        <p:txBody>
+          <a:bodyPr wrap="square" lIns="0" tIns="0" rIns="0" bIns="0" rtlCol="0" anchor="ctr"/>
+          <a:lstStyle/>
+          <a:p>
+            <a:pPr algn="r" indent="0" marL="0">
+              <a:buNone/>
+            </a:pPr>
+            <a:r>
+              <a:rPr lang="en-US" sz="1200" dirty="0">
+                <a:solidFill>
+                  <a:srgbClr val="5F6B66"/>
+                </a:solidFill>
+                <a:latin typeface="Calibri" pitchFamily="34" charset="0"/>
+                <a:ea typeface="Calibri" pitchFamily="34" charset="-122"/>
+                <a:cs typeface="Calibri" pitchFamily="34" charset="-120"/>
+              </a:rPr>
+              <a:t>perfis de município</a:t>
+            </a:r>
+            <a:endParaRPr lang="en-US" sz="1200" dirty="0"/>
+          </a:p>
+        </p:txBody>
+      </p:sp>
+      <p:sp>
+        <p:nvSpPr>
+          <p:cNvPr id="19" name="Shape 17"/>
+          <p:cNvSpPr/>
+          <p:nvPr/>
+        </p:nvSpPr>
+        <p:spPr>
+          <a:xfrm>
+            <a:off x="548640" y="4023360"/>
+            <a:ext cx="5410048" cy="2148840"/>
+          </a:xfrm>
+          <a:prstGeom prst="roundRect">
+            <a:avLst>
+              <a:gd name="adj" fmla="val 4255"/>
+            </a:avLst>
+          </a:prstGeom>
+          <a:solidFill>
+            <a:srgbClr val="E9F0ED"/>
+          </a:solidFill>
+          <a:ln w="12700">
+            <a:solidFill>
+              <a:srgbClr val="E9F0ED"/>
+            </a:solidFill>
+            <a:prstDash val="solid"/>
+          </a:ln>
+        </p:spPr>
+      </p:sp>
+      <p:sp>
+        <p:nvSpPr>
+          <p:cNvPr id="20" name="Shape 18"/>
+          <p:cNvSpPr/>
+          <p:nvPr/>
+        </p:nvSpPr>
+        <p:spPr>
+          <a:xfrm>
+            <a:off x="822960" y="4297680"/>
+            <a:ext cx="566928" cy="566928"/>
+          </a:xfrm>
+          <a:prstGeom prst="ellipse">
+            <a:avLst/>
+          </a:prstGeom>
+          <a:solidFill>
+            <a:srgbClr val="F2B705"/>
+          </a:solidFill>
+          <a:ln w="12700">
+            <a:solidFill>
+              <a:srgbClr val="F2B705"/>
+            </a:solidFill>
+            <a:prstDash val="solid"/>
+          </a:ln>
+        </p:spPr>
+      </p:sp>
+      <p:sp>
+        <p:nvSpPr>
+          <p:cNvPr id="21" name="Text 19"/>
+          <p:cNvSpPr txBox="1"/>
+          <p:nvPr/>
+        </p:nvSpPr>
+        <p:spPr>
+          <a:xfrm>
+            <a:off x="822960" y="4297680"/>
+            <a:ext cx="566928" cy="566928"/>
+          </a:xfrm>
+          <a:prstGeom prst="rect">
+            <a:avLst/>
+          </a:prstGeom>
+          <a:noFill/>
+          <a:ln/>
+        </p:spPr>
+        <p:txBody>
+          <a:bodyPr wrap="square" lIns="0" tIns="0" rIns="0" bIns="0" rtlCol="0" anchor="ctr"/>
+          <a:lstStyle/>
+          <a:p>
+            <a:pPr algn="ctr" indent="0" marL="0">
+              <a:buNone/>
+            </a:pPr>
+            <a:r>
+              <a:rPr lang="en-US" sz="1700" b="1" dirty="0">
+                <a:solidFill>
+                  <a:srgbClr val="1F3A32"/>
+                </a:solidFill>
+                <a:latin typeface="Calibri" pitchFamily="34" charset="0"/>
+                <a:ea typeface="Calibri" pitchFamily="34" charset="-122"/>
+                <a:cs typeface="Calibri" pitchFamily="34" charset="-120"/>
+              </a:rPr>
+              <a:t>03</a:t>
+            </a:r>
+            <a:endParaRPr lang="en-US" sz="1700" dirty="0"/>
+          </a:p>
+        </p:txBody>
+      </p:sp>
+      <p:sp>
+        <p:nvSpPr>
+          <p:cNvPr id="22" name="Text 20"/>
+          <p:cNvSpPr txBox="1"/>
+          <p:nvPr/>
+        </p:nvSpPr>
+        <p:spPr>
+          <a:xfrm>
+            <a:off x="1554480" y="4297680"/>
+            <a:ext cx="4129888" cy="566928"/>
+          </a:xfrm>
+          <a:prstGeom prst="rect">
+            <a:avLst/>
+          </a:prstGeom>
+          <a:noFill/>
+          <a:ln/>
+        </p:spPr>
+        <p:txBody>
+          <a:bodyPr wrap="square" lIns="0" tIns="0" rIns="0" bIns="0" rtlCol="0" anchor="ctr"/>
+          <a:lstStyle/>
+          <a:p>
+            <a:pPr indent="0" marL="0">
+              <a:buNone/>
+            </a:pPr>
+            <a:r>
+              <a:rPr lang="en-US" sz="2000" b="1" dirty="0">
+                <a:solidFill>
+                  <a:srgbClr val="1F3A32"/>
+                </a:solidFill>
+                <a:latin typeface="Cambria" pitchFamily="34" charset="0"/>
+                <a:ea typeface="Cambria" pitchFamily="34" charset="-122"/>
+                <a:cs typeface="Cambria" pitchFamily="34" charset="-120"/>
+              </a:rPr>
+              <a:t>Séries temporais</a:t>
+            </a:r>
+            <a:endParaRPr lang="en-US" sz="2000" dirty="0"/>
+          </a:p>
+        </p:txBody>
+      </p:sp>
+      <p:sp>
+        <p:nvSpPr>
+          <p:cNvPr id="23" name="Text 21"/>
+          <p:cNvSpPr txBox="1"/>
+          <p:nvPr/>
+        </p:nvSpPr>
+        <p:spPr>
+          <a:xfrm>
+            <a:off x="822960" y="5047488"/>
+            <a:ext cx="3017520" cy="457200"/>
+          </a:xfrm>
+          <a:prstGeom prst="rect">
+            <a:avLst/>
+          </a:prstGeom>
+          <a:noFill/>
+          <a:ln/>
+        </p:spPr>
+        <p:txBody>
+          <a:bodyPr wrap="square" lIns="0" tIns="0" rIns="0" bIns="0" rtlCol="0" anchor="t"/>
+          <a:lstStyle/>
+          <a:p>
+            <a:pPr indent="0" marL="0">
+              <a:buNone/>
+            </a:pPr>
+            <a:r>
+              <a:rPr lang="en-US" sz="1500" i="1" dirty="0">
+                <a:solidFill>
+                  <a:srgbClr val="1E2B27"/>
+                </a:solidFill>
+                <a:latin typeface="Calibri" pitchFamily="34" charset="0"/>
+                <a:ea typeface="Calibri" pitchFamily="34" charset="-122"/>
+                <a:cs typeface="Calibri" pitchFamily="34" charset="-120"/>
+              </a:rPr>
+              <a:t>Quem chega à meta de 2030?</a:t>
+            </a:r>
+            <a:endParaRPr lang="en-US" sz="1500" dirty="0"/>
+          </a:p>
+        </p:txBody>
+      </p:sp>
+      <p:sp>
+        <p:nvSpPr>
+          <p:cNvPr id="24" name="Text 22"/>
+          <p:cNvSpPr txBox="1"/>
+          <p:nvPr/>
+        </p:nvSpPr>
+        <p:spPr>
+          <a:xfrm>
+            <a:off x="822960" y="5532120"/>
+            <a:ext cx="3017520" cy="411480"/>
+          </a:xfrm>
+          <a:prstGeom prst="rect">
+            <a:avLst/>
+          </a:prstGeom>
+          <a:noFill/>
+          <a:ln/>
+        </p:spPr>
+        <p:txBody>
+          <a:bodyPr wrap="square" lIns="0" tIns="0" rIns="0" bIns="0" rtlCol="0" anchor="t"/>
+          <a:lstStyle/>
+          <a:p>
+            <a:pPr indent="0" marL="0">
+              <a:buNone/>
+            </a:pPr>
+            <a:r>
+              <a:rPr lang="en-US" sz="1300" dirty="0">
+                <a:solidFill>
+                  <a:srgbClr val="5F6B66"/>
+                </a:solidFill>
+                <a:latin typeface="Calibri" pitchFamily="34" charset="0"/>
+                <a:ea typeface="Calibri" pitchFamily="34" charset="-122"/>
+                <a:cs typeface="Calibri" pitchFamily="34" charset="-120"/>
+              </a:rPr>
+              <a:t>Tendência com amortecimento</a:t>
+            </a:r>
+            <a:endParaRPr lang="en-US" sz="1300" dirty="0"/>
+          </a:p>
+        </p:txBody>
+      </p:sp>
+      <p:sp>
+        <p:nvSpPr>
+          <p:cNvPr id="25" name="Text 23"/>
+          <p:cNvSpPr txBox="1"/>
+          <p:nvPr/>
+        </p:nvSpPr>
+        <p:spPr>
+          <a:xfrm>
+            <a:off x="3672688" y="4937760"/>
+            <a:ext cx="2011680" cy="777240"/>
+          </a:xfrm>
+          <a:prstGeom prst="rect">
+            <a:avLst/>
+          </a:prstGeom>
+          <a:noFill/>
+          <a:ln/>
+        </p:spPr>
+        <p:txBody>
+          <a:bodyPr wrap="square" lIns="0" tIns="0" rIns="0" bIns="0" rtlCol="0" anchor="ctr"/>
+          <a:lstStyle/>
+          <a:p>
+            <a:pPr algn="r" indent="0" marL="0">
+              <a:buNone/>
+            </a:pPr>
+            <a:r>
+              <a:rPr lang="en-US" sz="4000" b="1" dirty="0">
+                <a:solidFill>
+                  <a:srgbClr val="3E7A62"/>
+                </a:solidFill>
+                <a:latin typeface="Cambria" pitchFamily="34" charset="0"/>
+                <a:ea typeface="Cambria" pitchFamily="34" charset="-122"/>
+                <a:cs typeface="Cambria" pitchFamily="34" charset="-120"/>
+              </a:rPr>
+              <a:t>45%</a:t>
+            </a:r>
+            <a:endParaRPr lang="en-US" sz="4000" dirty="0"/>
+          </a:p>
+        </p:txBody>
+      </p:sp>
+      <p:sp>
+        <p:nvSpPr>
+          <p:cNvPr id="26" name="Text 24"/>
+          <p:cNvSpPr txBox="1"/>
+          <p:nvPr/>
+        </p:nvSpPr>
+        <p:spPr>
+          <a:xfrm>
+            <a:off x="3489808" y="5687568"/>
+            <a:ext cx="2194560" cy="320040"/>
+          </a:xfrm>
+          <a:prstGeom prst="rect">
+            <a:avLst/>
+          </a:prstGeom>
+          <a:noFill/>
+          <a:ln/>
+        </p:spPr>
+        <p:txBody>
+          <a:bodyPr wrap="square" lIns="0" tIns="0" rIns="0" bIns="0" rtlCol="0" anchor="ctr"/>
+          <a:lstStyle/>
+          <a:p>
+            <a:pPr algn="r" indent="0" marL="0">
+              <a:buNone/>
+            </a:pPr>
+            <a:r>
+              <a:rPr lang="en-US" sz="1200" dirty="0">
+                <a:solidFill>
+                  <a:srgbClr val="5F6B66"/>
+                </a:solidFill>
+                <a:latin typeface="Calibri" pitchFamily="34" charset="0"/>
+                <a:ea typeface="Calibri" pitchFamily="34" charset="-122"/>
+                <a:cs typeface="Calibri" pitchFamily="34" charset="-120"/>
+              </a:rPr>
+              <a:t>dos municípios chegam</a:t>
+            </a:r>
+            <a:endParaRPr lang="en-US" sz="1200" dirty="0"/>
+          </a:p>
+        </p:txBody>
+      </p:sp>
+      <p:sp>
+        <p:nvSpPr>
+          <p:cNvPr id="27" name="Shape 25"/>
+          <p:cNvSpPr/>
+          <p:nvPr/>
+        </p:nvSpPr>
+        <p:spPr>
+          <a:xfrm>
+            <a:off x="6233008" y="4023360"/>
+            <a:ext cx="5410048" cy="2148840"/>
+          </a:xfrm>
+          <a:prstGeom prst="roundRect">
+            <a:avLst>
+              <a:gd name="adj" fmla="val 4255"/>
+            </a:avLst>
+          </a:prstGeom>
+          <a:solidFill>
+            <a:srgbClr val="E9F0ED"/>
+          </a:solidFill>
+          <a:ln w="12700">
+            <a:solidFill>
+              <a:srgbClr val="E9F0ED"/>
+            </a:solidFill>
+            <a:prstDash val="solid"/>
+          </a:ln>
+        </p:spPr>
+      </p:sp>
+      <p:sp>
+        <p:nvSpPr>
+          <p:cNvPr id="28" name="Shape 26"/>
+          <p:cNvSpPr/>
+          <p:nvPr/>
+        </p:nvSpPr>
+        <p:spPr>
+          <a:xfrm>
+            <a:off x="6507328" y="4297680"/>
+            <a:ext cx="566928" cy="566928"/>
+          </a:xfrm>
+          <a:prstGeom prst="ellipse">
+            <a:avLst/>
+          </a:prstGeom>
+          <a:solidFill>
+            <a:srgbClr val="F2B705"/>
+          </a:solidFill>
+          <a:ln w="12700">
+            <a:solidFill>
+              <a:srgbClr val="F2B705"/>
+            </a:solidFill>
+            <a:prstDash val="solid"/>
+          </a:ln>
+        </p:spPr>
+      </p:sp>
+      <p:sp>
+        <p:nvSpPr>
+          <p:cNvPr id="29" name="Text 27"/>
+          <p:cNvSpPr txBox="1"/>
+          <p:nvPr/>
+        </p:nvSpPr>
+        <p:spPr>
+          <a:xfrm>
+            <a:off x="6507328" y="4297680"/>
+            <a:ext cx="566928" cy="566928"/>
+          </a:xfrm>
+          <a:prstGeom prst="rect">
+            <a:avLst/>
+          </a:prstGeom>
+          <a:noFill/>
+          <a:ln/>
+        </p:spPr>
+        <p:txBody>
+          <a:bodyPr wrap="square" lIns="0" tIns="0" rIns="0" bIns="0" rtlCol="0" anchor="ctr"/>
+          <a:lstStyle/>
+          <a:p>
+            <a:pPr algn="ctr" indent="0" marL="0">
+              <a:buNone/>
+            </a:pPr>
+            <a:r>
+              <a:rPr lang="en-US" sz="1700" b="1" dirty="0">
+                <a:solidFill>
+                  <a:srgbClr val="1F3A32"/>
+                </a:solidFill>
+                <a:latin typeface="Calibri" pitchFamily="34" charset="0"/>
+                <a:ea typeface="Calibri" pitchFamily="34" charset="-122"/>
+                <a:cs typeface="Calibri" pitchFamily="34" charset="-120"/>
+              </a:rPr>
+              <a:t>04</a:t>
+            </a:r>
+            <a:endParaRPr lang="en-US" sz="1700" dirty="0"/>
+          </a:p>
+        </p:txBody>
+      </p:sp>
+      <p:sp>
+        <p:nvSpPr>
+          <p:cNvPr id="30" name="Text 28"/>
+          <p:cNvSpPr txBox="1"/>
+          <p:nvPr/>
+        </p:nvSpPr>
+        <p:spPr>
+          <a:xfrm>
+            <a:off x="7238848" y="4297680"/>
+            <a:ext cx="4129888" cy="566928"/>
+          </a:xfrm>
+          <a:prstGeom prst="rect">
+            <a:avLst/>
+          </a:prstGeom>
+          <a:noFill/>
+          <a:ln/>
+        </p:spPr>
+        <p:txBody>
+          <a:bodyPr wrap="square" lIns="0" tIns="0" rIns="0" bIns="0" rtlCol="0" anchor="ctr"/>
+          <a:lstStyle/>
+          <a:p>
+            <a:pPr indent="0" marL="0">
+              <a:buNone/>
+            </a:pPr>
+            <a:r>
+              <a:rPr lang="en-US" sz="2000" b="1" dirty="0">
+                <a:solidFill>
+                  <a:srgbClr val="1F3A32"/>
+                </a:solidFill>
+                <a:latin typeface="Cambria" pitchFamily="34" charset="0"/>
+                <a:ea typeface="Cambria" pitchFamily="34" charset="-122"/>
+                <a:cs typeface="Cambria" pitchFamily="34" charset="-120"/>
+              </a:rPr>
+              <a:t>Aprendizado por reforço</a:t>
+            </a:r>
+            <a:endParaRPr lang="en-US" sz="2000" dirty="0"/>
+          </a:p>
+        </p:txBody>
+      </p:sp>
+      <p:sp>
+        <p:nvSpPr>
+          <p:cNvPr id="31" name="Text 29"/>
+          <p:cNvSpPr txBox="1"/>
+          <p:nvPr/>
+        </p:nvSpPr>
+        <p:spPr>
+          <a:xfrm>
+            <a:off x="6507328" y="5047488"/>
+            <a:ext cx="3017520" cy="457200"/>
+          </a:xfrm>
+          <a:prstGeom prst="rect">
+            <a:avLst/>
+          </a:prstGeom>
+          <a:noFill/>
+          <a:ln/>
+        </p:spPr>
+        <p:txBody>
+          <a:bodyPr wrap="square" lIns="0" tIns="0" rIns="0" bIns="0" rtlCol="0" anchor="t"/>
+          <a:lstStyle/>
+          <a:p>
+            <a:pPr indent="0" marL="0">
+              <a:buNone/>
+            </a:pPr>
+            <a:r>
+              <a:rPr lang="en-US" sz="1500" i="1" dirty="0">
+                <a:solidFill>
+                  <a:srgbClr val="1E2B27"/>
+                </a:solidFill>
+                <a:latin typeface="Calibri" pitchFamily="34" charset="0"/>
+                <a:ea typeface="Calibri" pitchFamily="34" charset="-122"/>
+                <a:cs typeface="Calibri" pitchFamily="34" charset="-120"/>
+              </a:rPr>
+              <a:t>Onde a verba rende mais?</a:t>
+            </a:r>
+            <a:endParaRPr lang="en-US" sz="1500" dirty="0"/>
+          </a:p>
+        </p:txBody>
+      </p:sp>
+      <p:sp>
+        <p:nvSpPr>
+          <p:cNvPr id="32" name="Text 30"/>
+          <p:cNvSpPr txBox="1"/>
+          <p:nvPr/>
+        </p:nvSpPr>
+        <p:spPr>
+          <a:xfrm>
+            <a:off x="6507328" y="5532120"/>
+            <a:ext cx="3017520" cy="411480"/>
+          </a:xfrm>
+          <a:prstGeom prst="rect">
+            <a:avLst/>
+          </a:prstGeom>
+          <a:noFill/>
+          <a:ln/>
+        </p:spPr>
+        <p:txBody>
+          <a:bodyPr wrap="square" lIns="0" tIns="0" rIns="0" bIns="0" rtlCol="0" anchor="t"/>
+          <a:lstStyle/>
+          <a:p>
+            <a:pPr indent="0" marL="0">
+              <a:buNone/>
+            </a:pPr>
+            <a:r>
+              <a:rPr lang="en-US" sz="1300" dirty="0">
+                <a:solidFill>
+                  <a:srgbClr val="5F6B66"/>
+                </a:solidFill>
+                <a:latin typeface="Calibri" pitchFamily="34" charset="0"/>
+                <a:ea typeface="Calibri" pitchFamily="34" charset="-122"/>
+                <a:cs typeface="Calibri" pitchFamily="34" charset="-120"/>
+              </a:rPr>
+              <a:t>Bandit contextual (UCB)</a:t>
+            </a:r>
+            <a:endParaRPr lang="en-US" sz="1300" dirty="0"/>
+          </a:p>
+        </p:txBody>
+      </p:sp>
+      <p:sp>
+        <p:nvSpPr>
+          <p:cNvPr id="33" name="Text 31"/>
+          <p:cNvSpPr txBox="1"/>
+          <p:nvPr/>
+        </p:nvSpPr>
+        <p:spPr>
+          <a:xfrm>
+            <a:off x="9357055" y="4937760"/>
+            <a:ext cx="2011680" cy="777240"/>
+          </a:xfrm>
+          <a:prstGeom prst="rect">
+            <a:avLst/>
+          </a:prstGeom>
+          <a:noFill/>
+          <a:ln/>
+        </p:spPr>
+        <p:txBody>
+          <a:bodyPr wrap="square" lIns="0" tIns="0" rIns="0" bIns="0" rtlCol="0" anchor="ctr"/>
+          <a:lstStyle/>
+          <a:p>
+            <a:pPr algn="r" indent="0" marL="0">
+              <a:buNone/>
+            </a:pPr>
+            <a:r>
+              <a:rPr lang="en-US" sz="4000" b="1" dirty="0">
+                <a:solidFill>
+                  <a:srgbClr val="3E7A62"/>
+                </a:solidFill>
+                <a:latin typeface="Cambria" pitchFamily="34" charset="0"/>
+                <a:ea typeface="Cambria" pitchFamily="34" charset="-122"/>
+                <a:cs typeface="Cambria" pitchFamily="34" charset="-120"/>
+              </a:rPr>
+              <a:t>96,8%</a:t>
+            </a:r>
+            <a:endParaRPr lang="en-US" sz="4000" dirty="0"/>
+          </a:p>
+        </p:txBody>
+      </p:sp>
+      <p:sp>
+        <p:nvSpPr>
+          <p:cNvPr id="34" name="Text 32"/>
+          <p:cNvSpPr txBox="1"/>
+          <p:nvPr/>
+        </p:nvSpPr>
+        <p:spPr>
+          <a:xfrm>
+            <a:off x="9174175" y="5687568"/>
+            <a:ext cx="2194560" cy="320040"/>
+          </a:xfrm>
+          <a:prstGeom prst="rect">
+            <a:avLst/>
+          </a:prstGeom>
+          <a:noFill/>
+          <a:ln/>
+        </p:spPr>
+        <p:txBody>
+          <a:bodyPr wrap="square" lIns="0" tIns="0" rIns="0" bIns="0" rtlCol="0" anchor="ctr"/>
+          <a:lstStyle/>
+          <a:p>
+            <a:pPr algn="r" indent="0" marL="0">
+              <a:buNone/>
+            </a:pPr>
+            <a:r>
+              <a:rPr lang="en-US" sz="1200" dirty="0">
+                <a:solidFill>
+                  <a:srgbClr val="5F6B66"/>
+                </a:solidFill>
+                <a:latin typeface="Calibri" pitchFamily="34" charset="0"/>
+                <a:ea typeface="Calibri" pitchFamily="34" charset="-122"/>
+                <a:cs typeface="Calibri" pitchFamily="34" charset="-120"/>
+              </a:rPr>
+              <a:t>de escolhas ótimas</a:t>
+            </a:r>
+            <a:endParaRPr lang="en-US" sz="1200" dirty="0"/>
+          </a:p>
+        </p:txBody>
+      </p:sp>
+      <p:sp>
+        <p:nvSpPr>
+          <p:cNvPr id="35" name="Text 33"/>
+          <p:cNvSpPr txBox="1"/>
+          <p:nvPr/>
+        </p:nvSpPr>
+        <p:spPr>
+          <a:xfrm>
+            <a:off x="10545775" y="6400800"/>
+            <a:ext cx="1097280" cy="274320"/>
+          </a:xfrm>
+          <a:prstGeom prst="rect">
+            <a:avLst/>
+          </a:prstGeom>
+          <a:noFill/>
+          <a:ln/>
+        </p:spPr>
+        <p:txBody>
+          <a:bodyPr wrap="square" lIns="0" tIns="0" rIns="0" bIns="0" rtlCol="0" anchor="ctr"/>
+          <a:lstStyle/>
+          <a:p>
+            <a:pPr algn="r" indent="0" marL="0">
+              <a:buNone/>
+            </a:pPr>
+            <a:r>
+              <a:rPr lang="en-US" sz="1000" dirty="0">
+                <a:solidFill>
+                  <a:srgbClr val="5F6B66"/>
+                </a:solidFill>
+                <a:latin typeface="Calibri" pitchFamily="34" charset="0"/>
+                <a:ea typeface="Calibri" pitchFamily="34" charset="-122"/>
+                <a:cs typeface="Calibri" pitchFamily="34" charset="-120"/>
+              </a:rPr>
+              <a:t>4 / 10</a:t>
             </a:r>
             <a:endParaRPr lang="en-US" sz="1000" dirty="0"/>
           </a:p>
@@ -4562,7 +6642,7 @@
                 <a:ea typeface="Cambria" pitchFamily="34" charset="-122"/>
                 <a:cs typeface="Cambria" pitchFamily="34" charset="-120"/>
               </a:rPr>
-              <a:t>Dinheiro não explica alfabetização</a:t>
+              <a:t>Supervisionado: 5 algoritmos, 1 escolhido</a:t>
             </a:r>
             <a:endParaRPr lang="en-US" sz="3200" dirty="0"/>
           </a:p>
@@ -4577,7 +6657,7 @@
         <p:spPr>
           <a:xfrm>
             <a:off x="548640" y="1508760"/>
-            <a:ext cx="5760720" cy="365760"/>
+            <a:ext cx="6492240" cy="365760"/>
           </a:xfrm>
           <a:prstGeom prst="rect">
             <a:avLst/>
@@ -4601,7 +6681,7 @@
                 <a:ea typeface="Calibri" pitchFamily="34" charset="-122"/>
                 <a:cs typeface="Calibri" pitchFamily="34" charset="-120"/>
               </a:rPr>
-              <a:t>Crianças alfabetizadas em 2024, por perfil de município (%)</a:t>
+              <a:t>ROC AUC no treino x validação cruzada — a diferença é o overfitting</a:t>
             </a:r>
             <a:endParaRPr lang="en-US" sz="1400" dirty="0"/>
           </a:p>
@@ -4615,7 +6695,7 @@
         </p:nvGraphicFramePr>
         <p:xfrm>
           <a:off x="548640" y="1874520"/>
-          <a:ext cx="5760720" cy="4114800"/>
+          <a:ext cx="6492240" cy="4206240"/>
         </p:xfrm>
         <a:graphic xmlns:a="http://schemas.openxmlformats.org/drawingml/2006/main">
           <a:graphicData uri="http://schemas.openxmlformats.org/drawingml/2006/chart">
@@ -4625,18 +6705,57 @@
       </p:graphicFrame>
       <p:sp>
         <p:nvSpPr>
-          <p:cNvPr id="5" name="Shape 2"/>
+          <p:cNvPr id="5" name="Text 2"/>
+          <p:cNvSpPr txBox="1"/>
+          <p:nvPr/>
+        </p:nvSpPr>
+        <p:spPr>
+          <a:xfrm>
+            <a:off x="7360920" y="1508760"/>
+            <a:ext cx="4282135" cy="365760"/>
+          </a:xfrm>
+          <a:prstGeom prst="rect">
+            <a:avLst/>
+          </a:prstGeom>
+          <a:noFill/>
+          <a:ln/>
+        </p:spPr>
+        <p:txBody>
+          <a:bodyPr wrap="square" lIns="0" tIns="0" rIns="0" bIns="0" rtlCol="0" anchor="ctr"/>
+          <a:lstStyle/>
+          <a:p>
+            <a:pPr indent="0" marL="0">
+              <a:buNone/>
+            </a:pPr>
+            <a:r>
+              <a:rPr lang="en-US" sz="1400" b="1" dirty="0">
+                <a:solidFill>
+                  <a:srgbClr val="5F6B66"/>
+                </a:solidFill>
+                <a:latin typeface="Calibri" pitchFamily="34" charset="0"/>
+                <a:ea typeface="Calibri" pitchFamily="34" charset="-122"/>
+                <a:cs typeface="Calibri" pitchFamily="34" charset="-120"/>
+              </a:rPr>
+              <a:t>Regressão Logística no conjunto de teste</a:t>
+            </a:r>
+            <a:endParaRPr lang="en-US" sz="1400" dirty="0"/>
+          </a:p>
+        </p:txBody>
+      </p:sp>
+      <p:sp>
+        <p:nvSpPr>
+          <p:cNvPr id="6" name="Shape 3"/>
           <p:cNvSpPr/>
           <p:nvPr/>
         </p:nvSpPr>
         <p:spPr>
           <a:xfrm>
-            <a:off x="6720840" y="1600200"/>
-            <a:ext cx="4919472" cy="1965960"/>
+            <a:off x="7360920" y="1920240"/>
+            <a:ext cx="2003908" cy="1325880"/>
           </a:xfrm>
           <a:prstGeom prst="roundRect">
             <a:avLst>
-              <a:gd name="adj" fmla="val 4651"/>
+              <a:gd name="adj" fmla="val 6897"/>
             </a:avLst>
           </a:prstGeom>
           <a:solidFill>
@@ -4652,14 +6771,14 @@
       </p:sp>
       <p:sp>
         <p:nvSpPr>
-          <p:cNvPr id="6" name="Text 3"/>
-          <p:cNvSpPr txBox="1"/>
-          <p:nvPr/>
-        </p:nvSpPr>
-        <p:spPr>
-          <a:xfrm>
-            <a:off x="7040880" y="1801368"/>
-            <a:ext cx="4297680" cy="365760"/>
+          <p:cNvPr id="7" name="Text 4"/>
+          <p:cNvSpPr txBox="1"/>
+          <p:nvPr/>
+        </p:nvSpPr>
+        <p:spPr>
+          <a:xfrm>
+            <a:off x="7589520" y="2103120"/>
+            <a:ext cx="1546708" cy="640080"/>
           </a:xfrm>
           <a:prstGeom prst="rect">
             <a:avLst/>
@@ -4675,30 +6794,30 @@
               <a:buNone/>
             </a:pPr>
             <a:r>
-              <a:rPr lang="en-US" sz="1800" b="1" dirty="0">
-                <a:solidFill>
-                  <a:srgbClr val="1F3A32"/>
+              <a:rPr lang="en-US" sz="3200" b="1" dirty="0">
+                <a:solidFill>
+                  <a:srgbClr val="3E7A62"/>
                 </a:solidFill>
                 <a:latin typeface="Cambria" pitchFamily="34" charset="0"/>
                 <a:ea typeface="Cambria" pitchFamily="34" charset="-122"/>
                 <a:cs typeface="Cambria" pitchFamily="34" charset="-120"/>
               </a:rPr>
-              <a:t>Interior de alto desempenho</a:t>
-            </a:r>
-            <a:endParaRPr lang="en-US" sz="1800" dirty="0"/>
-          </a:p>
-        </p:txBody>
-      </p:sp>
-      <p:sp>
-        <p:nvSpPr>
-          <p:cNvPr id="7" name="Text 4"/>
-          <p:cNvSpPr txBox="1"/>
-          <p:nvPr/>
-        </p:nvSpPr>
-        <p:spPr>
-          <a:xfrm>
-            <a:off x="7040880" y="2194560"/>
-            <a:ext cx="2377440" cy="1188720"/>
+              <a:t>0,90</a:t>
+            </a:r>
+            <a:endParaRPr lang="en-US" sz="3200" dirty="0"/>
+          </a:p>
+        </p:txBody>
+      </p:sp>
+      <p:sp>
+        <p:nvSpPr>
+          <p:cNvPr id="8" name="Text 5"/>
+          <p:cNvSpPr txBox="1"/>
+          <p:nvPr/>
+        </p:nvSpPr>
+        <p:spPr>
+          <a:xfrm>
+            <a:off x="7589520" y="2724912"/>
+            <a:ext cx="1546708" cy="411480"/>
           </a:xfrm>
           <a:prstGeom prst="rect">
             <a:avLst/>
@@ -4714,93 +6833,15 @@
               <a:buNone/>
             </a:pPr>
             <a:r>
-              <a:rPr lang="en-US" sz="1400" dirty="0">
-                <a:solidFill>
-                  <a:srgbClr val="1E2B27"/>
+              <a:rPr lang="en-US" sz="1200" dirty="0">
+                <a:solidFill>
+                  <a:srgbClr val="5F6B66"/>
                 </a:solidFill>
                 <a:latin typeface="Calibri" pitchFamily="34" charset="0"/>
                 <a:ea typeface="Calibri" pitchFamily="34" charset="-122"/>
                 <a:cs typeface="Calibri" pitchFamily="34" charset="-120"/>
               </a:rPr>
-              <a:t>PIB per capita de R$ 20 mil, maioria no Nordeste</a:t>
-            </a:r>
-            <a:endParaRPr lang="en-US" sz="1400" dirty="0"/>
-          </a:p>
-        </p:txBody>
-      </p:sp>
-      <p:sp>
-        <p:nvSpPr>
-          <p:cNvPr id="8" name="Text 5"/>
-          <p:cNvSpPr txBox="1"/>
-          <p:nvPr/>
-        </p:nvSpPr>
-        <p:spPr>
-          <a:xfrm>
-            <a:off x="9418320" y="2103120"/>
-            <a:ext cx="2011680" cy="868680"/>
-          </a:xfrm>
-          <a:prstGeom prst="rect">
-            <a:avLst/>
-          </a:prstGeom>
-          <a:noFill/>
-          <a:ln/>
-        </p:spPr>
-        <p:txBody>
-          <a:bodyPr wrap="square" lIns="0" tIns="0" rIns="0" bIns="0" rtlCol="0" anchor="ctr"/>
-          <a:lstStyle/>
-          <a:p>
-            <a:pPr algn="r" indent="0" marL="0">
-              <a:buNone/>
-            </a:pPr>
-            <a:r>
-              <a:rPr lang="en-US" sz="4400" b="1" dirty="0">
-                <a:solidFill>
-                  <a:srgbClr val="3E7A62"/>
-                </a:solidFill>
-                <a:latin typeface="Cambria" pitchFamily="34" charset="0"/>
-                <a:ea typeface="Cambria" pitchFamily="34" charset="-122"/>
-                <a:cs typeface="Cambria" pitchFamily="34" charset="-120"/>
-              </a:rPr>
-              <a:t>79%</a:t>
-            </a:r>
-            <a:endParaRPr lang="en-US" sz="4400" dirty="0"/>
-          </a:p>
-        </p:txBody>
-      </p:sp>
-      <p:sp>
-        <p:nvSpPr>
-          <p:cNvPr id="9" name="Text 6"/>
-          <p:cNvSpPr txBox="1"/>
-          <p:nvPr/>
-        </p:nvSpPr>
-        <p:spPr>
-          <a:xfrm>
-            <a:off x="9144000" y="2953512"/>
-            <a:ext cx="2286000" cy="457200"/>
-          </a:xfrm>
-          <a:prstGeom prst="rect">
-            <a:avLst/>
-          </a:prstGeom>
-          <a:noFill/>
-          <a:ln/>
-        </p:spPr>
-        <p:txBody>
-          <a:bodyPr wrap="square" lIns="0" tIns="0" rIns="0" bIns="0" rtlCol="0" anchor="ctr"/>
-          <a:lstStyle/>
-          <a:p>
-            <a:pPr algn="r" indent="0" marL="0">
-              <a:buNone/>
-            </a:pPr>
-            <a:r>
-              <a:rPr lang="en-US" sz="1200" dirty="0">
-                <a:solidFill>
-                  <a:srgbClr val="5F6B66"/>
-                </a:solidFill>
-                <a:latin typeface="Calibri" pitchFamily="34" charset="0"/>
-                <a:ea typeface="Calibri" pitchFamily="34" charset="-122"/>
-                <a:cs typeface="Calibri" pitchFamily="34" charset="-120"/>
-              </a:rPr>
-              <a:t>das crianças alfabetizadas</a:t>
+              <a:t>ROC AUC</a:t>
             </a:r>
             <a:endParaRPr lang="en-US" sz="1200" dirty="0"/>
           </a:p>
@@ -4808,18 +6849,18 @@
       </p:sp>
       <p:sp>
         <p:nvSpPr>
-          <p:cNvPr id="10" name="Shape 7"/>
+          <p:cNvPr id="9" name="Shape 6"/>
           <p:cNvSpPr/>
           <p:nvPr/>
         </p:nvSpPr>
         <p:spPr>
           <a:xfrm>
-            <a:off x="6720840" y="3749040"/>
-            <a:ext cx="4919472" cy="1965960"/>
+            <a:off x="9639148" y="1920240"/>
+            <a:ext cx="2003908" cy="1325880"/>
           </a:xfrm>
           <a:prstGeom prst="roundRect">
             <a:avLst>
-              <a:gd name="adj" fmla="val 4651"/>
+              <a:gd name="adj" fmla="val 6897"/>
             </a:avLst>
           </a:prstGeom>
           <a:solidFill>
@@ -4835,14 +6876,14 @@
       </p:sp>
       <p:sp>
         <p:nvSpPr>
-          <p:cNvPr id="11" name="Text 8"/>
-          <p:cNvSpPr txBox="1"/>
-          <p:nvPr/>
-        </p:nvSpPr>
-        <p:spPr>
-          <a:xfrm>
-            <a:off x="7040880" y="3950208"/>
-            <a:ext cx="4297680" cy="365760"/>
+          <p:cNvPr id="10" name="Text 7"/>
+          <p:cNvSpPr txBox="1"/>
+          <p:nvPr/>
+        </p:nvSpPr>
+        <p:spPr>
+          <a:xfrm>
+            <a:off x="9867748" y="2103120"/>
+            <a:ext cx="1546708" cy="640080"/>
           </a:xfrm>
           <a:prstGeom prst="rect">
             <a:avLst/>
@@ -4858,30 +6899,30 @@
               <a:buNone/>
             </a:pPr>
             <a:r>
-              <a:rPr lang="en-US" sz="1800" b="1" dirty="0">
-                <a:solidFill>
-                  <a:srgbClr val="1F3A32"/>
+              <a:rPr lang="en-US" sz="3200" b="1" dirty="0">
+                <a:solidFill>
+                  <a:srgbClr val="3E7A62"/>
                 </a:solidFill>
                 <a:latin typeface="Cambria" pitchFamily="34" charset="0"/>
                 <a:ea typeface="Cambria" pitchFamily="34" charset="-122"/>
                 <a:cs typeface="Cambria" pitchFamily="34" charset="-120"/>
               </a:rPr>
-              <a:t>121 centros urbanos</a:t>
-            </a:r>
-            <a:endParaRPr lang="en-US" sz="1800" dirty="0"/>
-          </a:p>
-        </p:txBody>
-      </p:sp>
-      <p:sp>
-        <p:nvSpPr>
-          <p:cNvPr id="12" name="Text 9"/>
-          <p:cNvSpPr txBox="1"/>
-          <p:nvPr/>
-        </p:nvSpPr>
-        <p:spPr>
-          <a:xfrm>
-            <a:off x="7040880" y="4343400"/>
-            <a:ext cx="2377440" cy="1188720"/>
+              <a:t>0,84</a:t>
+            </a:r>
+            <a:endParaRPr lang="en-US" sz="3200" dirty="0"/>
+          </a:p>
+        </p:txBody>
+      </p:sp>
+      <p:sp>
+        <p:nvSpPr>
+          <p:cNvPr id="11" name="Text 8"/>
+          <p:cNvSpPr txBox="1"/>
+          <p:nvPr/>
+        </p:nvSpPr>
+        <p:spPr>
+          <a:xfrm>
+            <a:off x="9867748" y="2724912"/>
+            <a:ext cx="1546708" cy="411480"/>
           </a:xfrm>
           <a:prstGeom prst="rect">
             <a:avLst/>
@@ -4897,19 +6938,46 @@
               <a:buNone/>
             </a:pPr>
             <a:r>
-              <a:rPr lang="en-US" sz="1400" dirty="0">
-                <a:solidFill>
-                  <a:srgbClr val="1E2B27"/>
+              <a:rPr lang="en-US" sz="1200" dirty="0">
+                <a:solidFill>
+                  <a:srgbClr val="5F6B66"/>
                 </a:solidFill>
                 <a:latin typeface="Calibri" pitchFamily="34" charset="0"/>
                 <a:ea typeface="Calibri" pitchFamily="34" charset="-122"/>
                 <a:cs typeface="Calibri" pitchFamily="34" charset="-120"/>
               </a:rPr>
-              <a:t>PIB de R$ 38 mil e 96% dos adultos alfabetizados</a:t>
-            </a:r>
-            <a:endParaRPr lang="en-US" sz="1400" dirty="0"/>
-          </a:p>
-        </p:txBody>
+              <a:t>F1-score</a:t>
+            </a:r>
+            <a:endParaRPr lang="en-US" sz="1200" dirty="0"/>
+          </a:p>
+        </p:txBody>
+      </p:sp>
+      <p:sp>
+        <p:nvSpPr>
+          <p:cNvPr id="12" name="Shape 9"/>
+          <p:cNvSpPr/>
+          <p:nvPr/>
+        </p:nvSpPr>
+        <p:spPr>
+          <a:xfrm>
+            <a:off x="7360920" y="3520440"/>
+            <a:ext cx="2003908" cy="1325880"/>
+          </a:xfrm>
+          <a:prstGeom prst="roundRect">
+            <a:avLst>
+              <a:gd name="adj" fmla="val 6897"/>
+            </a:avLst>
+          </a:prstGeom>
+          <a:solidFill>
+            <a:srgbClr val="E9F0ED"/>
+          </a:solidFill>
+          <a:ln w="12700">
+            <a:solidFill>
+              <a:srgbClr val="E9F0ED"/>
+            </a:solidFill>
+            <a:prstDash val="solid"/>
+          </a:ln>
+        </p:spPr>
       </p:sp>
       <p:sp>
         <p:nvSpPr>
@@ -4919,8 +6987,8 @@
         </p:nvSpPr>
         <p:spPr>
           <a:xfrm>
-            <a:off x="9418320" y="4251960"/>
-            <a:ext cx="2011680" cy="868680"/>
+            <a:off x="7589520" y="3703320"/>
+            <a:ext cx="1546708" cy="640080"/>
           </a:xfrm>
           <a:prstGeom prst="rect">
             <a:avLst/>
@@ -4932,21 +7000,21 @@
           <a:bodyPr wrap="square" lIns="0" tIns="0" rIns="0" bIns="0" rtlCol="0" anchor="ctr"/>
           <a:lstStyle/>
           <a:p>
-            <a:pPr algn="r" indent="0" marL="0">
-              <a:buNone/>
-            </a:pPr>
-            <a:r>
-              <a:rPr lang="en-US" sz="4400" b="1" dirty="0">
-                <a:solidFill>
-                  <a:srgbClr val="C8423F"/>
+            <a:pPr indent="0" marL="0">
+              <a:buNone/>
+            </a:pPr>
+            <a:r>
+              <a:rPr lang="en-US" sz="3200" b="1" dirty="0">
+                <a:solidFill>
+                  <a:srgbClr val="3E7A62"/>
                 </a:solidFill>
                 <a:latin typeface="Cambria" pitchFamily="34" charset="0"/>
                 <a:ea typeface="Cambria" pitchFamily="34" charset="-122"/>
                 <a:cs typeface="Cambria" pitchFamily="34" charset="-120"/>
               </a:rPr>
-              <a:t>53%</a:t>
-            </a:r>
-            <a:endParaRPr lang="en-US" sz="4400" dirty="0"/>
+              <a:t>0,82</a:t>
+            </a:r>
+            <a:endParaRPr lang="en-US" sz="3200" dirty="0"/>
           </a:p>
         </p:txBody>
       </p:sp>
@@ -4958,20 +7026,20 @@
         </p:nvSpPr>
         <p:spPr>
           <a:xfrm>
-            <a:off x="9144000" y="5102352"/>
-            <a:ext cx="2286000" cy="457200"/>
-          </a:xfrm>
-          <a:prstGeom prst="rect">
-            <a:avLst/>
-          </a:prstGeom>
-          <a:noFill/>
-          <a:ln/>
-        </p:spPr>
-        <p:txBody>
-          <a:bodyPr wrap="square" lIns="0" tIns="0" rIns="0" bIns="0" rtlCol="0" anchor="ctr"/>
-          <a:lstStyle/>
-          <a:p>
-            <a:pPr algn="r" indent="0" marL="0">
+            <a:off x="7589520" y="4325112"/>
+            <a:ext cx="1546708" cy="411480"/>
+          </a:xfrm>
+          <a:prstGeom prst="rect">
+            <a:avLst/>
+          </a:prstGeom>
+          <a:noFill/>
+          <a:ln/>
+        </p:spPr>
+        <p:txBody>
+          <a:bodyPr wrap="square" lIns="0" tIns="0" rIns="0" bIns="0" rtlCol="0" anchor="t"/>
+          <a:lstStyle/>
+          <a:p>
+            <a:pPr indent="0" marL="0">
               <a:buNone/>
             </a:pPr>
             <a:r>
@@ -4983,7 +7051,7 @@
                 <a:ea typeface="Calibri" pitchFamily="34" charset="-122"/>
                 <a:cs typeface="Calibri" pitchFamily="34" charset="-120"/>
               </a:rPr>
-              <a:t>das crianças alfabetizadas</a:t>
+              <a:t>Acurácia</a:t>
             </a:r>
             <a:endParaRPr lang="en-US" sz="1200" dirty="0"/>
           </a:p>
@@ -4991,14 +7059,41 @@
       </p:sp>
       <p:sp>
         <p:nvSpPr>
-          <p:cNvPr id="15" name="Text 12"/>
-          <p:cNvSpPr txBox="1"/>
-          <p:nvPr/>
-        </p:nvSpPr>
-        <p:spPr>
-          <a:xfrm>
-            <a:off x="6720840" y="5806440"/>
-            <a:ext cx="4919472" cy="365760"/>
+          <p:cNvPr id="15" name="Shape 12"/>
+          <p:cNvSpPr/>
+          <p:nvPr/>
+        </p:nvSpPr>
+        <p:spPr>
+          <a:xfrm>
+            <a:off x="9639148" y="3520440"/>
+            <a:ext cx="2003908" cy="1325880"/>
+          </a:xfrm>
+          <a:prstGeom prst="roundRect">
+            <a:avLst>
+              <a:gd name="adj" fmla="val 6897"/>
+            </a:avLst>
+          </a:prstGeom>
+          <a:solidFill>
+            <a:srgbClr val="E9F0ED"/>
+          </a:solidFill>
+          <a:ln w="12700">
+            <a:solidFill>
+              <a:srgbClr val="E9F0ED"/>
+            </a:solidFill>
+            <a:prstDash val="solid"/>
+          </a:ln>
+        </p:spPr>
+      </p:sp>
+      <p:sp>
+        <p:nvSpPr>
+          <p:cNvPr id="16" name="Text 13"/>
+          <p:cNvSpPr txBox="1"/>
+          <p:nvPr/>
+        </p:nvSpPr>
+        <p:spPr>
+          <a:xfrm>
+            <a:off x="9867748" y="3703320"/>
+            <a:ext cx="1546708" cy="640080"/>
           </a:xfrm>
           <a:prstGeom prst="rect">
             <a:avLst/>
@@ -5014,54 +7109,146 @@
               <a:buNone/>
             </a:pPr>
             <a:r>
-              <a:rPr lang="en-US" sz="1500" b="1" i="1" dirty="0">
-                <a:solidFill>
-                  <a:srgbClr val="1F3A32"/>
+              <a:rPr lang="en-US" sz="3200" b="1" dirty="0">
+                <a:solidFill>
+                  <a:srgbClr val="3E7A62"/>
+                </a:solidFill>
+                <a:latin typeface="Cambria" pitchFamily="34" charset="0"/>
+                <a:ea typeface="Cambria" pitchFamily="34" charset="-122"/>
+                <a:cs typeface="Cambria" pitchFamily="34" charset="-120"/>
+              </a:rPr>
+              <a:t>0,125</a:t>
+            </a:r>
+            <a:endParaRPr lang="en-US" sz="3200" dirty="0"/>
+          </a:p>
+        </p:txBody>
+      </p:sp>
+      <p:sp>
+        <p:nvSpPr>
+          <p:cNvPr id="17" name="Text 14"/>
+          <p:cNvSpPr txBox="1"/>
+          <p:nvPr/>
+        </p:nvSpPr>
+        <p:spPr>
+          <a:xfrm>
+            <a:off x="9867748" y="4325112"/>
+            <a:ext cx="1546708" cy="411480"/>
+          </a:xfrm>
+          <a:prstGeom prst="rect">
+            <a:avLst/>
+          </a:prstGeom>
+          <a:noFill/>
+          <a:ln/>
+        </p:spPr>
+        <p:txBody>
+          <a:bodyPr wrap="square" lIns="0" tIns="0" rIns="0" bIns="0" rtlCol="0" anchor="t"/>
+          <a:lstStyle/>
+          <a:p>
+            <a:pPr indent="0" marL="0">
+              <a:buNone/>
+            </a:pPr>
+            <a:r>
+              <a:rPr lang="en-US" sz="1200" dirty="0">
+                <a:solidFill>
+                  <a:srgbClr val="5F6B66"/>
                 </a:solidFill>
                 <a:latin typeface="Calibri" pitchFamily="34" charset="0"/>
                 <a:ea typeface="Calibri" pitchFamily="34" charset="-122"/>
                 <a:cs typeface="Calibri" pitchFamily="34" charset="-120"/>
               </a:rPr>
-              <a:t>Nas grandes cidades, o gargalo é a rede, não o contexto.</a:t>
-            </a:r>
-            <a:endParaRPr lang="en-US" sz="1500" dirty="0"/>
-          </a:p>
-        </p:txBody>
-      </p:sp>
-      <p:sp>
-        <p:nvSpPr>
-          <p:cNvPr id="16" name="Text 13"/>
-          <p:cNvSpPr txBox="1"/>
-          <p:nvPr/>
-        </p:nvSpPr>
-        <p:spPr>
-          <a:xfrm>
-            <a:off x="10545775" y="6400800"/>
-            <a:ext cx="1097280" cy="274320"/>
-          </a:xfrm>
-          <a:prstGeom prst="rect">
-            <a:avLst/>
-          </a:prstGeom>
-          <a:noFill/>
-          <a:ln/>
-        </p:spPr>
-        <p:txBody>
-          <a:bodyPr wrap="square" lIns="0" tIns="0" rIns="0" bIns="0" rtlCol="0" anchor="ctr"/>
-          <a:lstStyle/>
-          <a:p>
-            <a:pPr algn="r" indent="0" marL="0">
-              <a:buNone/>
-            </a:pPr>
-            <a:r>
-              <a:rPr lang="en-US" sz="1000" dirty="0">
-                <a:solidFill>
-                  <a:srgbClr val="5F6B66"/>
+              <a:t>Brier — erro da probabilidade</a:t>
+            </a:r>
+            <a:endParaRPr lang="en-US" sz="1200" dirty="0"/>
+          </a:p>
+        </p:txBody>
+      </p:sp>
+      <p:sp>
+        <p:nvSpPr>
+          <p:cNvPr id="18" name="Text 15"/>
+          <p:cNvSpPr txBox="1"/>
+          <p:nvPr/>
+        </p:nvSpPr>
+        <p:spPr>
+          <a:xfrm>
+            <a:off x="7360920" y="5166360"/>
+            <a:ext cx="4282135" cy="914400"/>
+          </a:xfrm>
+          <a:prstGeom prst="rect">
+            <a:avLst/>
+          </a:prstGeom>
+          <a:noFill/>
+          <a:ln/>
+        </p:spPr>
+        <p:txBody>
+          <a:bodyPr wrap="square" lIns="0" tIns="0" rIns="0" bIns="0" rtlCol="0" anchor="t"/>
+          <a:lstStyle/>
+          <a:p>
+            <a:pPr indent="0" marL="0">
+              <a:buNone/>
+            </a:pPr>
+            <a:r>
+              <a:rPr lang="en-US" sz="1400" b="1" dirty="0">
+                <a:solidFill>
+                  <a:srgbClr val="1F3A32"/>
                 </a:solidFill>
                 <a:latin typeface="Calibri" pitchFamily="34" charset="0"/>
                 <a:ea typeface="Calibri" pitchFamily="34" charset="-122"/>
                 <a:cs typeface="Calibri" pitchFamily="34" charset="-120"/>
               </a:rPr>
-              <a:t>5 / 8</a:t>
+              <a:t>Por que Regressão Logística? </a:t>
+            </a:r>
+            <a:pPr indent="0" marL="0">
+              <a:buNone/>
+            </a:pPr>
+            <a:r>
+              <a:rPr lang="en-US" sz="1400" dirty="0">
+                <a:solidFill>
+                  <a:srgbClr val="1E2B27"/>
+                </a:solidFill>
+                <a:latin typeface="Calibri" pitchFamily="34" charset="0"/>
+                <a:ea typeface="Calibri" pitchFamily="34" charset="-122"/>
+                <a:cs typeface="Calibri" pitchFamily="34" charset="-120"/>
+              </a:rPr>
+              <a:t>Mesma nota na validação que os modelos complexos, com 12 vezes menos overfitting — e explicável para o gestor.</a:t>
+            </a:r>
+            <a:endParaRPr lang="en-US" sz="1400" dirty="0"/>
+          </a:p>
+        </p:txBody>
+      </p:sp>
+      <p:sp>
+        <p:nvSpPr>
+          <p:cNvPr id="19" name="Text 16"/>
+          <p:cNvSpPr txBox="1"/>
+          <p:nvPr/>
+        </p:nvSpPr>
+        <p:spPr>
+          <a:xfrm>
+            <a:off x="10545775" y="6400800"/>
+            <a:ext cx="1097280" cy="274320"/>
+          </a:xfrm>
+          <a:prstGeom prst="rect">
+            <a:avLst/>
+          </a:prstGeom>
+          <a:noFill/>
+          <a:ln/>
+        </p:spPr>
+        <p:txBody>
+          <a:bodyPr wrap="square" lIns="0" tIns="0" rIns="0" bIns="0" rtlCol="0" anchor="ctr"/>
+          <a:lstStyle/>
+          <a:p>
+            <a:pPr algn="r" indent="0" marL="0">
+              <a:buNone/>
+            </a:pPr>
+            <a:r>
+              <a:rPr lang="en-US" sz="1000" dirty="0">
+                <a:solidFill>
+                  <a:srgbClr val="5F6B66"/>
+                </a:solidFill>
+                <a:latin typeface="Calibri" pitchFamily="34" charset="0"/>
+                <a:ea typeface="Calibri" pitchFamily="34" charset="-122"/>
+                <a:cs typeface="Calibri" pitchFamily="34" charset="-120"/>
+              </a:rPr>
+              <a:t>5 / 10</a:t>
             </a:r>
             <a:endParaRPr lang="en-US" sz="1000" dirty="0"/>
           </a:p>
@@ -5132,7 +7319,7 @@
                 <a:ea typeface="Cambria" pitchFamily="34" charset="-122"/>
                 <a:cs typeface="Cambria" pitchFamily="34" charset="-120"/>
               </a:rPr>
-              <a:t>A meta de 2030 é alcançável, mas não está garantida</a:t>
+              <a:t>O estado onde a criança nasce pesa mais que tudo</a:t>
             </a:r>
             <a:endParaRPr lang="en-US" sz="3200" dirty="0"/>
           </a:p>
@@ -5146,8 +7333,8 @@
         </p:nvSpPr>
         <p:spPr>
           <a:xfrm>
-            <a:off x="548640" y="1508760"/>
-            <a:ext cx="6766560" cy="365760"/>
+            <a:off x="548640" y="1600200"/>
+            <a:ext cx="3840480" cy="1097280"/>
           </a:xfrm>
           <a:prstGeom prst="rect">
             <a:avLst/>
@@ -5163,15 +7350,198 @@
               <a:buNone/>
             </a:pPr>
             <a:r>
-              <a:rPr lang="en-US" sz="1400" b="1" dirty="0">
-                <a:solidFill>
-                  <a:srgbClr val="5F6B66"/>
+              <a:rPr lang="en-US" sz="6600" b="1" dirty="0">
+                <a:solidFill>
+                  <a:srgbClr val="1F3A32"/>
+                </a:solidFill>
+                <a:latin typeface="Cambria" pitchFamily="34" charset="0"/>
+                <a:ea typeface="Cambria" pitchFamily="34" charset="-122"/>
+                <a:cs typeface="Cambria" pitchFamily="34" charset="-120"/>
+              </a:rPr>
+              <a:t>3x</a:t>
+            </a:r>
+            <a:endParaRPr lang="en-US" sz="6600" dirty="0"/>
+          </a:p>
+        </p:txBody>
+      </p:sp>
+      <p:sp>
+        <p:nvSpPr>
+          <p:cNvPr id="4" name="Text 2"/>
+          <p:cNvSpPr txBox="1"/>
+          <p:nvPr/>
+        </p:nvSpPr>
+        <p:spPr>
+          <a:xfrm>
+            <a:off x="548640" y="2697480"/>
+            <a:ext cx="3840480" cy="822960"/>
+          </a:xfrm>
+          <a:prstGeom prst="rect">
+            <a:avLst/>
+          </a:prstGeom>
+          <a:noFill/>
+          <a:ln/>
+        </p:spPr>
+        <p:txBody>
+          <a:bodyPr wrap="square" lIns="0" tIns="0" rIns="0" bIns="0" rtlCol="0" anchor="t"/>
+          <a:lstStyle/>
+          <a:p>
+            <a:pPr indent="0" marL="0">
+              <a:buNone/>
+            </a:pPr>
+            <a:r>
+              <a:rPr lang="en-US" sz="1600" dirty="0">
+                <a:solidFill>
+                  <a:srgbClr val="1E2B27"/>
                 </a:solidFill>
                 <a:latin typeface="Calibri" pitchFamily="34" charset="0"/>
                 <a:ea typeface="Calibri" pitchFamily="34" charset="-122"/>
                 <a:cs typeface="Calibri" pitchFamily="34" charset="-120"/>
               </a:rPr>
-              <a:t>Brasil: observado em 2024–2025 e projeção até 2030 (%)</a:t>
+              <a:t>é o peso do estado em relação ao segundo fator mais influente</a:t>
+            </a:r>
+            <a:endParaRPr lang="en-US" sz="1600" dirty="0"/>
+          </a:p>
+        </p:txBody>
+      </p:sp>
+      <p:sp>
+        <p:nvSpPr>
+          <p:cNvPr id="5" name="Shape 3"/>
+          <p:cNvSpPr/>
+          <p:nvPr/>
+        </p:nvSpPr>
+        <p:spPr>
+          <a:xfrm>
+            <a:off x="548640" y="3886200"/>
+            <a:ext cx="3840480" cy="1691640"/>
+          </a:xfrm>
+          <a:prstGeom prst="roundRect">
+            <a:avLst>
+              <a:gd name="adj" fmla="val 5405"/>
+            </a:avLst>
+          </a:prstGeom>
+          <a:solidFill>
+            <a:srgbClr val="E9F0ED"/>
+          </a:solidFill>
+          <a:ln w="12700">
+            <a:solidFill>
+              <a:srgbClr val="E9F0ED"/>
+            </a:solidFill>
+            <a:prstDash val="solid"/>
+          </a:ln>
+        </p:spPr>
+      </p:sp>
+      <p:sp>
+        <p:nvSpPr>
+          <p:cNvPr id="6" name="Text 4"/>
+          <p:cNvSpPr txBox="1"/>
+          <p:nvPr/>
+        </p:nvSpPr>
+        <p:spPr>
+          <a:xfrm>
+            <a:off x="822960" y="4069080"/>
+            <a:ext cx="3291840" cy="365760"/>
+          </a:xfrm>
+          <a:prstGeom prst="rect">
+            <a:avLst/>
+          </a:prstGeom>
+          <a:noFill/>
+          <a:ln/>
+        </p:spPr>
+        <p:txBody>
+          <a:bodyPr wrap="square" lIns="0" tIns="0" rIns="0" bIns="0" rtlCol="0" anchor="ctr"/>
+          <a:lstStyle/>
+          <a:p>
+            <a:pPr indent="0" marL="0">
+              <a:buNone/>
+            </a:pPr>
+            <a:r>
+              <a:rPr lang="en-US" sz="1700" b="1" dirty="0">
+                <a:solidFill>
+                  <a:srgbClr val="1F3A32"/>
+                </a:solidFill>
+                <a:latin typeface="Cambria" pitchFamily="34" charset="0"/>
+                <a:ea typeface="Cambria" pitchFamily="34" charset="-122"/>
+                <a:cs typeface="Cambria" pitchFamily="34" charset="-120"/>
+              </a:rPr>
+              <a:t>Como medimos</a:t>
+            </a:r>
+            <a:endParaRPr lang="en-US" sz="1700" dirty="0"/>
+          </a:p>
+        </p:txBody>
+      </p:sp>
+      <p:sp>
+        <p:nvSpPr>
+          <p:cNvPr id="7" name="Text 5"/>
+          <p:cNvSpPr txBox="1"/>
+          <p:nvPr/>
+        </p:nvSpPr>
+        <p:spPr>
+          <a:xfrm>
+            <a:off x="822960" y="4480560"/>
+            <a:ext cx="3291840" cy="1371600"/>
+          </a:xfrm>
+          <a:prstGeom prst="rect">
+            <a:avLst/>
+          </a:prstGeom>
+          <a:noFill/>
+          <a:ln/>
+        </p:spPr>
+        <p:txBody>
+          <a:bodyPr wrap="square" lIns="0" tIns="0" rIns="0" bIns="0" rtlCol="0" anchor="t"/>
+          <a:lstStyle/>
+          <a:p>
+            <a:pPr indent="0" marL="0">
+              <a:buNone/>
+            </a:pPr>
+            <a:r>
+              <a:rPr lang="en-US" sz="1400" dirty="0">
+                <a:solidFill>
+                  <a:srgbClr val="1E2B27"/>
+                </a:solidFill>
+                <a:latin typeface="Calibri" pitchFamily="34" charset="0"/>
+                <a:ea typeface="Calibri" pitchFamily="34" charset="-122"/>
+                <a:cs typeface="Calibri" pitchFamily="34" charset="-120"/>
+              </a:rPr>
+              <a:t>Importância por permutação e SHAP: quanto a previsão piora quando cada variável é embaralhada.</a:t>
+            </a:r>
+            <a:endParaRPr lang="en-US" sz="1400" dirty="0"/>
+          </a:p>
+        </p:txBody>
+      </p:sp>
+      <p:sp>
+        <p:nvSpPr>
+          <p:cNvPr id="8" name="Text 6"/>
+          <p:cNvSpPr txBox="1"/>
+          <p:nvPr/>
+        </p:nvSpPr>
+        <p:spPr>
+          <a:xfrm>
+            <a:off x="4937760" y="1600200"/>
+            <a:ext cx="6675120" cy="365760"/>
+          </a:xfrm>
+          <a:prstGeom prst="rect">
+            <a:avLst/>
+          </a:prstGeom>
+          <a:noFill/>
+          <a:ln/>
+        </p:spPr>
+        <p:txBody>
+          <a:bodyPr wrap="square" lIns="0" tIns="0" rIns="0" bIns="0" rtlCol="0" anchor="ctr"/>
+          <a:lstStyle/>
+          <a:p>
+            <a:pPr indent="0" marL="0">
+              <a:buNone/>
+            </a:pPr>
+            <a:r>
+              <a:rPr lang="en-US" sz="1400" b="1" dirty="0">
+                <a:solidFill>
+                  <a:srgbClr val="5F6B66"/>
+                </a:solidFill>
+                <a:latin typeface="Calibri" pitchFamily="34" charset="0"/>
+                <a:ea typeface="Calibri" pitchFamily="34" charset="-122"/>
+                <a:cs typeface="Calibri" pitchFamily="34" charset="-120"/>
+              </a:rPr>
+              <a:t>Influência de cada fator na previsão (estado = 100)</a:t>
             </a:r>
             <a:endParaRPr lang="en-US" sz="1400" dirty="0"/>
           </a:p>
@@ -5179,13 +7549,13 @@
       </p:sp>
       <p:graphicFrame>
         <p:nvGraphicFramePr>
-          <p:cNvPr id="4" name="Chart 0" descr=""/>
+          <p:cNvPr id="9" name="Chart 0" descr=""/>
           <p:cNvGraphicFramePr/>
           <p:nvPr/>
         </p:nvGraphicFramePr>
         <p:xfrm>
-          <a:off x="548640" y="1874520"/>
-          <a:ext cx="6766560" cy="4160520"/>
+          <a:off x="4937760" y="1965960"/>
+          <a:ext cx="6675120" cy="4023360"/>
         </p:xfrm>
         <a:graphic xmlns:a="http://schemas.openxmlformats.org/drawingml/2006/main">
           <a:graphicData uri="http://schemas.openxmlformats.org/drawingml/2006/chart">
@@ -5195,14 +7565,14 @@
       </p:graphicFrame>
       <p:sp>
         <p:nvSpPr>
-          <p:cNvPr id="5" name="Text 2"/>
-          <p:cNvSpPr txBox="1"/>
-          <p:nvPr/>
-        </p:nvSpPr>
-        <p:spPr>
-          <a:xfrm>
-            <a:off x="7818120" y="1691640"/>
-            <a:ext cx="3840480" cy="1188720"/>
+          <p:cNvPr id="10" name="Text 7"/>
+          <p:cNvSpPr txBox="1"/>
+          <p:nvPr/>
+        </p:nvSpPr>
+        <p:spPr>
+          <a:xfrm>
+            <a:off x="10545775" y="6400800"/>
+            <a:ext cx="1097280" cy="274320"/>
           </a:xfrm>
           <a:prstGeom prst="rect">
             <a:avLst/>
@@ -5214,170 +7584,19 @@
           <a:bodyPr wrap="square" lIns="0" tIns="0" rIns="0" bIns="0" rtlCol="0" anchor="ctr"/>
           <a:lstStyle/>
           <a:p>
-            <a:pPr indent="0" marL="0">
-              <a:buNone/>
-            </a:pPr>
-            <a:r>
-              <a:rPr lang="en-US" sz="7200" b="1" dirty="0">
-                <a:solidFill>
-                  <a:srgbClr val="C8423F"/>
-                </a:solidFill>
-                <a:latin typeface="Cambria" pitchFamily="34" charset="0"/>
-                <a:ea typeface="Cambria" pitchFamily="34" charset="-122"/>
-                <a:cs typeface="Cambria" pitchFamily="34" charset="-120"/>
-              </a:rPr>
-              <a:t>45%</a:t>
-            </a:r>
-            <a:endParaRPr lang="en-US" sz="7200" dirty="0"/>
-          </a:p>
-        </p:txBody>
-      </p:sp>
-      <p:sp>
-        <p:nvSpPr>
-          <p:cNvPr id="6" name="Text 3"/>
-          <p:cNvSpPr txBox="1"/>
-          <p:nvPr/>
-        </p:nvSpPr>
-        <p:spPr>
-          <a:xfrm>
-            <a:off x="7818120" y="2880360"/>
-            <a:ext cx="3840480" cy="822960"/>
-          </a:xfrm>
-          <a:prstGeom prst="rect">
-            <a:avLst/>
-          </a:prstGeom>
-          <a:noFill/>
-          <a:ln/>
-        </p:spPr>
-        <p:txBody>
-          <a:bodyPr wrap="square" lIns="0" tIns="0" rIns="0" bIns="0" rtlCol="0" anchor="t"/>
-          <a:lstStyle/>
-          <a:p>
-            <a:pPr indent="0" marL="0">
-              <a:buNone/>
-            </a:pPr>
-            <a:r>
-              <a:rPr lang="en-US" sz="1800" b="1" dirty="0">
-                <a:solidFill>
-                  <a:srgbClr val="1E2B27"/>
+            <a:pPr algn="r" indent="0" marL="0">
+              <a:buNone/>
+            </a:pPr>
+            <a:r>
+              <a:rPr lang="en-US" sz="1000" dirty="0">
+                <a:solidFill>
+                  <a:srgbClr val="5F6B66"/>
                 </a:solidFill>
                 <a:latin typeface="Calibri" pitchFamily="34" charset="0"/>
                 <a:ea typeface="Calibri" pitchFamily="34" charset="-122"/>
                 <a:cs typeface="Calibri" pitchFamily="34" charset="-120"/>
               </a:rPr>
-              <a:t>dos municípios chegam à meta de 2030 no ritmo atual</a:t>
-            </a:r>
-            <a:endParaRPr lang="en-US" sz="1800" dirty="0"/>
-          </a:p>
-        </p:txBody>
-      </p:sp>
-      <p:sp>
-        <p:nvSpPr>
-          <p:cNvPr id="7" name="Text 4"/>
-          <p:cNvSpPr txBox="1"/>
-          <p:nvPr/>
-        </p:nvSpPr>
-        <p:spPr>
-          <a:xfrm>
-            <a:off x="7818120" y="3931920"/>
-            <a:ext cx="3840480" cy="1920240"/>
-          </a:xfrm>
-          <a:prstGeom prst="rect">
-            <a:avLst/>
-          </a:prstGeom>
-          <a:noFill/>
-          <a:ln/>
-        </p:spPr>
-        <p:txBody>
-          <a:bodyPr wrap="square" lIns="0" tIns="0" rIns="0" bIns="0" rtlCol="0" anchor="t"/>
-          <a:lstStyle/>
-          <a:p>
-            <a:pPr indent="0" marL="0">
-              <a:buNone/>
-            </a:pPr>
-            <a:r>
-              <a:rPr lang="en-US" sz="1500" dirty="0">
-                <a:solidFill>
-                  <a:srgbClr val="5F6B66"/>
-                </a:solidFill>
-                <a:latin typeface="Calibri" pitchFamily="34" charset="0"/>
-                <a:ea typeface="Calibri" pitchFamily="34" charset="-122"/>
-                <a:cs typeface="Calibri" pitchFamily="34" charset="-120"/>
-              </a:rPr>
-              <a:t>O país fecha 2030 em 81,9%, só 1,9 ponto acima da meta de 80%.</a:t>
-            </a:r>
-            <a:endParaRPr lang="en-US" sz="1500" dirty="0"/>
-          </a:p>
-          <a:p>
-            <a:pPr indent="0" marL="0">
-              <a:buNone/>
-            </a:pPr>
-            <a:r>
-              <a:rPr lang="en-US" sz="800" dirty="0">
-                <a:solidFill>
-                  <a:srgbClr val="5F6B66"/>
-                </a:solidFill>
-                <a:latin typeface="Calibri" pitchFamily="34" charset="0"/>
-                <a:ea typeface="Calibri" pitchFamily="34" charset="-122"/>
-                <a:cs typeface="Calibri" pitchFamily="34" charset="-120"/>
-              </a:rPr>
-              <a:t> </a:t>
-            </a:r>
-            <a:endParaRPr lang="en-US" sz="1500" dirty="0"/>
-          </a:p>
-          <a:p>
-            <a:pPr indent="0" marL="0">
-              <a:buNone/>
-            </a:pPr>
-            <a:r>
-              <a:rPr lang="en-US" sz="1500" dirty="0">
-                <a:solidFill>
-                  <a:srgbClr val="5F6B66"/>
-                </a:solidFill>
-                <a:latin typeface="Calibri" pitchFamily="34" charset="0"/>
-                <a:ea typeface="Calibri" pitchFamily="34" charset="-122"/>
-                <a:cs typeface="Calibri" pitchFamily="34" charset="-120"/>
-              </a:rPr>
-              <a:t>Qualquer desaceleração do ritmo atual coloca a meta nacional em risco.</a:t>
-            </a:r>
-            <a:endParaRPr lang="en-US" sz="1500" dirty="0"/>
-          </a:p>
-        </p:txBody>
-      </p:sp>
-      <p:sp>
-        <p:nvSpPr>
-          <p:cNvPr id="8" name="Text 5"/>
-          <p:cNvSpPr txBox="1"/>
-          <p:nvPr/>
-        </p:nvSpPr>
-        <p:spPr>
-          <a:xfrm>
-            <a:off x="10545775" y="6400800"/>
-            <a:ext cx="1097280" cy="274320"/>
-          </a:xfrm>
-          <a:prstGeom prst="rect">
-            <a:avLst/>
-          </a:prstGeom>
-          <a:noFill/>
-          <a:ln/>
-        </p:spPr>
-        <p:txBody>
-          <a:bodyPr wrap="square" lIns="0" tIns="0" rIns="0" bIns="0" rtlCol="0" anchor="ctr"/>
-          <a:lstStyle/>
-          <a:p>
-            <a:pPr algn="r" indent="0" marL="0">
-              <a:buNone/>
-            </a:pPr>
-            <a:r>
-              <a:rPr lang="en-US" sz="1000" dirty="0">
-                <a:solidFill>
-                  <a:srgbClr val="5F6B66"/>
-                </a:solidFill>
-                <a:latin typeface="Calibri" pitchFamily="34" charset="0"/>
-                <a:ea typeface="Calibri" pitchFamily="34" charset="-122"/>
-                <a:cs typeface="Calibri" pitchFamily="34" charset="-120"/>
-              </a:rPr>
-              <a:t>6 / 8</a:t>
+              <a:t>6 / 10</a:t>
             </a:r>
             <a:endParaRPr lang="en-US" sz="1000" dirty="0"/>
           </a:p>
@@ -5448,7 +7667,7 @@
                 <a:ea typeface="Cambria" pitchFamily="34" charset="-122"/>
                 <a:cs typeface="Cambria" pitchFamily="34" charset="-120"/>
               </a:rPr>
-              <a:t>Como isso vira decisão de gestão</a:t>
+              <a:t>Dinheiro não explica alfabetização</a:t>
             </a:r>
             <a:endParaRPr lang="en-US" sz="3200" dirty="0"/>
           </a:p>
@@ -5456,18 +7675,73 @@
       </p:sp>
       <p:sp>
         <p:nvSpPr>
-          <p:cNvPr id="3" name="Shape 1"/>
+          <p:cNvPr id="3" name="Text 1"/>
+          <p:cNvSpPr txBox="1"/>
+          <p:nvPr/>
+        </p:nvSpPr>
+        <p:spPr>
+          <a:xfrm>
+            <a:off x="548640" y="1508760"/>
+            <a:ext cx="5760720" cy="365760"/>
+          </a:xfrm>
+          <a:prstGeom prst="rect">
+            <a:avLst/>
+          </a:prstGeom>
+          <a:noFill/>
+          <a:ln/>
+        </p:spPr>
+        <p:txBody>
+          <a:bodyPr wrap="square" lIns="0" tIns="0" rIns="0" bIns="0" rtlCol="0" anchor="ctr"/>
+          <a:lstStyle/>
+          <a:p>
+            <a:pPr indent="0" marL="0">
+              <a:buNone/>
+            </a:pPr>
+            <a:r>
+              <a:rPr lang="en-US" sz="1400" b="1" dirty="0">
+                <a:solidFill>
+                  <a:srgbClr val="5F6B66"/>
+                </a:solidFill>
+                <a:latin typeface="Calibri" pitchFamily="34" charset="0"/>
+                <a:ea typeface="Calibri" pitchFamily="34" charset="-122"/>
+                <a:cs typeface="Calibri" pitchFamily="34" charset="-120"/>
+              </a:rPr>
+              <a:t>Crianças alfabetizadas em 2024, por perfil de município (%)</a:t>
+            </a:r>
+            <a:endParaRPr lang="en-US" sz="1400" dirty="0"/>
+          </a:p>
+        </p:txBody>
+      </p:sp>
+      <p:graphicFrame>
+        <p:nvGraphicFramePr>
+          <p:cNvPr id="4" name="Chart 0" descr=""/>
+          <p:cNvGraphicFramePr/>
+          <p:nvPr/>
+        </p:nvGraphicFramePr>
+        <p:xfrm>
+          <a:off x="548640" y="1874520"/>
+          <a:ext cx="5760720" cy="4114800"/>
+        </p:xfrm>
+        <a:graphic xmlns:a="http://schemas.openxmlformats.org/drawingml/2006/main">
+          <a:graphicData uri="http://schemas.openxmlformats.org/drawingml/2006/chart">
+            <c:chart xmlns:c="http://schemas.openxmlformats.org/drawingml/2006/chart" r:id="rId1"/>
+          </a:graphicData>
+        </a:graphic>
+      </p:graphicFrame>
+      <p:sp>
+        <p:nvSpPr>
+          <p:cNvPr id="5" name="Shape 2"/>
           <p:cNvSpPr/>
           <p:nvPr/>
         </p:nvSpPr>
         <p:spPr>
           <a:xfrm>
-            <a:off x="548640" y="1645920"/>
-            <a:ext cx="3511296" cy="3977640"/>
+            <a:off x="6720840" y="1600200"/>
+            <a:ext cx="4919472" cy="1965960"/>
           </a:xfrm>
           <a:prstGeom prst="roundRect">
             <a:avLst>
-              <a:gd name="adj" fmla="val 2604"/>
+              <a:gd name="adj" fmla="val 4651"/>
             </a:avLst>
           </a:prstGeom>
           <a:solidFill>
@@ -5483,39 +7757,14 @@
       </p:sp>
       <p:sp>
         <p:nvSpPr>
-          <p:cNvPr id="4" name="Shape 2"/>
-          <p:cNvSpPr/>
-          <p:nvPr/>
-        </p:nvSpPr>
-        <p:spPr>
-          <a:xfrm>
-            <a:off x="868680" y="1965960"/>
-            <a:ext cx="566928" cy="566928"/>
-          </a:xfrm>
-          <a:prstGeom prst="ellipse">
-            <a:avLst/>
-          </a:prstGeom>
-          <a:solidFill>
-            <a:srgbClr val="F2B705"/>
-          </a:solidFill>
-          <a:ln w="12700">
-            <a:solidFill>
-              <a:srgbClr val="F2B705"/>
-            </a:solidFill>
-            <a:prstDash val="solid"/>
-          </a:ln>
-        </p:spPr>
-      </p:sp>
-      <p:sp>
-        <p:nvSpPr>
-          <p:cNvPr id="5" name="Text 3"/>
-          <p:cNvSpPr txBox="1"/>
-          <p:nvPr/>
-        </p:nvSpPr>
-        <p:spPr>
-          <a:xfrm>
-            <a:off x="868680" y="1965960"/>
-            <a:ext cx="566928" cy="566928"/>
+          <p:cNvPr id="6" name="Text 3"/>
+          <p:cNvSpPr txBox="1"/>
+          <p:nvPr/>
+        </p:nvSpPr>
+        <p:spPr>
+          <a:xfrm>
+            <a:off x="7040880" y="1801368"/>
+            <a:ext cx="4297680" cy="365760"/>
           </a:xfrm>
           <a:prstGeom prst="rect">
             <a:avLst/>
@@ -5527,34 +7776,73 @@
           <a:bodyPr wrap="square" lIns="0" tIns="0" rIns="0" bIns="0" rtlCol="0" anchor="ctr"/>
           <a:lstStyle/>
           <a:p>
-            <a:pPr algn="ctr" indent="0" marL="0">
-              <a:buNone/>
-            </a:pPr>
-            <a:r>
-              <a:rPr lang="en-US" sz="1700" b="1" dirty="0">
+            <a:pPr indent="0" marL="0">
+              <a:buNone/>
+            </a:pPr>
+            <a:r>
+              <a:rPr lang="en-US" sz="1800" b="1" dirty="0">
                 <a:solidFill>
                   <a:srgbClr val="1F3A32"/>
+                </a:solidFill>
+                <a:latin typeface="Cambria" pitchFamily="34" charset="0"/>
+                <a:ea typeface="Cambria" pitchFamily="34" charset="-122"/>
+                <a:cs typeface="Cambria" pitchFamily="34" charset="-120"/>
+              </a:rPr>
+              <a:t>Interior de alto desempenho</a:t>
+            </a:r>
+            <a:endParaRPr lang="en-US" sz="1800" dirty="0"/>
+          </a:p>
+        </p:txBody>
+      </p:sp>
+      <p:sp>
+        <p:nvSpPr>
+          <p:cNvPr id="7" name="Text 4"/>
+          <p:cNvSpPr txBox="1"/>
+          <p:nvPr/>
+        </p:nvSpPr>
+        <p:spPr>
+          <a:xfrm>
+            <a:off x="7040880" y="2194560"/>
+            <a:ext cx="2377440" cy="1188720"/>
+          </a:xfrm>
+          <a:prstGeom prst="rect">
+            <a:avLst/>
+          </a:prstGeom>
+          <a:noFill/>
+          <a:ln/>
+        </p:spPr>
+        <p:txBody>
+          <a:bodyPr wrap="square" lIns="0" tIns="0" rIns="0" bIns="0" rtlCol="0" anchor="t"/>
+          <a:lstStyle/>
+          <a:p>
+            <a:pPr indent="0" marL="0">
+              <a:buNone/>
+            </a:pPr>
+            <a:r>
+              <a:rPr lang="en-US" sz="1400" dirty="0">
+                <a:solidFill>
+                  <a:srgbClr val="1E2B27"/>
                 </a:solidFill>
                 <a:latin typeface="Calibri" pitchFamily="34" charset="0"/>
                 <a:ea typeface="Calibri" pitchFamily="34" charset="-122"/>
                 <a:cs typeface="Calibri" pitchFamily="34" charset="-120"/>
               </a:rPr>
-              <a:t>01</a:t>
-            </a:r>
-            <a:endParaRPr lang="en-US" sz="1700" dirty="0"/>
-          </a:p>
-        </p:txBody>
-      </p:sp>
-      <p:sp>
-        <p:nvSpPr>
-          <p:cNvPr id="6" name="Text 4"/>
-          <p:cNvSpPr txBox="1"/>
-          <p:nvPr/>
-        </p:nvSpPr>
-        <p:spPr>
-          <a:xfrm>
-            <a:off x="1600200" y="1965960"/>
-            <a:ext cx="2231136" cy="566928"/>
+              <a:t>PIB per capita de R$ 20 mil, maioria no Nordeste</a:t>
+            </a:r>
+            <a:endParaRPr lang="en-US" sz="1400" dirty="0"/>
+          </a:p>
+        </p:txBody>
+      </p:sp>
+      <p:sp>
+        <p:nvSpPr>
+          <p:cNvPr id="8" name="Text 5"/>
+          <p:cNvSpPr txBox="1"/>
+          <p:nvPr/>
+        </p:nvSpPr>
+        <p:spPr>
+          <a:xfrm>
+            <a:off x="9418320" y="2103120"/>
+            <a:ext cx="2011680" cy="868680"/>
           </a:xfrm>
           <a:prstGeom prst="rect">
             <a:avLst/>
@@ -5566,34 +7854,34 @@
           <a:bodyPr wrap="square" lIns="0" tIns="0" rIns="0" bIns="0" rtlCol="0" anchor="ctr"/>
           <a:lstStyle/>
           <a:p>
-            <a:pPr indent="0" marL="0">
-              <a:buNone/>
-            </a:pPr>
-            <a:r>
-              <a:rPr lang="en-US" sz="2100" b="1" dirty="0">
-                <a:solidFill>
-                  <a:srgbClr val="1F3A32"/>
+            <a:pPr algn="r" indent="0" marL="0">
+              <a:buNone/>
+            </a:pPr>
+            <a:r>
+              <a:rPr lang="en-US" sz="4400" b="1" dirty="0">
+                <a:solidFill>
+                  <a:srgbClr val="3E7A62"/>
                 </a:solidFill>
                 <a:latin typeface="Cambria" pitchFamily="34" charset="0"/>
                 <a:ea typeface="Cambria" pitchFamily="34" charset="-122"/>
                 <a:cs typeface="Cambria" pitchFamily="34" charset="-120"/>
               </a:rPr>
-              <a:t>Priorizar</a:t>
-            </a:r>
-            <a:endParaRPr lang="en-US" sz="2100" dirty="0"/>
-          </a:p>
-        </p:txBody>
-      </p:sp>
-      <p:sp>
-        <p:nvSpPr>
-          <p:cNvPr id="7" name="Text 5"/>
-          <p:cNvSpPr txBox="1"/>
-          <p:nvPr/>
-        </p:nvSpPr>
-        <p:spPr>
-          <a:xfrm>
-            <a:off x="868680" y="2834640"/>
-            <a:ext cx="2871216" cy="1097280"/>
+              <a:t>79%</a:t>
+            </a:r>
+            <a:endParaRPr lang="en-US" sz="4400" dirty="0"/>
+          </a:p>
+        </p:txBody>
+      </p:sp>
+      <p:sp>
+        <p:nvSpPr>
+          <p:cNvPr id="9" name="Text 6"/>
+          <p:cNvSpPr txBox="1"/>
+          <p:nvPr/>
+        </p:nvSpPr>
+        <p:spPr>
+          <a:xfrm>
+            <a:off x="9144000" y="2953512"/>
+            <a:ext cx="2286000" cy="457200"/>
           </a:xfrm>
           <a:prstGeom prst="rect">
             <a:avLst/>
@@ -5605,77 +7893,38 @@
           <a:bodyPr wrap="square" lIns="0" tIns="0" rIns="0" bIns="0" rtlCol="0" anchor="ctr"/>
           <a:lstStyle/>
           <a:p>
-            <a:pPr indent="0" marL="0">
-              <a:buNone/>
-            </a:pPr>
-            <a:r>
-              <a:rPr lang="en-US" sz="5600" b="1" dirty="0">
-                <a:solidFill>
-                  <a:srgbClr val="3E7A62"/>
-                </a:solidFill>
-                <a:latin typeface="Cambria" pitchFamily="34" charset="0"/>
-                <a:ea typeface="Cambria" pitchFamily="34" charset="-122"/>
-                <a:cs typeface="Cambria" pitchFamily="34" charset="-120"/>
-              </a:rPr>
-              <a:t>3.121</a:t>
-            </a:r>
-            <a:endParaRPr lang="en-US" sz="5600" dirty="0"/>
-          </a:p>
-        </p:txBody>
-      </p:sp>
-      <p:sp>
-        <p:nvSpPr>
-          <p:cNvPr id="8" name="Text 6"/>
-          <p:cNvSpPr txBox="1"/>
-          <p:nvPr/>
-        </p:nvSpPr>
-        <p:spPr>
-          <a:xfrm>
-            <a:off x="868680" y="4023360"/>
-            <a:ext cx="2871216" cy="1737360"/>
-          </a:xfrm>
-          <a:prstGeom prst="rect">
-            <a:avLst/>
-          </a:prstGeom>
-          <a:noFill/>
-          <a:ln/>
-        </p:spPr>
-        <p:txBody>
-          <a:bodyPr wrap="square" lIns="0" tIns="0" rIns="0" bIns="0" rtlCol="0" anchor="t"/>
-          <a:lstStyle/>
-          <a:p>
-            <a:pPr indent="0" marL="0">
-              <a:buNone/>
-            </a:pPr>
-            <a:r>
-              <a:rPr lang="en-US" sz="1500" dirty="0">
-                <a:solidFill>
-                  <a:srgbClr val="1E2B27"/>
+            <a:pPr algn="r" indent="0" marL="0">
+              <a:buNone/>
+            </a:pPr>
+            <a:r>
+              <a:rPr lang="en-US" sz="1200" dirty="0">
+                <a:solidFill>
+                  <a:srgbClr val="5F6B66"/>
                 </a:solidFill>
                 <a:latin typeface="Calibri" pitchFamily="34" charset="0"/>
                 <a:ea typeface="Calibri" pitchFamily="34" charset="-122"/>
                 <a:cs typeface="Calibri" pitchFamily="34" charset="-120"/>
               </a:rPr>
-              <a:t>municípios abaixo do patamar nacional, 1.411 em risco crítico — cada um com a explicação do porquê.</a:t>
-            </a:r>
-            <a:endParaRPr lang="en-US" sz="1500" dirty="0"/>
-          </a:p>
-        </p:txBody>
-      </p:sp>
-      <p:sp>
-        <p:nvSpPr>
-          <p:cNvPr id="9" name="Shape 7"/>
+              <a:t>das crianças alfabetizadas</a:t>
+            </a:r>
+            <a:endParaRPr lang="en-US" sz="1200" dirty="0"/>
+          </a:p>
+        </p:txBody>
+      </p:sp>
+      <p:sp>
+        <p:nvSpPr>
+          <p:cNvPr id="10" name="Shape 7"/>
           <p:cNvSpPr/>
           <p:nvPr/>
         </p:nvSpPr>
         <p:spPr>
           <a:xfrm>
-            <a:off x="4334256" y="1645920"/>
-            <a:ext cx="3511296" cy="3977640"/>
+            <a:off x="6720840" y="3749040"/>
+            <a:ext cx="4919472" cy="1965960"/>
           </a:xfrm>
           <a:prstGeom prst="roundRect">
             <a:avLst>
-              <a:gd name="adj" fmla="val 2604"/>
+              <a:gd name="adj" fmla="val 4651"/>
             </a:avLst>
           </a:prstGeom>
           <a:solidFill>
@@ -5691,39 +7940,14 @@
       </p:sp>
       <p:sp>
         <p:nvSpPr>
-          <p:cNvPr id="10" name="Shape 8"/>
-          <p:cNvSpPr/>
-          <p:nvPr/>
-        </p:nvSpPr>
-        <p:spPr>
-          <a:xfrm>
-            <a:off x="4654296" y="1965960"/>
-            <a:ext cx="566928" cy="566928"/>
-          </a:xfrm>
-          <a:prstGeom prst="ellipse">
-            <a:avLst/>
-          </a:prstGeom>
-          <a:solidFill>
-            <a:srgbClr val="F2B705"/>
-          </a:solidFill>
-          <a:ln w="12700">
-            <a:solidFill>
-              <a:srgbClr val="F2B705"/>
-            </a:solidFill>
-            <a:prstDash val="solid"/>
-          </a:ln>
-        </p:spPr>
-      </p:sp>
-      <p:sp>
-        <p:nvSpPr>
-          <p:cNvPr id="11" name="Text 9"/>
-          <p:cNvSpPr txBox="1"/>
-          <p:nvPr/>
-        </p:nvSpPr>
-        <p:spPr>
-          <a:xfrm>
-            <a:off x="4654296" y="1965960"/>
-            <a:ext cx="566928" cy="566928"/>
+          <p:cNvPr id="11" name="Text 8"/>
+          <p:cNvSpPr txBox="1"/>
+          <p:nvPr/>
+        </p:nvSpPr>
+        <p:spPr>
+          <a:xfrm>
+            <a:off x="7040880" y="3950208"/>
+            <a:ext cx="4297680" cy="365760"/>
           </a:xfrm>
           <a:prstGeom prst="rect">
             <a:avLst/>
@@ -5735,34 +7959,73 @@
           <a:bodyPr wrap="square" lIns="0" tIns="0" rIns="0" bIns="0" rtlCol="0" anchor="ctr"/>
           <a:lstStyle/>
           <a:p>
-            <a:pPr algn="ctr" indent="0" marL="0">
-              <a:buNone/>
-            </a:pPr>
-            <a:r>
-              <a:rPr lang="en-US" sz="1700" b="1" dirty="0">
+            <a:pPr indent="0" marL="0">
+              <a:buNone/>
+            </a:pPr>
+            <a:r>
+              <a:rPr lang="en-US" sz="1800" b="1" dirty="0">
                 <a:solidFill>
                   <a:srgbClr val="1F3A32"/>
+                </a:solidFill>
+                <a:latin typeface="Cambria" pitchFamily="34" charset="0"/>
+                <a:ea typeface="Cambria" pitchFamily="34" charset="-122"/>
+                <a:cs typeface="Cambria" pitchFamily="34" charset="-120"/>
+              </a:rPr>
+              <a:t>121 centros urbanos</a:t>
+            </a:r>
+            <a:endParaRPr lang="en-US" sz="1800" dirty="0"/>
+          </a:p>
+        </p:txBody>
+      </p:sp>
+      <p:sp>
+        <p:nvSpPr>
+          <p:cNvPr id="12" name="Text 9"/>
+          <p:cNvSpPr txBox="1"/>
+          <p:nvPr/>
+        </p:nvSpPr>
+        <p:spPr>
+          <a:xfrm>
+            <a:off x="7040880" y="4343400"/>
+            <a:ext cx="2377440" cy="1188720"/>
+          </a:xfrm>
+          <a:prstGeom prst="rect">
+            <a:avLst/>
+          </a:prstGeom>
+          <a:noFill/>
+          <a:ln/>
+        </p:spPr>
+        <p:txBody>
+          <a:bodyPr wrap="square" lIns="0" tIns="0" rIns="0" bIns="0" rtlCol="0" anchor="t"/>
+          <a:lstStyle/>
+          <a:p>
+            <a:pPr indent="0" marL="0">
+              <a:buNone/>
+            </a:pPr>
+            <a:r>
+              <a:rPr lang="en-US" sz="1400" dirty="0">
+                <a:solidFill>
+                  <a:srgbClr val="1E2B27"/>
                 </a:solidFill>
                 <a:latin typeface="Calibri" pitchFamily="34" charset="0"/>
                 <a:ea typeface="Calibri" pitchFamily="34" charset="-122"/>
                 <a:cs typeface="Calibri" pitchFamily="34" charset="-120"/>
               </a:rPr>
-              <a:t>02</a:t>
-            </a:r>
-            <a:endParaRPr lang="en-US" sz="1700" dirty="0"/>
-          </a:p>
-        </p:txBody>
-      </p:sp>
-      <p:sp>
-        <p:nvSpPr>
-          <p:cNvPr id="12" name="Text 10"/>
-          <p:cNvSpPr txBox="1"/>
-          <p:nvPr/>
-        </p:nvSpPr>
-        <p:spPr>
-          <a:xfrm>
-            <a:off x="5385816" y="1965960"/>
-            <a:ext cx="2231136" cy="566928"/>
+              <a:t>PIB de R$ 38 mil e 96% dos adultos alfabetizados</a:t>
+            </a:r>
+            <a:endParaRPr lang="en-US" sz="1400" dirty="0"/>
+          </a:p>
+        </p:txBody>
+      </p:sp>
+      <p:sp>
+        <p:nvSpPr>
+          <p:cNvPr id="13" name="Text 10"/>
+          <p:cNvSpPr txBox="1"/>
+          <p:nvPr/>
+        </p:nvSpPr>
+        <p:spPr>
+          <a:xfrm>
+            <a:off x="9418320" y="4251960"/>
+            <a:ext cx="2011680" cy="868680"/>
           </a:xfrm>
           <a:prstGeom prst="rect">
             <a:avLst/>
@@ -5774,34 +8037,34 @@
           <a:bodyPr wrap="square" lIns="0" tIns="0" rIns="0" bIns="0" rtlCol="0" anchor="ctr"/>
           <a:lstStyle/>
           <a:p>
-            <a:pPr indent="0" marL="0">
-              <a:buNone/>
-            </a:pPr>
-            <a:r>
-              <a:rPr lang="en-US" sz="2100" b="1" dirty="0">
-                <a:solidFill>
-                  <a:srgbClr val="1F3A32"/>
+            <a:pPr algn="r" indent="0" marL="0">
+              <a:buNone/>
+            </a:pPr>
+            <a:r>
+              <a:rPr lang="en-US" sz="4400" b="1" dirty="0">
+                <a:solidFill>
+                  <a:srgbClr val="C8423F"/>
                 </a:solidFill>
                 <a:latin typeface="Cambria" pitchFamily="34" charset="0"/>
                 <a:ea typeface="Cambria" pitchFamily="34" charset="-122"/>
                 <a:cs typeface="Cambria" pitchFamily="34" charset="-120"/>
               </a:rPr>
-              <a:t>Personalizar</a:t>
-            </a:r>
-            <a:endParaRPr lang="en-US" sz="2100" dirty="0"/>
-          </a:p>
-        </p:txBody>
-      </p:sp>
-      <p:sp>
-        <p:nvSpPr>
-          <p:cNvPr id="13" name="Text 11"/>
-          <p:cNvSpPr txBox="1"/>
-          <p:nvPr/>
-        </p:nvSpPr>
-        <p:spPr>
-          <a:xfrm>
-            <a:off x="4654296" y="2834640"/>
-            <a:ext cx="2871216" cy="1097280"/>
+              <a:t>53%</a:t>
+            </a:r>
+            <a:endParaRPr lang="en-US" sz="4400" dirty="0"/>
+          </a:p>
+        </p:txBody>
+      </p:sp>
+      <p:sp>
+        <p:nvSpPr>
+          <p:cNvPr id="14" name="Text 11"/>
+          <p:cNvSpPr txBox="1"/>
+          <p:nvPr/>
+        </p:nvSpPr>
+        <p:spPr>
+          <a:xfrm>
+            <a:off x="9144000" y="5102352"/>
+            <a:ext cx="2286000" cy="457200"/>
           </a:xfrm>
           <a:prstGeom prst="rect">
             <a:avLst/>
@@ -5813,125 +8076,34 @@
           <a:bodyPr wrap="square" lIns="0" tIns="0" rIns="0" bIns="0" rtlCol="0" anchor="ctr"/>
           <a:lstStyle/>
           <a:p>
-            <a:pPr indent="0" marL="0">
-              <a:buNone/>
-            </a:pPr>
-            <a:r>
-              <a:rPr lang="en-US" sz="5600" b="1" dirty="0">
-                <a:solidFill>
-                  <a:srgbClr val="3E7A62"/>
-                </a:solidFill>
-                <a:latin typeface="Cambria" pitchFamily="34" charset="0"/>
-                <a:ea typeface="Cambria" pitchFamily="34" charset="-122"/>
-                <a:cs typeface="Cambria" pitchFamily="34" charset="-120"/>
-              </a:rPr>
-              <a:t>4</a:t>
-            </a:r>
-            <a:endParaRPr lang="en-US" sz="5600" dirty="0"/>
-          </a:p>
-        </p:txBody>
-      </p:sp>
-      <p:sp>
-        <p:nvSpPr>
-          <p:cNvPr id="14" name="Text 12"/>
-          <p:cNvSpPr txBox="1"/>
-          <p:nvPr/>
-        </p:nvSpPr>
-        <p:spPr>
-          <a:xfrm>
-            <a:off x="4654296" y="4023360"/>
-            <a:ext cx="2871216" cy="1737360"/>
-          </a:xfrm>
-          <a:prstGeom prst="rect">
-            <a:avLst/>
-          </a:prstGeom>
-          <a:noFill/>
-          <a:ln/>
-        </p:spPr>
-        <p:txBody>
-          <a:bodyPr wrap="square" lIns="0" tIns="0" rIns="0" bIns="0" rtlCol="0" anchor="t"/>
-          <a:lstStyle/>
-          <a:p>
-            <a:pPr indent="0" marL="0">
-              <a:buNone/>
-            </a:pPr>
-            <a:r>
-              <a:rPr lang="en-US" sz="1500" dirty="0">
-                <a:solidFill>
-                  <a:srgbClr val="1E2B27"/>
+            <a:pPr algn="r" indent="0" marL="0">
+              <a:buNone/>
+            </a:pPr>
+            <a:r>
+              <a:rPr lang="en-US" sz="1200" dirty="0">
+                <a:solidFill>
+                  <a:srgbClr val="5F6B66"/>
                 </a:solidFill>
                 <a:latin typeface="Calibri" pitchFamily="34" charset="0"/>
                 <a:ea typeface="Calibri" pitchFamily="34" charset="-122"/>
                 <a:cs typeface="Calibri" pitchFamily="34" charset="-120"/>
               </a:rPr>
-              <a:t>perfis de município, cada um respondendo melhor a uma intervenção diferente. Mesmo programa para todos desperdiça orçamento.</a:t>
-            </a:r>
-            <a:endParaRPr lang="en-US" sz="1500" dirty="0"/>
-          </a:p>
-        </p:txBody>
-      </p:sp>
-      <p:sp>
-        <p:nvSpPr>
-          <p:cNvPr id="15" name="Shape 13"/>
-          <p:cNvSpPr/>
-          <p:nvPr/>
-        </p:nvSpPr>
-        <p:spPr>
-          <a:xfrm>
-            <a:off x="8119872" y="1645920"/>
-            <a:ext cx="3511296" cy="3977640"/>
-          </a:xfrm>
-          <a:prstGeom prst="roundRect">
-            <a:avLst>
-              <a:gd name="adj" fmla="val 2604"/>
-            </a:avLst>
-          </a:prstGeom>
-          <a:solidFill>
-            <a:srgbClr val="E9F0ED"/>
-          </a:solidFill>
-          <a:ln w="12700">
-            <a:solidFill>
-              <a:srgbClr val="E9F0ED"/>
-            </a:solidFill>
-            <a:prstDash val="solid"/>
-          </a:ln>
-        </p:spPr>
-      </p:sp>
-      <p:sp>
-        <p:nvSpPr>
-          <p:cNvPr id="16" name="Shape 14"/>
-          <p:cNvSpPr/>
-          <p:nvPr/>
-        </p:nvSpPr>
-        <p:spPr>
-          <a:xfrm>
-            <a:off x="8439912" y="1965960"/>
-            <a:ext cx="566928" cy="566928"/>
-          </a:xfrm>
-          <a:prstGeom prst="ellipse">
-            <a:avLst/>
-          </a:prstGeom>
-          <a:solidFill>
-            <a:srgbClr val="F2B705"/>
-          </a:solidFill>
-          <a:ln w="12700">
-            <a:solidFill>
-              <a:srgbClr val="F2B705"/>
-            </a:solidFill>
-            <a:prstDash val="solid"/>
-          </a:ln>
-        </p:spPr>
-      </p:sp>
-      <p:sp>
-        <p:nvSpPr>
-          <p:cNvPr id="17" name="Text 15"/>
-          <p:cNvSpPr txBox="1"/>
-          <p:nvPr/>
-        </p:nvSpPr>
-        <p:spPr>
-          <a:xfrm>
-            <a:off x="8439912" y="1965960"/>
-            <a:ext cx="566928" cy="566928"/>
+              <a:t>das crianças alfabetizadas</a:t>
+            </a:r>
+            <a:endParaRPr lang="en-US" sz="1200" dirty="0"/>
+          </a:p>
+        </p:txBody>
+      </p:sp>
+      <p:sp>
+        <p:nvSpPr>
+          <p:cNvPr id="15" name="Text 12"/>
+          <p:cNvSpPr txBox="1"/>
+          <p:nvPr/>
+        </p:nvSpPr>
+        <p:spPr>
+          <a:xfrm>
+            <a:off x="6720840" y="5806440"/>
+            <a:ext cx="4919472" cy="365760"/>
           </a:xfrm>
           <a:prstGeom prst="rect">
             <a:avLst/>
@@ -5943,11 +8115,11 @@
           <a:bodyPr wrap="square" lIns="0" tIns="0" rIns="0" bIns="0" rtlCol="0" anchor="ctr"/>
           <a:lstStyle/>
           <a:p>
-            <a:pPr algn="ctr" indent="0" marL="0">
-              <a:buNone/>
-            </a:pPr>
-            <a:r>
-              <a:rPr lang="en-US" sz="1700" b="1" dirty="0">
+            <a:pPr indent="0" marL="0">
+              <a:buNone/>
+            </a:pPr>
+            <a:r>
+              <a:rPr lang="en-US" sz="1500" b="1" i="1" dirty="0">
                 <a:solidFill>
                   <a:srgbClr val="1F3A32"/>
                 </a:solidFill>
@@ -5955,22 +8127,22 @@
                 <a:ea typeface="Calibri" pitchFamily="34" charset="-122"/>
                 <a:cs typeface="Calibri" pitchFamily="34" charset="-120"/>
               </a:rPr>
-              <a:t>03</a:t>
-            </a:r>
-            <a:endParaRPr lang="en-US" sz="1700" dirty="0"/>
-          </a:p>
-        </p:txBody>
-      </p:sp>
-      <p:sp>
-        <p:nvSpPr>
-          <p:cNvPr id="18" name="Text 16"/>
-          <p:cNvSpPr txBox="1"/>
-          <p:nvPr/>
-        </p:nvSpPr>
-        <p:spPr>
-          <a:xfrm>
-            <a:off x="9171432" y="1965960"/>
-            <a:ext cx="2231136" cy="566928"/>
+              <a:t>Nas grandes cidades, o gargalo é a rede, não o contexto.</a:t>
+            </a:r>
+            <a:endParaRPr lang="en-US" sz="1500" dirty="0"/>
+          </a:p>
+        </p:txBody>
+      </p:sp>
+      <p:sp>
+        <p:nvSpPr>
+          <p:cNvPr id="16" name="Text 13"/>
+          <p:cNvSpPr txBox="1"/>
+          <p:nvPr/>
+        </p:nvSpPr>
+        <p:spPr>
+          <a:xfrm>
+            <a:off x="10545775" y="6400800"/>
+            <a:ext cx="1097280" cy="274320"/>
           </a:xfrm>
           <a:prstGeom prst="rect">
             <a:avLst/>
@@ -5982,136 +8154,19 @@
           <a:bodyPr wrap="square" lIns="0" tIns="0" rIns="0" bIns="0" rtlCol="0" anchor="ctr"/>
           <a:lstStyle/>
           <a:p>
-            <a:pPr indent="0" marL="0">
-              <a:buNone/>
-            </a:pPr>
-            <a:r>
-              <a:rPr lang="en-US" sz="2100" b="1" dirty="0">
-                <a:solidFill>
-                  <a:srgbClr val="1F3A32"/>
-                </a:solidFill>
-                <a:latin typeface="Cambria" pitchFamily="34" charset="0"/>
-                <a:ea typeface="Cambria" pitchFamily="34" charset="-122"/>
-                <a:cs typeface="Cambria" pitchFamily="34" charset="-120"/>
-              </a:rPr>
-              <a:t>Alocar verba</a:t>
-            </a:r>
-            <a:endParaRPr lang="en-US" sz="2100" dirty="0"/>
-          </a:p>
-        </p:txBody>
-      </p:sp>
-      <p:sp>
-        <p:nvSpPr>
-          <p:cNvPr id="19" name="Text 17"/>
-          <p:cNvSpPr txBox="1"/>
-          <p:nvPr/>
-        </p:nvSpPr>
-        <p:spPr>
-          <a:xfrm>
-            <a:off x="8439912" y="2834640"/>
-            <a:ext cx="2871216" cy="1097280"/>
-          </a:xfrm>
-          <a:prstGeom prst="rect">
-            <a:avLst/>
-          </a:prstGeom>
-          <a:noFill/>
-          <a:ln/>
-        </p:spPr>
-        <p:txBody>
-          <a:bodyPr wrap="square" lIns="0" tIns="0" rIns="0" bIns="0" rtlCol="0" anchor="ctr"/>
-          <a:lstStyle/>
-          <a:p>
-            <a:pPr indent="0" marL="0">
-              <a:buNone/>
-            </a:pPr>
-            <a:r>
-              <a:rPr lang="en-US" sz="5600" b="1" dirty="0">
-                <a:solidFill>
-                  <a:srgbClr val="3E7A62"/>
-                </a:solidFill>
-                <a:latin typeface="Cambria" pitchFamily="34" charset="0"/>
-                <a:ea typeface="Cambria" pitchFamily="34" charset="-122"/>
-                <a:cs typeface="Cambria" pitchFamily="34" charset="-120"/>
-              </a:rPr>
-              <a:t>42%</a:t>
-            </a:r>
-            <a:endParaRPr lang="en-US" sz="5600" dirty="0"/>
-          </a:p>
-        </p:txBody>
-      </p:sp>
-      <p:sp>
-        <p:nvSpPr>
-          <p:cNvPr id="20" name="Text 18"/>
-          <p:cNvSpPr txBox="1"/>
-          <p:nvPr/>
-        </p:nvSpPr>
-        <p:spPr>
-          <a:xfrm>
-            <a:off x="8439912" y="4023360"/>
-            <a:ext cx="2871216" cy="1737360"/>
-          </a:xfrm>
-          <a:prstGeom prst="rect">
-            <a:avLst/>
-          </a:prstGeom>
-          <a:noFill/>
-          <a:ln/>
-        </p:spPr>
-        <p:txBody>
-          <a:bodyPr wrap="square" lIns="0" tIns="0" rIns="0" bIns="0" rtlCol="0" anchor="t"/>
-          <a:lstStyle/>
-          <a:p>
-            <a:pPr indent="0" marL="0">
-              <a:buNone/>
-            </a:pPr>
-            <a:r>
-              <a:rPr lang="en-US" sz="1500" dirty="0">
-                <a:solidFill>
-                  <a:srgbClr val="1E2B27"/>
+            <a:pPr algn="r" indent="0" marL="0">
+              <a:buNone/>
+            </a:pPr>
+            <a:r>
+              <a:rPr lang="en-US" sz="1000" dirty="0">
+                <a:solidFill>
+                  <a:srgbClr val="5F6B66"/>
                 </a:solidFill>
                 <a:latin typeface="Calibri" pitchFamily="34" charset="0"/>
                 <a:ea typeface="Calibri" pitchFamily="34" charset="-122"/>
                 <a:cs typeface="Calibri" pitchFamily="34" charset="-120"/>
               </a:rPr>
-              <a:t>é a taxa média dos 1.200 municípios que o orçamento simulado alcança, contra 63% no país.</a:t>
-            </a:r>
-            <a:endParaRPr lang="en-US" sz="1500" dirty="0"/>
-          </a:p>
-        </p:txBody>
-      </p:sp>
-      <p:sp>
-        <p:nvSpPr>
-          <p:cNvPr id="21" name="Text 19"/>
-          <p:cNvSpPr txBox="1"/>
-          <p:nvPr/>
-        </p:nvSpPr>
-        <p:spPr>
-          <a:xfrm>
-            <a:off x="10545775" y="6400800"/>
-            <a:ext cx="1097280" cy="274320"/>
-          </a:xfrm>
-          <a:prstGeom prst="rect">
-            <a:avLst/>
-          </a:prstGeom>
-          <a:noFill/>
-          <a:ln/>
-        </p:spPr>
-        <p:txBody>
-          <a:bodyPr wrap="square" lIns="0" tIns="0" rIns="0" bIns="0" rtlCol="0" anchor="ctr"/>
-          <a:lstStyle/>
-          <a:p>
-            <a:pPr algn="r" indent="0" marL="0">
-              <a:buNone/>
-            </a:pPr>
-            <a:r>
-              <a:rPr lang="en-US" sz="1000" dirty="0">
-                <a:solidFill>
-                  <a:srgbClr val="5F6B66"/>
-                </a:solidFill>
-                <a:latin typeface="Calibri" pitchFamily="34" charset="0"/>
-                <a:ea typeface="Calibri" pitchFamily="34" charset="-122"/>
-                <a:cs typeface="Calibri" pitchFamily="34" charset="-120"/>
-              </a:rPr>
-              <a:t>7 / 8</a:t>
+              <a:t>7 / 10</a:t>
             </a:r>
             <a:endParaRPr lang="en-US" sz="1000" dirty="0"/>
           </a:p>
@@ -6131,7 +8186,7 @@
     <p:bg>
       <p:bgPr>
         <a:solidFill>
-          <a:srgbClr val="1F3A32"/>
+          <a:srgbClr val="FFFFFF"/>
         </a:solidFill>
       </p:bgPr>
     </p:bg>
@@ -6157,8 +8212,8 @@
         </p:nvSpPr>
         <p:spPr>
           <a:xfrm>
-            <a:off x="548640" y="868680"/>
-            <a:ext cx="10515600" cy="914400"/>
+            <a:off x="548640" y="411480"/>
+            <a:ext cx="11094415" cy="914400"/>
           </a:xfrm>
           <a:prstGeom prst="rect">
             <a:avLst/>
@@ -6174,17 +8229,17 @@
               <a:buNone/>
             </a:pPr>
             <a:r>
-              <a:rPr lang="en-US" sz="3000" b="1" dirty="0">
-                <a:solidFill>
-                  <a:srgbClr val="F7F7F2"/>
+              <a:rPr lang="en-US" sz="3200" b="1" dirty="0">
+                <a:solidFill>
+                  <a:srgbClr val="1E2B27"/>
                 </a:solidFill>
                 <a:latin typeface="Cambria" pitchFamily="34" charset="0"/>
                 <a:ea typeface="Cambria" pitchFamily="34" charset="-122"/>
                 <a:cs typeface="Cambria" pitchFamily="34" charset="-120"/>
               </a:rPr>
-              <a:t>A informação para agir antes já existe.</a:t>
-            </a:r>
-            <a:endParaRPr lang="en-US" sz="3000" dirty="0"/>
+              <a:t>A meta de 2030 é alcançável, mas não está garantida</a:t>
+            </a:r>
+            <a:endParaRPr lang="en-US" sz="3200" dirty="0"/>
           </a:p>
         </p:txBody>
       </p:sp>
@@ -6196,8 +8251,8 @@
         </p:nvSpPr>
         <p:spPr>
           <a:xfrm>
-            <a:off x="548640" y="1783080"/>
-            <a:ext cx="10515600" cy="914400"/>
+            <a:off x="548640" y="1508760"/>
+            <a:ext cx="6766560" cy="365760"/>
           </a:xfrm>
           <a:prstGeom prst="rect">
             <a:avLst/>
@@ -6213,42 +8268,319 @@
               <a:buNone/>
             </a:pPr>
             <a:r>
-              <a:rPr lang="en-US" sz="4000" b="1" dirty="0">
-                <a:solidFill>
-                  <a:srgbClr val="F2B705"/>
+              <a:rPr lang="en-US" sz="1400" b="1" dirty="0">
+                <a:solidFill>
+                  <a:srgbClr val="5F6B66"/>
+                </a:solidFill>
+                <a:latin typeface="Calibri" pitchFamily="34" charset="0"/>
+                <a:ea typeface="Calibri" pitchFamily="34" charset="-122"/>
+                <a:cs typeface="Calibri" pitchFamily="34" charset="-120"/>
+              </a:rPr>
+              <a:t>Brasil: observado em 2024–2025 e projeção até 2030 (%)</a:t>
+            </a:r>
+            <a:endParaRPr lang="en-US" sz="1400" dirty="0"/>
+          </a:p>
+        </p:txBody>
+      </p:sp>
+      <p:graphicFrame>
+        <p:nvGraphicFramePr>
+          <p:cNvPr id="4" name="Chart 0" descr=""/>
+          <p:cNvGraphicFramePr/>
+          <p:nvPr/>
+        </p:nvGraphicFramePr>
+        <p:xfrm>
+          <a:off x="548640" y="1874520"/>
+          <a:ext cx="6766560" cy="4160520"/>
+        </p:xfrm>
+        <a:graphic xmlns:a="http://schemas.openxmlformats.org/drawingml/2006/main">
+          <a:graphicData uri="http://schemas.openxmlformats.org/drawingml/2006/chart">
+            <c:chart xmlns:c="http://schemas.openxmlformats.org/drawingml/2006/chart" r:id="rId1"/>
+          </a:graphicData>
+        </a:graphic>
+      </p:graphicFrame>
+      <p:sp>
+        <p:nvSpPr>
+          <p:cNvPr id="5" name="Text 2"/>
+          <p:cNvSpPr txBox="1"/>
+          <p:nvPr/>
+        </p:nvSpPr>
+        <p:spPr>
+          <a:xfrm>
+            <a:off x="7818120" y="1691640"/>
+            <a:ext cx="3840480" cy="1188720"/>
+          </a:xfrm>
+          <a:prstGeom prst="rect">
+            <a:avLst/>
+          </a:prstGeom>
+          <a:noFill/>
+          <a:ln/>
+        </p:spPr>
+        <p:txBody>
+          <a:bodyPr wrap="square" lIns="0" tIns="0" rIns="0" bIns="0" rtlCol="0" anchor="ctr"/>
+          <a:lstStyle/>
+          <a:p>
+            <a:pPr indent="0" marL="0">
+              <a:buNone/>
+            </a:pPr>
+            <a:r>
+              <a:rPr lang="en-US" sz="7200" b="1" dirty="0">
+                <a:solidFill>
+                  <a:srgbClr val="C8423F"/>
                 </a:solidFill>
                 <a:latin typeface="Cambria" pitchFamily="34" charset="0"/>
                 <a:ea typeface="Cambria" pitchFamily="34" charset="-122"/>
                 <a:cs typeface="Cambria" pitchFamily="34" charset="-120"/>
               </a:rPr>
-              <a:t>A pergunta é o que fazemos com ela.</a:t>
-            </a:r>
-            <a:endParaRPr lang="en-US" sz="4000" dirty="0"/>
-          </a:p>
-        </p:txBody>
-      </p:sp>
-      <p:sp>
-        <p:nvSpPr>
-          <p:cNvPr id="4" name="Shape 2"/>
+              <a:t>45%</a:t>
+            </a:r>
+            <a:endParaRPr lang="en-US" sz="7200" dirty="0"/>
+          </a:p>
+        </p:txBody>
+      </p:sp>
+      <p:sp>
+        <p:nvSpPr>
+          <p:cNvPr id="6" name="Text 3"/>
+          <p:cNvSpPr txBox="1"/>
+          <p:nvPr/>
+        </p:nvSpPr>
+        <p:spPr>
+          <a:xfrm>
+            <a:off x="7818120" y="2880360"/>
+            <a:ext cx="3840480" cy="822960"/>
+          </a:xfrm>
+          <a:prstGeom prst="rect">
+            <a:avLst/>
+          </a:prstGeom>
+          <a:noFill/>
+          <a:ln/>
+        </p:spPr>
+        <p:txBody>
+          <a:bodyPr wrap="square" lIns="0" tIns="0" rIns="0" bIns="0" rtlCol="0" anchor="t"/>
+          <a:lstStyle/>
+          <a:p>
+            <a:pPr indent="0" marL="0">
+              <a:buNone/>
+            </a:pPr>
+            <a:r>
+              <a:rPr lang="en-US" sz="1800" b="1" dirty="0">
+                <a:solidFill>
+                  <a:srgbClr val="1E2B27"/>
+                </a:solidFill>
+                <a:latin typeface="Calibri" pitchFamily="34" charset="0"/>
+                <a:ea typeface="Calibri" pitchFamily="34" charset="-122"/>
+                <a:cs typeface="Calibri" pitchFamily="34" charset="-120"/>
+              </a:rPr>
+              <a:t>dos municípios chegam à meta de 2030 no ritmo atual</a:t>
+            </a:r>
+            <a:endParaRPr lang="en-US" sz="1800" dirty="0"/>
+          </a:p>
+        </p:txBody>
+      </p:sp>
+      <p:sp>
+        <p:nvSpPr>
+          <p:cNvPr id="7" name="Text 4"/>
+          <p:cNvSpPr txBox="1"/>
+          <p:nvPr/>
+        </p:nvSpPr>
+        <p:spPr>
+          <a:xfrm>
+            <a:off x="7818120" y="3931920"/>
+            <a:ext cx="3840480" cy="1920240"/>
+          </a:xfrm>
+          <a:prstGeom prst="rect">
+            <a:avLst/>
+          </a:prstGeom>
+          <a:noFill/>
+          <a:ln/>
+        </p:spPr>
+        <p:txBody>
+          <a:bodyPr wrap="square" lIns="0" tIns="0" rIns="0" bIns="0" rtlCol="0" anchor="t"/>
+          <a:lstStyle/>
+          <a:p>
+            <a:pPr indent="0" marL="0">
+              <a:buNone/>
+            </a:pPr>
+            <a:r>
+              <a:rPr lang="en-US" sz="1500" dirty="0">
+                <a:solidFill>
+                  <a:srgbClr val="5F6B66"/>
+                </a:solidFill>
+                <a:latin typeface="Calibri" pitchFamily="34" charset="0"/>
+                <a:ea typeface="Calibri" pitchFamily="34" charset="-122"/>
+                <a:cs typeface="Calibri" pitchFamily="34" charset="-120"/>
+              </a:rPr>
+              <a:t>O país fecha 2030 em 81,9%, só 1,9 ponto acima da meta de 80%.</a:t>
+            </a:r>
+            <a:endParaRPr lang="en-US" sz="1500" dirty="0"/>
+          </a:p>
+          <a:p>
+            <a:pPr indent="0" marL="0">
+              <a:buNone/>
+            </a:pPr>
+            <a:r>
+              <a:rPr lang="en-US" sz="800" dirty="0">
+                <a:solidFill>
+                  <a:srgbClr val="5F6B66"/>
+                </a:solidFill>
+                <a:latin typeface="Calibri" pitchFamily="34" charset="0"/>
+                <a:ea typeface="Calibri" pitchFamily="34" charset="-122"/>
+                <a:cs typeface="Calibri" pitchFamily="34" charset="-120"/>
+              </a:rPr>
+              <a:t> </a:t>
+            </a:r>
+            <a:endParaRPr lang="en-US" sz="1500" dirty="0"/>
+          </a:p>
+          <a:p>
+            <a:pPr indent="0" marL="0">
+              <a:buNone/>
+            </a:pPr>
+            <a:r>
+              <a:rPr lang="en-US" sz="1500" dirty="0">
+                <a:solidFill>
+                  <a:srgbClr val="5F6B66"/>
+                </a:solidFill>
+                <a:latin typeface="Calibri" pitchFamily="34" charset="0"/>
+                <a:ea typeface="Calibri" pitchFamily="34" charset="-122"/>
+                <a:cs typeface="Calibri" pitchFamily="34" charset="-120"/>
+              </a:rPr>
+              <a:t>Qualquer desaceleração do ritmo atual coloca a meta nacional em risco.</a:t>
+            </a:r>
+            <a:endParaRPr lang="en-US" sz="1500" dirty="0"/>
+          </a:p>
+        </p:txBody>
+      </p:sp>
+      <p:sp>
+        <p:nvSpPr>
+          <p:cNvPr id="8" name="Text 5"/>
+          <p:cNvSpPr txBox="1"/>
+          <p:nvPr/>
+        </p:nvSpPr>
+        <p:spPr>
+          <a:xfrm>
+            <a:off x="10545775" y="6400800"/>
+            <a:ext cx="1097280" cy="274320"/>
+          </a:xfrm>
+          <a:prstGeom prst="rect">
+            <a:avLst/>
+          </a:prstGeom>
+          <a:noFill/>
+          <a:ln/>
+        </p:spPr>
+        <p:txBody>
+          <a:bodyPr wrap="square" lIns="0" tIns="0" rIns="0" bIns="0" rtlCol="0" anchor="ctr"/>
+          <a:lstStyle/>
+          <a:p>
+            <a:pPr algn="r" indent="0" marL="0">
+              <a:buNone/>
+            </a:pPr>
+            <a:r>
+              <a:rPr lang="en-US" sz="1000" dirty="0">
+                <a:solidFill>
+                  <a:srgbClr val="5F6B66"/>
+                </a:solidFill>
+                <a:latin typeface="Calibri" pitchFamily="34" charset="0"/>
+                <a:ea typeface="Calibri" pitchFamily="34" charset="-122"/>
+                <a:cs typeface="Calibri" pitchFamily="34" charset="-120"/>
+              </a:rPr>
+              <a:t>8 / 10</a:t>
+            </a:r>
+            <a:endParaRPr lang="en-US" sz="1000" dirty="0"/>
+          </a:p>
+        </p:txBody>
+      </p:sp>
+    </p:spTree>
+  </p:cSld>
+  <p:clrMapOvr>
+    <a:masterClrMapping/>
+  </p:clrMapOvr>
+</p:sld>
+</file>
+
+<file path=ppt/slides/slide9.xml><?xml version="1.0" encoding="utf-8"?>
+<p:sld xmlns:a="http://schemas.openxmlformats.org/drawingml/2006/main" xmlns:r="http://schemas.openxmlformats.org/officeDocument/2006/relationships" xmlns:p="http://schemas.openxmlformats.org/presentationml/2006/main">
+  <p:cSld name="Slide 9">
+    <p:bg>
+      <p:bgPr>
+        <a:solidFill>
+          <a:srgbClr val="FFFFFF"/>
+        </a:solidFill>
+      </p:bgPr>
+    </p:bg>
+    <p:spTree>
+      <p:nvGrpSpPr>
+        <p:cNvPr id="1" name=""/>
+        <p:cNvGrpSpPr/>
+        <p:nvPr/>
+      </p:nvGrpSpPr>
+      <p:grpSpPr>
+        <a:xfrm>
+          <a:off x="0" y="0"/>
+          <a:ext cx="0" cy="0"/>
+          <a:chOff x="0" y="0"/>
+          <a:chExt cx="0" cy="0"/>
+        </a:xfrm>
+      </p:grpSpPr>
+      <p:sp>
+        <p:nvSpPr>
+          <p:cNvPr id="2" name="Text 0"/>
+          <p:cNvSpPr txBox="1"/>
+          <p:nvPr/>
+        </p:nvSpPr>
+        <p:spPr>
+          <a:xfrm>
+            <a:off x="548640" y="411480"/>
+            <a:ext cx="11094415" cy="914400"/>
+          </a:xfrm>
+          <a:prstGeom prst="rect">
+            <a:avLst/>
+          </a:prstGeom>
+          <a:noFill/>
+          <a:ln/>
+        </p:spPr>
+        <p:txBody>
+          <a:bodyPr wrap="square" lIns="0" tIns="0" rIns="0" bIns="0" rtlCol="0" anchor="ctr"/>
+          <a:lstStyle/>
+          <a:p>
+            <a:pPr indent="0" marL="0">
+              <a:buNone/>
+            </a:pPr>
+            <a:r>
+              <a:rPr lang="en-US" sz="3200" b="1" dirty="0">
+                <a:solidFill>
+                  <a:srgbClr val="1E2B27"/>
+                </a:solidFill>
+                <a:latin typeface="Cambria" pitchFamily="34" charset="0"/>
+                <a:ea typeface="Cambria" pitchFamily="34" charset="-122"/>
+                <a:cs typeface="Cambria" pitchFamily="34" charset="-120"/>
+              </a:rPr>
+              <a:t>Como isso vira decisão de gestão</a:t>
+            </a:r>
+            <a:endParaRPr lang="en-US" sz="3200" dirty="0"/>
+          </a:p>
+        </p:txBody>
+      </p:sp>
+      <p:sp>
+        <p:nvSpPr>
+          <p:cNvPr id="3" name="Shape 1"/>
           <p:cNvSpPr/>
           <p:nvPr/>
         </p:nvSpPr>
         <p:spPr>
           <a:xfrm>
-            <a:off x="548640" y="3246120"/>
-            <a:ext cx="5349240" cy="1691640"/>
+            <a:off x="548640" y="1645920"/>
+            <a:ext cx="3511296" cy="3977640"/>
           </a:xfrm>
           <a:prstGeom prst="roundRect">
             <a:avLst>
-              <a:gd name="adj" fmla="val 5405"/>
+              <a:gd name="adj" fmla="val 2604"/>
             </a:avLst>
           </a:prstGeom>
           <a:solidFill>
-            <a:srgbClr val="2E5446"/>
+            <a:srgbClr val="E9F0ED"/>
           </a:solidFill>
           <a:ln w="12700">
             <a:solidFill>
-              <a:srgbClr val="2E5446"/>
+              <a:srgbClr val="E9F0ED"/>
             </a:solidFill>
             <a:prstDash val="solid"/>
           </a:ln>
@@ -6256,14 +8588,39 @@
       </p:sp>
       <p:sp>
         <p:nvSpPr>
+          <p:cNvPr id="4" name="Shape 2"/>
+          <p:cNvSpPr/>
+          <p:nvPr/>
+        </p:nvSpPr>
+        <p:spPr>
+          <a:xfrm>
+            <a:off x="868680" y="1965960"/>
+            <a:ext cx="566928" cy="566928"/>
+          </a:xfrm>
+          <a:prstGeom prst="ellipse">
+            <a:avLst/>
+          </a:prstGeom>
+          <a:solidFill>
+            <a:srgbClr val="F2B705"/>
+          </a:solidFill>
+          <a:ln w="12700">
+            <a:solidFill>
+              <a:srgbClr val="F2B705"/>
+            </a:solidFill>
+            <a:prstDash val="solid"/>
+          </a:ln>
+        </p:spPr>
+      </p:sp>
+      <p:sp>
+        <p:nvSpPr>
           <p:cNvPr id="5" name="Text 3"/>
           <p:cNvSpPr txBox="1"/>
           <p:nvPr/>
         </p:nvSpPr>
         <p:spPr>
           <a:xfrm>
-            <a:off x="868680" y="3474720"/>
-            <a:ext cx="4709160" cy="411480"/>
+            <a:off x="868680" y="1965960"/>
+            <a:ext cx="566928" cy="566928"/>
           </a:xfrm>
           <a:prstGeom prst="rect">
             <a:avLst/>
@@ -6275,21 +8632,21 @@
           <a:bodyPr wrap="square" lIns="0" tIns="0" rIns="0" bIns="0" rtlCol="0" anchor="ctr"/>
           <a:lstStyle/>
           <a:p>
-            <a:pPr indent="0" marL="0">
-              <a:buNone/>
-            </a:pPr>
-            <a:r>
-              <a:rPr lang="en-US" sz="1800" b="1" dirty="0">
-                <a:solidFill>
-                  <a:srgbClr val="F7F7F2"/>
+            <a:pPr algn="ctr" indent="0" marL="0">
+              <a:buNone/>
+            </a:pPr>
+            <a:r>
+              <a:rPr lang="en-US" sz="1700" b="1" dirty="0">
+                <a:solidFill>
+                  <a:srgbClr val="1F3A32"/>
                 </a:solidFill>
                 <a:latin typeface="Calibri" pitchFamily="34" charset="0"/>
                 <a:ea typeface="Calibri" pitchFamily="34" charset="-122"/>
                 <a:cs typeface="Calibri" pitchFamily="34" charset="-120"/>
               </a:rPr>
-              <a:t>Prioriza, não prediz destino</a:t>
-            </a:r>
-            <a:endParaRPr lang="en-US" sz="1800" dirty="0"/>
+              <a:t>01</a:t>
+            </a:r>
+            <a:endParaRPr lang="en-US" sz="1700" dirty="0"/>
           </a:p>
         </p:txBody>
       </p:sp>
@@ -6301,8 +8658,86 @@
         </p:nvSpPr>
         <p:spPr>
           <a:xfrm>
-            <a:off x="868680" y="3931920"/>
-            <a:ext cx="4709160" cy="868680"/>
+            <a:off x="1600200" y="1965960"/>
+            <a:ext cx="2231136" cy="566928"/>
+          </a:xfrm>
+          <a:prstGeom prst="rect">
+            <a:avLst/>
+          </a:prstGeom>
+          <a:noFill/>
+          <a:ln/>
+        </p:spPr>
+        <p:txBody>
+          <a:bodyPr wrap="square" lIns="0" tIns="0" rIns="0" bIns="0" rtlCol="0" anchor="ctr"/>
+          <a:lstStyle/>
+          <a:p>
+            <a:pPr indent="0" marL="0">
+              <a:buNone/>
+            </a:pPr>
+            <a:r>
+              <a:rPr lang="en-US" sz="2100" b="1" dirty="0">
+                <a:solidFill>
+                  <a:srgbClr val="1F3A32"/>
+                </a:solidFill>
+                <a:latin typeface="Cambria" pitchFamily="34" charset="0"/>
+                <a:ea typeface="Cambria" pitchFamily="34" charset="-122"/>
+                <a:cs typeface="Cambria" pitchFamily="34" charset="-120"/>
+              </a:rPr>
+              <a:t>Priorizar</a:t>
+            </a:r>
+            <a:endParaRPr lang="en-US" sz="2100" dirty="0"/>
+          </a:p>
+        </p:txBody>
+      </p:sp>
+      <p:sp>
+        <p:nvSpPr>
+          <p:cNvPr id="7" name="Text 5"/>
+          <p:cNvSpPr txBox="1"/>
+          <p:nvPr/>
+        </p:nvSpPr>
+        <p:spPr>
+          <a:xfrm>
+            <a:off x="868680" y="2834640"/>
+            <a:ext cx="2871216" cy="1097280"/>
+          </a:xfrm>
+          <a:prstGeom prst="rect">
+            <a:avLst/>
+          </a:prstGeom>
+          <a:noFill/>
+          <a:ln/>
+        </p:spPr>
+        <p:txBody>
+          <a:bodyPr wrap="square" lIns="0" tIns="0" rIns="0" bIns="0" rtlCol="0" anchor="ctr"/>
+          <a:lstStyle/>
+          <a:p>
+            <a:pPr indent="0" marL="0">
+              <a:buNone/>
+            </a:pPr>
+            <a:r>
+              <a:rPr lang="en-US" sz="5600" b="1" dirty="0">
+                <a:solidFill>
+                  <a:srgbClr val="3E7A62"/>
+                </a:solidFill>
+                <a:latin typeface="Cambria" pitchFamily="34" charset="0"/>
+                <a:ea typeface="Cambria" pitchFamily="34" charset="-122"/>
+                <a:cs typeface="Cambria" pitchFamily="34" charset="-120"/>
+              </a:rPr>
+              <a:t>3.121</a:t>
+            </a:r>
+            <a:endParaRPr lang="en-US" sz="5600" dirty="0"/>
+          </a:p>
+        </p:txBody>
+      </p:sp>
+      <p:sp>
+        <p:nvSpPr>
+          <p:cNvPr id="8" name="Text 6"/>
+          <p:cNvSpPr txBox="1"/>
+          <p:nvPr/>
+        </p:nvSpPr>
+        <p:spPr>
+          <a:xfrm>
+            <a:off x="868680" y="4023360"/>
+            <a:ext cx="2871216" cy="1463040"/>
           </a:xfrm>
           <a:prstGeom prst="rect">
             <a:avLst/>
@@ -6320,13 +8755,13 @@
             <a:r>
               <a:rPr lang="en-US" sz="1500" dirty="0">
                 <a:solidFill>
-                  <a:srgbClr val="C9D6D0"/>
+                  <a:srgbClr val="1E2B27"/>
                 </a:solidFill>
                 <a:latin typeface="Calibri" pitchFamily="34" charset="0"/>
                 <a:ea typeface="Calibri" pitchFamily="34" charset="-122"/>
                 <a:cs typeface="Calibri" pitchFamily="34" charset="-120"/>
               </a:rPr>
-              <a:t>Aponta onde o risco está concentrado no Brasil de hoje. Não extrapola para realidades que não viu.</a:t>
+              <a:t>municípios abaixo do patamar nacional, 1.411 em risco crítico — cada um com a explicação do porquê.</a:t>
             </a:r>
             <a:endParaRPr lang="en-US" sz="1500" dirty="0"/>
           </a:p>
@@ -6334,26 +8769,26 @@
       </p:sp>
       <p:sp>
         <p:nvSpPr>
-          <p:cNvPr id="7" name="Shape 5"/>
+          <p:cNvPr id="9" name="Shape 7"/>
           <p:cNvSpPr/>
           <p:nvPr/>
         </p:nvSpPr>
         <p:spPr>
           <a:xfrm>
-            <a:off x="6217920" y="3246120"/>
-            <a:ext cx="5349240" cy="1691640"/>
+            <a:off x="4334256" y="1645920"/>
+            <a:ext cx="3511296" cy="3977640"/>
           </a:xfrm>
           <a:prstGeom prst="roundRect">
             <a:avLst>
-              <a:gd name="adj" fmla="val 5405"/>
+              <a:gd name="adj" fmla="val 2604"/>
             </a:avLst>
           </a:prstGeom>
           <a:solidFill>
-            <a:srgbClr val="2E5446"/>
+            <a:srgbClr val="E9F0ED"/>
           </a:solidFill>
           <a:ln w="12700">
             <a:solidFill>
-              <a:srgbClr val="2E5446"/>
+              <a:srgbClr val="E9F0ED"/>
             </a:solidFill>
             <a:prstDash val="solid"/>
           </a:ln>
@@ -6361,14 +8796,39 @@
       </p:sp>
       <p:sp>
         <p:nvSpPr>
-          <p:cNvPr id="8" name="Text 6"/>
-          <p:cNvSpPr txBox="1"/>
-          <p:nvPr/>
-        </p:nvSpPr>
-        <p:spPr>
-          <a:xfrm>
-            <a:off x="6537960" y="3474720"/>
-            <a:ext cx="4709160" cy="411480"/>
+          <p:cNvPr id="10" name="Shape 8"/>
+          <p:cNvSpPr/>
+          <p:nvPr/>
+        </p:nvSpPr>
+        <p:spPr>
+          <a:xfrm>
+            <a:off x="4654296" y="1965960"/>
+            <a:ext cx="566928" cy="566928"/>
+          </a:xfrm>
+          <a:prstGeom prst="ellipse">
+            <a:avLst/>
+          </a:prstGeom>
+          <a:solidFill>
+            <a:srgbClr val="F2B705"/>
+          </a:solidFill>
+          <a:ln w="12700">
+            <a:solidFill>
+              <a:srgbClr val="F2B705"/>
+            </a:solidFill>
+            <a:prstDash val="solid"/>
+          </a:ln>
+        </p:spPr>
+      </p:sp>
+      <p:sp>
+        <p:nvSpPr>
+          <p:cNvPr id="11" name="Text 9"/>
+          <p:cNvSpPr txBox="1"/>
+          <p:nvPr/>
+        </p:nvSpPr>
+        <p:spPr>
+          <a:xfrm>
+            <a:off x="4654296" y="1965960"/>
+            <a:ext cx="566928" cy="566928"/>
           </a:xfrm>
           <a:prstGeom prst="rect">
             <a:avLst/>
@@ -6380,34 +8840,112 @@
           <a:bodyPr wrap="square" lIns="0" tIns="0" rIns="0" bIns="0" rtlCol="0" anchor="ctr"/>
           <a:lstStyle/>
           <a:p>
-            <a:pPr indent="0" marL="0">
-              <a:buNone/>
-            </a:pPr>
-            <a:r>
-              <a:rPr lang="en-US" sz="1800" b="1" dirty="0">
-                <a:solidFill>
-                  <a:srgbClr val="F7F7F2"/>
+            <a:pPr algn="ctr" indent="0" marL="0">
+              <a:buNone/>
+            </a:pPr>
+            <a:r>
+              <a:rPr lang="en-US" sz="1700" b="1" dirty="0">
+                <a:solidFill>
+                  <a:srgbClr val="1F3A32"/>
                 </a:solidFill>
                 <a:latin typeface="Calibri" pitchFamily="34" charset="0"/>
                 <a:ea typeface="Calibri" pitchFamily="34" charset="-122"/>
                 <a:cs typeface="Calibri" pitchFamily="34" charset="-120"/>
               </a:rPr>
-              <a:t>Mostra associação, não causa</a:t>
-            </a:r>
-            <a:endParaRPr lang="en-US" sz="1800" dirty="0"/>
-          </a:p>
-        </p:txBody>
-      </p:sp>
-      <p:sp>
-        <p:nvSpPr>
-          <p:cNvPr id="9" name="Text 7"/>
-          <p:cNvSpPr txBox="1"/>
-          <p:nvPr/>
-        </p:nvSpPr>
-        <p:spPr>
-          <a:xfrm>
-            <a:off x="6537960" y="3931920"/>
-            <a:ext cx="4709160" cy="868680"/>
+              <a:t>02</a:t>
+            </a:r>
+            <a:endParaRPr lang="en-US" sz="1700" dirty="0"/>
+          </a:p>
+        </p:txBody>
+      </p:sp>
+      <p:sp>
+        <p:nvSpPr>
+          <p:cNvPr id="12" name="Text 10"/>
+          <p:cNvSpPr txBox="1"/>
+          <p:nvPr/>
+        </p:nvSpPr>
+        <p:spPr>
+          <a:xfrm>
+            <a:off x="5385816" y="1965960"/>
+            <a:ext cx="2231136" cy="566928"/>
+          </a:xfrm>
+          <a:prstGeom prst="rect">
+            <a:avLst/>
+          </a:prstGeom>
+          <a:noFill/>
+          <a:ln/>
+        </p:spPr>
+        <p:txBody>
+          <a:bodyPr wrap="square" lIns="0" tIns="0" rIns="0" bIns="0" rtlCol="0" anchor="ctr"/>
+          <a:lstStyle/>
+          <a:p>
+            <a:pPr indent="0" marL="0">
+              <a:buNone/>
+            </a:pPr>
+            <a:r>
+              <a:rPr lang="en-US" sz="2100" b="1" dirty="0">
+                <a:solidFill>
+                  <a:srgbClr val="1F3A32"/>
+                </a:solidFill>
+                <a:latin typeface="Cambria" pitchFamily="34" charset="0"/>
+                <a:ea typeface="Cambria" pitchFamily="34" charset="-122"/>
+                <a:cs typeface="Cambria" pitchFamily="34" charset="-120"/>
+              </a:rPr>
+              <a:t>Personalizar</a:t>
+            </a:r>
+            <a:endParaRPr lang="en-US" sz="2100" dirty="0"/>
+          </a:p>
+        </p:txBody>
+      </p:sp>
+      <p:sp>
+        <p:nvSpPr>
+          <p:cNvPr id="13" name="Text 11"/>
+          <p:cNvSpPr txBox="1"/>
+          <p:nvPr/>
+        </p:nvSpPr>
+        <p:spPr>
+          <a:xfrm>
+            <a:off x="4654296" y="2834640"/>
+            <a:ext cx="2871216" cy="1097280"/>
+          </a:xfrm>
+          <a:prstGeom prst="rect">
+            <a:avLst/>
+          </a:prstGeom>
+          <a:noFill/>
+          <a:ln/>
+        </p:spPr>
+        <p:txBody>
+          <a:bodyPr wrap="square" lIns="0" tIns="0" rIns="0" bIns="0" rtlCol="0" anchor="ctr"/>
+          <a:lstStyle/>
+          <a:p>
+            <a:pPr indent="0" marL="0">
+              <a:buNone/>
+            </a:pPr>
+            <a:r>
+              <a:rPr lang="en-US" sz="5600" b="1" dirty="0">
+                <a:solidFill>
+                  <a:srgbClr val="3E7A62"/>
+                </a:solidFill>
+                <a:latin typeface="Cambria" pitchFamily="34" charset="0"/>
+                <a:ea typeface="Cambria" pitchFamily="34" charset="-122"/>
+                <a:cs typeface="Cambria" pitchFamily="34" charset="-120"/>
+              </a:rPr>
+              <a:t>4</a:t>
+            </a:r>
+            <a:endParaRPr lang="en-US" sz="5600" dirty="0"/>
+          </a:p>
+        </p:txBody>
+      </p:sp>
+      <p:sp>
+        <p:nvSpPr>
+          <p:cNvPr id="14" name="Text 12"/>
+          <p:cNvSpPr txBox="1"/>
+          <p:nvPr/>
+        </p:nvSpPr>
+        <p:spPr>
+          <a:xfrm>
+            <a:off x="4654296" y="4023360"/>
+            <a:ext cx="2871216" cy="1463040"/>
           </a:xfrm>
           <a:prstGeom prst="rect">
             <a:avLst/>
@@ -6425,13 +8963,13 @@
             <a:r>
               <a:rPr lang="en-US" sz="1500" dirty="0">
                 <a:solidFill>
-                  <a:srgbClr val="C9D6D0"/>
+                  <a:srgbClr val="1E2B27"/>
                 </a:solidFill>
                 <a:latin typeface="Calibri" pitchFamily="34" charset="0"/>
                 <a:ea typeface="Calibri" pitchFamily="34" charset="-122"/>
                 <a:cs typeface="Calibri" pitchFamily="34" charset="-120"/>
               </a:rPr>
-              <a:t>Os padrões são reais nos dados; provar causa exige outro desenho de pesquisa.</a:t>
+              <a:t>perfis de município, cada um respondendo melhor a uma intervenção diferente. Mesmo programa para todos desperdiça orçamento.</a:t>
             </a:r>
             <a:endParaRPr lang="en-US" sz="1500" dirty="0"/>
           </a:p>
@@ -6439,14 +8977,66 @@
       </p:sp>
       <p:sp>
         <p:nvSpPr>
-          <p:cNvPr id="10" name="Text 8"/>
-          <p:cNvSpPr txBox="1"/>
-          <p:nvPr/>
-        </p:nvSpPr>
-        <p:spPr>
-          <a:xfrm>
-            <a:off x="548640" y="5440680"/>
-            <a:ext cx="7315200" cy="731520"/>
+          <p:cNvPr id="15" name="Shape 13"/>
+          <p:cNvSpPr/>
+          <p:nvPr/>
+        </p:nvSpPr>
+        <p:spPr>
+          <a:xfrm>
+            <a:off x="8119872" y="1645920"/>
+            <a:ext cx="3511296" cy="3977640"/>
+          </a:xfrm>
+          <a:prstGeom prst="roundRect">
+            <a:avLst>
+              <a:gd name="adj" fmla="val 2604"/>
+            </a:avLst>
+          </a:prstGeom>
+          <a:solidFill>
+            <a:srgbClr val="E9F0ED"/>
+          </a:solidFill>
+          <a:ln w="12700">
+            <a:solidFill>
+              <a:srgbClr val="E9F0ED"/>
+            </a:solidFill>
+            <a:prstDash val="solid"/>
+          </a:ln>
+        </p:spPr>
+      </p:sp>
+      <p:sp>
+        <p:nvSpPr>
+          <p:cNvPr id="16" name="Shape 14"/>
+          <p:cNvSpPr/>
+          <p:nvPr/>
+        </p:nvSpPr>
+        <p:spPr>
+          <a:xfrm>
+            <a:off x="8439912" y="1965960"/>
+            <a:ext cx="566928" cy="566928"/>
+          </a:xfrm>
+          <a:prstGeom prst="ellipse">
+            <a:avLst/>
+          </a:prstGeom>
+          <a:solidFill>
+            <a:srgbClr val="F2B705"/>
+          </a:solidFill>
+          <a:ln w="12700">
+            <a:solidFill>
+              <a:srgbClr val="F2B705"/>
+            </a:solidFill>
+            <a:prstDash val="solid"/>
+          </a:ln>
+        </p:spPr>
+      </p:sp>
+      <p:sp>
+        <p:nvSpPr>
+          <p:cNvPr id="17" name="Text 15"/>
+          <p:cNvSpPr txBox="1"/>
+          <p:nvPr/>
+        </p:nvSpPr>
+        <p:spPr>
+          <a:xfrm>
+            <a:off x="8439912" y="1965960"/>
+            <a:ext cx="566928" cy="566928"/>
           </a:xfrm>
           <a:prstGeom prst="rect">
             <a:avLst/>
@@ -6458,36 +9048,136 @@
           <a:bodyPr wrap="square" lIns="0" tIns="0" rIns="0" bIns="0" rtlCol="0" anchor="ctr"/>
           <a:lstStyle/>
           <a:p>
-            <a:pPr indent="0" marL="0">
-              <a:buNone/>
-            </a:pPr>
-            <a:r>
-              <a:rPr lang="en-US" sz="1500" b="1" dirty="0">
-                <a:solidFill>
-                  <a:srgbClr val="F7F7F2"/>
+            <a:pPr algn="ctr" indent="0" marL="0">
+              <a:buNone/>
+            </a:pPr>
+            <a:r>
+              <a:rPr lang="en-US" sz="1700" b="1" dirty="0">
+                <a:solidFill>
+                  <a:srgbClr val="1F3A32"/>
                 </a:solidFill>
                 <a:latin typeface="Calibri" pitchFamily="34" charset="0"/>
                 <a:ea typeface="Calibri" pitchFamily="34" charset="-122"/>
                 <a:cs typeface="Calibri" pitchFamily="34" charset="-120"/>
               </a:rPr>
-              <a:t>Lucas Oliveira da Silva  ·  RM371958</a:t>
-            </a:r>
-            <a:endParaRPr lang="en-US" sz="1500" dirty="0"/>
-          </a:p>
+              <a:t>03</a:t>
+            </a:r>
+            <a:endParaRPr lang="en-US" sz="1700" dirty="0"/>
+          </a:p>
+        </p:txBody>
+      </p:sp>
+      <p:sp>
+        <p:nvSpPr>
+          <p:cNvPr id="18" name="Text 16"/>
+          <p:cNvSpPr txBox="1"/>
+          <p:nvPr/>
+        </p:nvSpPr>
+        <p:spPr>
+          <a:xfrm>
+            <a:off x="9171432" y="1965960"/>
+            <a:ext cx="2231136" cy="566928"/>
+          </a:xfrm>
+          <a:prstGeom prst="rect">
+            <a:avLst/>
+          </a:prstGeom>
+          <a:noFill/>
+          <a:ln/>
+        </p:spPr>
+        <p:txBody>
+          <a:bodyPr wrap="square" lIns="0" tIns="0" rIns="0" bIns="0" rtlCol="0" anchor="ctr"/>
+          <a:lstStyle/>
           <a:p>
             <a:pPr indent="0" marL="0">
               <a:buNone/>
             </a:pPr>
             <a:r>
+              <a:rPr lang="en-US" sz="2100" b="1" dirty="0">
+                <a:solidFill>
+                  <a:srgbClr val="1F3A32"/>
+                </a:solidFill>
+                <a:latin typeface="Cambria" pitchFamily="34" charset="0"/>
+                <a:ea typeface="Cambria" pitchFamily="34" charset="-122"/>
+                <a:cs typeface="Cambria" pitchFamily="34" charset="-120"/>
+              </a:rPr>
+              <a:t>Alocar verba</a:t>
+            </a:r>
+            <a:endParaRPr lang="en-US" sz="2100" dirty="0"/>
+          </a:p>
+        </p:txBody>
+      </p:sp>
+      <p:sp>
+        <p:nvSpPr>
+          <p:cNvPr id="19" name="Text 17"/>
+          <p:cNvSpPr txBox="1"/>
+          <p:nvPr/>
+        </p:nvSpPr>
+        <p:spPr>
+          <a:xfrm>
+            <a:off x="8439912" y="2834640"/>
+            <a:ext cx="2871216" cy="1097280"/>
+          </a:xfrm>
+          <a:prstGeom prst="rect">
+            <a:avLst/>
+          </a:prstGeom>
+          <a:noFill/>
+          <a:ln/>
+        </p:spPr>
+        <p:txBody>
+          <a:bodyPr wrap="square" lIns="0" tIns="0" rIns="0" bIns="0" rtlCol="0" anchor="ctr"/>
+          <a:lstStyle/>
+          <a:p>
+            <a:pPr indent="0" marL="0">
+              <a:buNone/>
+            </a:pPr>
+            <a:r>
+              <a:rPr lang="en-US" sz="5600" b="1" dirty="0">
+                <a:solidFill>
+                  <a:srgbClr val="3E7A62"/>
+                </a:solidFill>
+                <a:latin typeface="Cambria" pitchFamily="34" charset="0"/>
+                <a:ea typeface="Cambria" pitchFamily="34" charset="-122"/>
+                <a:cs typeface="Cambria" pitchFamily="34" charset="-120"/>
+              </a:rPr>
+              <a:t>42%</a:t>
+            </a:r>
+            <a:endParaRPr lang="en-US" sz="5600" dirty="0"/>
+          </a:p>
+        </p:txBody>
+      </p:sp>
+      <p:sp>
+        <p:nvSpPr>
+          <p:cNvPr id="20" name="Text 18"/>
+          <p:cNvSpPr txBox="1"/>
+          <p:nvPr/>
+        </p:nvSpPr>
+        <p:spPr>
+          <a:xfrm>
+            <a:off x="8439912" y="4023360"/>
+            <a:ext cx="2871216" cy="1463040"/>
+          </a:xfrm>
+          <a:prstGeom prst="rect">
+            <a:avLst/>
+          </a:prstGeom>
+          <a:noFill/>
+          <a:ln/>
+        </p:spPr>
+        <p:txBody>
+          <a:bodyPr wrap="square" lIns="0" tIns="0" rIns="0" bIns="0" rtlCol="0" anchor="t"/>
+          <a:lstStyle/>
+          <a:p>
+            <a:pPr indent="0" marL="0">
+              <a:buNone/>
+            </a:pPr>
+            <a:r>
               <a:rPr lang="en-US" sz="1500" dirty="0">
                 <a:solidFill>
-                  <a:srgbClr val="9FB5AC"/>
+                  <a:srgbClr val="1E2B27"/>
                 </a:solidFill>
                 <a:latin typeface="Calibri" pitchFamily="34" charset="0"/>
                 <a:ea typeface="Calibri" pitchFamily="34" charset="-122"/>
                 <a:cs typeface="Calibri" pitchFamily="34" charset="-120"/>
               </a:rPr>
-              <a:t>github.com/Luodev/1IAST-Fase3</a:t>
+              <a:t>é a taxa média dos 1.200 municípios que o orçamento simulado alcança, contra 63% no país.</a:t>
             </a:r>
             <a:endParaRPr lang="en-US" sz="1500" dirty="0"/>
           </a:p>
@@ -6495,7 +9185,7 @@
       </p:sp>
       <p:sp>
         <p:nvSpPr>
-          <p:cNvPr id="11" name="Text 9"/>
+          <p:cNvPr id="21" name="Text 19"/>
           <p:cNvSpPr txBox="1"/>
           <p:nvPr/>
         </p:nvSpPr>
@@ -6520,13 +9210,13 @@
             <a:r>
               <a:rPr lang="en-US" sz="1000" dirty="0">
                 <a:solidFill>
-                  <a:srgbClr val="9FB5AC"/>
+                  <a:srgbClr val="5F6B66"/>
                 </a:solidFill>
                 <a:latin typeface="Calibri" pitchFamily="34" charset="0"/>
                 <a:ea typeface="Calibri" pitchFamily="34" charset="-122"/>
                 <a:cs typeface="Calibri" pitchFamily="34" charset="-120"/>
               </a:rPr>
-              <a:t>8 / 8</a:t>
+              <a:t>9 / 10</a:t>
             </a:r>
             <a:endParaRPr lang="en-US" sz="1000" dirty="0"/>
           </a:p>
